--- a/Mini_Jira_UseCases_EN.pptx
+++ b/Mini_Jira_UseCases_EN.pptx
@@ -136,7 +136,7 @@
       </p:grpSpPr>
       <p:sp>
         <p:nvSpPr>
-          <p:cNvPr id="7869735" name="Header Placeholder 1"/>
+          <p:cNvPr id="1448466175" name="Header Placeholder 1"/>
           <p:cNvSpPr>
             <a:spLocks noGrp="1"/>
           </p:cNvSpPr>
@@ -170,7 +170,7 @@
       </p:sp>
       <p:sp>
         <p:nvSpPr>
-          <p:cNvPr id="684870835" name="Date Placeholder 2"/>
+          <p:cNvPr id="1909927072" name="Date Placeholder 2"/>
           <p:cNvSpPr>
             <a:spLocks noGrp="1"/>
           </p:cNvSpPr>
@@ -208,7 +208,7 @@
       </p:sp>
       <p:sp>
         <p:nvSpPr>
-          <p:cNvPr id="197642682" name="Slide Image Placeholder 3"/>
+          <p:cNvPr id="1284827244" name="Slide Image Placeholder 3"/>
           <p:cNvSpPr>
             <a:spLocks noChangeAspect="1" noGrp="1" noRot="1"/>
           </p:cNvSpPr>
@@ -244,7 +244,7 @@
       </p:sp>
       <p:sp>
         <p:nvSpPr>
-          <p:cNvPr id="1823312997" name="Notes Placeholder 4"/>
+          <p:cNvPr id="432788604" name="Notes Placeholder 4"/>
           <p:cNvSpPr>
             <a:spLocks noGrp="1"/>
           </p:cNvSpPr>
@@ -318,7 +318,7 @@
       </p:sp>
       <p:sp>
         <p:nvSpPr>
-          <p:cNvPr id="655812426" name="Footer Placeholder 5"/>
+          <p:cNvPr id="2081546832" name="Footer Placeholder 5"/>
           <p:cNvSpPr>
             <a:spLocks noGrp="1"/>
           </p:cNvSpPr>
@@ -352,7 +352,7 @@
       </p:sp>
       <p:sp>
         <p:nvSpPr>
-          <p:cNvPr id="62218768" name="Slide Number Placeholder 6"/>
+          <p:cNvPr id="1971910686" name="Slide Number Placeholder 6"/>
           <p:cNvSpPr>
             <a:spLocks noGrp="1"/>
           </p:cNvSpPr>
@@ -505,7 +505,7 @@
       </p:grpSpPr>
       <p:sp>
         <p:nvSpPr>
-          <p:cNvPr id="1769781461" name="Slide Image Placeholder 1"/>
+          <p:cNvPr id="1802821340" name="Slide Image Placeholder 1"/>
           <p:cNvSpPr>
             <a:spLocks noChangeAspect="1" noGrp="1" noRot="1"/>
           </p:cNvSpPr>
@@ -517,7 +517,7 @@
       </p:sp>
       <p:sp>
         <p:nvSpPr>
-          <p:cNvPr id="88332176" name="Notes Placeholder 2"/>
+          <p:cNvPr id="1275289429" name="Notes Placeholder 2"/>
           <p:cNvSpPr>
             <a:spLocks noGrp="1"/>
           </p:cNvSpPr>
@@ -539,7 +539,7 @@
       </p:sp>
       <p:sp>
         <p:nvSpPr>
-          <p:cNvPr id="1020926687" name="Slide Number Placeholder 3"/>
+          <p:cNvPr id="864888261" name="Slide Number Placeholder 3"/>
           <p:cNvSpPr>
             <a:spLocks noGrp="1"/>
           </p:cNvSpPr>
@@ -590,7 +590,7 @@
       </p:grpSpPr>
       <p:sp>
         <p:nvSpPr>
-          <p:cNvPr id="1853197940" name="Slide Image Placeholder 1"/>
+          <p:cNvPr id="59038424" name="Slide Image Placeholder 1"/>
           <p:cNvSpPr>
             <a:spLocks noChangeAspect="1" noGrp="1" noRot="1"/>
           </p:cNvSpPr>
@@ -602,7 +602,7 @@
       </p:sp>
       <p:sp>
         <p:nvSpPr>
-          <p:cNvPr id="1805668588" name="Notes Placeholder 2"/>
+          <p:cNvPr id="1155407644" name="Notes Placeholder 2"/>
           <p:cNvSpPr>
             <a:spLocks noGrp="1"/>
           </p:cNvSpPr>
@@ -624,7 +624,7 @@
       </p:sp>
       <p:sp>
         <p:nvSpPr>
-          <p:cNvPr id="2138243503" name="Slide Number Placeholder 3"/>
+          <p:cNvPr id="631229081" name="Slide Number Placeholder 3"/>
           <p:cNvSpPr>
             <a:spLocks noGrp="1"/>
           </p:cNvSpPr>
@@ -675,7 +675,7 @@
       </p:grpSpPr>
       <p:sp>
         <p:nvSpPr>
-          <p:cNvPr id="997937401" name="Slide Image Placeholder 1"/>
+          <p:cNvPr id="190872768" name="Slide Image Placeholder 1"/>
           <p:cNvSpPr>
             <a:spLocks noChangeAspect="1" noGrp="1" noRot="1"/>
           </p:cNvSpPr>
@@ -687,7 +687,7 @@
       </p:sp>
       <p:sp>
         <p:nvSpPr>
-          <p:cNvPr id="716413589" name="Notes Placeholder 2"/>
+          <p:cNvPr id="729317970" name="Notes Placeholder 2"/>
           <p:cNvSpPr>
             <a:spLocks noGrp="1"/>
           </p:cNvSpPr>
@@ -709,7 +709,7 @@
       </p:sp>
       <p:sp>
         <p:nvSpPr>
-          <p:cNvPr id="2122535440" name="Slide Number Placeholder 3"/>
+          <p:cNvPr id="379107688" name="Slide Number Placeholder 3"/>
           <p:cNvSpPr>
             <a:spLocks noGrp="1"/>
           </p:cNvSpPr>
@@ -760,7 +760,7 @@
       </p:grpSpPr>
       <p:sp>
         <p:nvSpPr>
-          <p:cNvPr id="1533494555" name="Slide Image Placeholder 1"/>
+          <p:cNvPr id="16220760" name="Slide Image Placeholder 1"/>
           <p:cNvSpPr>
             <a:spLocks noChangeAspect="1" noGrp="1" noRot="1"/>
           </p:cNvSpPr>
@@ -772,7 +772,7 @@
       </p:sp>
       <p:sp>
         <p:nvSpPr>
-          <p:cNvPr id="1937705317" name="Notes Placeholder 2"/>
+          <p:cNvPr id="467453163" name="Notes Placeholder 2"/>
           <p:cNvSpPr>
             <a:spLocks noGrp="1"/>
           </p:cNvSpPr>
@@ -794,7 +794,7 @@
       </p:sp>
       <p:sp>
         <p:nvSpPr>
-          <p:cNvPr id="1002013155" name="Slide Number Placeholder 3"/>
+          <p:cNvPr id="1838053952" name="Slide Number Placeholder 3"/>
           <p:cNvSpPr>
             <a:spLocks noGrp="1"/>
           </p:cNvSpPr>
@@ -845,7 +845,7 @@
       </p:grpSpPr>
       <p:sp>
         <p:nvSpPr>
-          <p:cNvPr id="341584626" name="Slide Image Placeholder 1"/>
+          <p:cNvPr id="1278989252" name="Slide Image Placeholder 1"/>
           <p:cNvSpPr>
             <a:spLocks noChangeAspect="1" noGrp="1" noRot="1"/>
           </p:cNvSpPr>
@@ -857,7 +857,7 @@
       </p:sp>
       <p:sp>
         <p:nvSpPr>
-          <p:cNvPr id="1912954796" name="Notes Placeholder 2"/>
+          <p:cNvPr id="1879619462" name="Notes Placeholder 2"/>
           <p:cNvSpPr>
             <a:spLocks noGrp="1"/>
           </p:cNvSpPr>
@@ -879,7 +879,7 @@
       </p:sp>
       <p:sp>
         <p:nvSpPr>
-          <p:cNvPr id="1018779914" name="Slide Number Placeholder 3"/>
+          <p:cNvPr id="2109855585" name="Slide Number Placeholder 3"/>
           <p:cNvSpPr>
             <a:spLocks noGrp="1"/>
           </p:cNvSpPr>
@@ -930,7 +930,7 @@
       </p:grpSpPr>
       <p:sp>
         <p:nvSpPr>
-          <p:cNvPr id="1804020062" name="Slide Image Placeholder 1"/>
+          <p:cNvPr id="1395468940" name="Slide Image Placeholder 1"/>
           <p:cNvSpPr>
             <a:spLocks noChangeAspect="1" noGrp="1" noRot="1"/>
           </p:cNvSpPr>
@@ -942,7 +942,7 @@
       </p:sp>
       <p:sp>
         <p:nvSpPr>
-          <p:cNvPr id="682842721" name="Notes Placeholder 2"/>
+          <p:cNvPr id="1214058414" name="Notes Placeholder 2"/>
           <p:cNvSpPr>
             <a:spLocks noGrp="1"/>
           </p:cNvSpPr>
@@ -964,7 +964,7 @@
       </p:sp>
       <p:sp>
         <p:nvSpPr>
-          <p:cNvPr id="1061202914" name="Slide Number Placeholder 3"/>
+          <p:cNvPr id="283981755" name="Slide Number Placeholder 3"/>
           <p:cNvSpPr>
             <a:spLocks noGrp="1"/>
           </p:cNvSpPr>
@@ -980,9 +980,9 @@
             <a:pPr>
               <a:defRPr/>
             </a:pPr>
-            <a:fld id="{F7021451-1387-4CA6-816F-3879F97B5CBC}" type="slidenum">
+            <a:fld id="{2D5EA9D8-4FF6-51C5-5AC8-B25BE3405DB0}" type="slidenum">
               <a:rPr lang="en-US"/>
-              <a:t>6</a:t>
+              <a:t/>
             </a:fld>
             <a:endParaRPr lang="en-US"/>
           </a:p>
@@ -1329,7 +1329,7 @@
       </p:grpSpPr>
       <p:sp>
         <p:nvSpPr>
-          <p:cNvPr id="242852249" name="Shape 0"/>
+          <p:cNvPr id="1995395096" name="Shape 0"/>
           <p:cNvSpPr/>
           <p:nvPr/>
         </p:nvSpPr>
@@ -1354,7 +1354,7 @@
       </p:sp>
       <p:sp>
         <p:nvSpPr>
-          <p:cNvPr id="50680768" name="Shape 1"/>
+          <p:cNvPr id="1355487742" name="Shape 1"/>
           <p:cNvSpPr/>
           <p:nvPr/>
         </p:nvSpPr>
@@ -1383,7 +1383,7 @@
       </p:sp>
       <p:sp>
         <p:nvSpPr>
-          <p:cNvPr id="1448286677" name="Shape 2"/>
+          <p:cNvPr id="1046387333" name="Shape 2"/>
           <p:cNvSpPr/>
           <p:nvPr/>
         </p:nvSpPr>
@@ -1412,7 +1412,7 @@
       </p:sp>
       <p:sp>
         <p:nvSpPr>
-          <p:cNvPr id="1662666728" name="Shape 3"/>
+          <p:cNvPr id="790583076" name="Shape 3"/>
           <p:cNvSpPr/>
           <p:nvPr/>
         </p:nvSpPr>
@@ -1441,7 +1441,7 @@
       </p:sp>
       <p:sp>
         <p:nvSpPr>
-          <p:cNvPr id="203418362" name="Shape 4"/>
+          <p:cNvPr id="1014509800" name="Shape 4"/>
           <p:cNvSpPr/>
           <p:nvPr/>
         </p:nvSpPr>
@@ -1470,7 +1470,7 @@
       </p:sp>
       <p:sp>
         <p:nvSpPr>
-          <p:cNvPr id="132566887" name="Shape 5"/>
+          <p:cNvPr id="322171524" name="Shape 5"/>
           <p:cNvSpPr/>
           <p:nvPr/>
         </p:nvSpPr>
@@ -1499,7 +1499,7 @@
       </p:sp>
       <p:sp>
         <p:nvSpPr>
-          <p:cNvPr id="1665329275" name="Text 6"/>
+          <p:cNvPr id="1242567" name="Text 6"/>
           <p:cNvSpPr/>
           <p:nvPr/>
         </p:nvSpPr>
@@ -1539,7 +1539,7 @@
       </p:sp>
       <p:sp>
         <p:nvSpPr>
-          <p:cNvPr id="2140552583" name="Text 7"/>
+          <p:cNvPr id="1788750679" name="Text 7"/>
           <p:cNvSpPr/>
           <p:nvPr/>
         </p:nvSpPr>
@@ -1579,7 +1579,7 @@
       </p:sp>
       <p:sp>
         <p:nvSpPr>
-          <p:cNvPr id="1889147496" name="Shape 8"/>
+          <p:cNvPr id="678774873" name="Shape 8"/>
           <p:cNvSpPr/>
           <p:nvPr/>
         </p:nvSpPr>
@@ -1604,7 +1604,7 @@
       </p:sp>
       <p:sp>
         <p:nvSpPr>
-          <p:cNvPr id="229931856" name="Text 9"/>
+          <p:cNvPr id="1875925878" name="Text 9"/>
           <p:cNvSpPr/>
           <p:nvPr/>
         </p:nvSpPr>
@@ -1684,7 +1684,7 @@
       </p:grpSpPr>
       <p:sp>
         <p:nvSpPr>
-          <p:cNvPr id="1316810590" name="Shape 0"/>
+          <p:cNvPr id="773521833" name="Shape 0"/>
           <p:cNvSpPr/>
           <p:nvPr/>
         </p:nvSpPr>
@@ -1709,7 +1709,7 @@
       </p:sp>
       <p:sp>
         <p:nvSpPr>
-          <p:cNvPr id="899003575" name="Text 1"/>
+          <p:cNvPr id="1039953068" name="Text 1"/>
           <p:cNvSpPr/>
           <p:nvPr/>
         </p:nvSpPr>
@@ -1749,7 +1749,7 @@
       </p:sp>
       <p:sp>
         <p:nvSpPr>
-          <p:cNvPr id="1058891386" name="Shape 2"/>
+          <p:cNvPr id="1501256739" name="Shape 2"/>
           <p:cNvSpPr/>
           <p:nvPr/>
         </p:nvSpPr>
@@ -1781,7 +1781,7 @@
       </p:sp>
       <p:sp>
         <p:nvSpPr>
-          <p:cNvPr id="1712102035" name="Shape 3"/>
+          <p:cNvPr id="1046645549" name="Shape 3"/>
           <p:cNvSpPr/>
           <p:nvPr/>
         </p:nvSpPr>
@@ -1806,7 +1806,7 @@
       </p:sp>
       <p:sp>
         <p:nvSpPr>
-          <p:cNvPr id="272107296" name="Shape 4"/>
+          <p:cNvPr id="537250111" name="Shape 4"/>
           <p:cNvSpPr/>
           <p:nvPr/>
         </p:nvSpPr>
@@ -1831,7 +1831,7 @@
       </p:sp>
       <p:pic>
         <p:nvPicPr>
-          <p:cNvPr id="1769937897" name="Image 0" descr="preencoded.png"/>
+          <p:cNvPr id="1960152050" name="Image 0" descr="preencoded.png"/>
           <p:cNvPicPr>
             <a:picLocks noChangeAspect="1"/>
           </p:cNvPicPr>
@@ -1853,7 +1853,7 @@
       </p:pic>
       <p:sp>
         <p:nvSpPr>
-          <p:cNvPr id="1356208621" name="Text 5"/>
+          <p:cNvPr id="724580646" name="Text 5"/>
           <p:cNvSpPr/>
           <p:nvPr/>
         </p:nvSpPr>
@@ -1893,7 +1893,7 @@
       </p:sp>
       <p:sp>
         <p:nvSpPr>
-          <p:cNvPr id="1212405915" name="Text 6"/>
+          <p:cNvPr id="974777039" name="Text 6"/>
           <p:cNvSpPr/>
           <p:nvPr/>
         </p:nvSpPr>
@@ -1944,7 +1944,7 @@
       </p:sp>
       <p:sp>
         <p:nvSpPr>
-          <p:cNvPr id="1683548471" name="Shape 7"/>
+          <p:cNvPr id="889153737" name="Shape 7"/>
           <p:cNvSpPr/>
           <p:nvPr/>
         </p:nvSpPr>
@@ -1969,7 +1969,7 @@
       </p:sp>
       <p:sp>
         <p:nvSpPr>
-          <p:cNvPr id="147781694" name="Shape 10"/>
+          <p:cNvPr id="1410850616" name="Shape 10"/>
           <p:cNvSpPr/>
           <p:nvPr/>
         </p:nvSpPr>
@@ -1994,7 +1994,7 @@
       </p:sp>
       <p:sp>
         <p:nvSpPr>
-          <p:cNvPr id="1835126226" name="Text 11"/>
+          <p:cNvPr id="304062884" name="Text 11"/>
           <p:cNvSpPr/>
           <p:nvPr/>
         </p:nvSpPr>
@@ -2056,7 +2056,7 @@
       </p:sp>
       <p:sp>
         <p:nvSpPr>
-          <p:cNvPr id="25655428" name="Shape 12"/>
+          <p:cNvPr id="1482679345" name="Shape 12"/>
           <p:cNvSpPr/>
           <p:nvPr/>
         </p:nvSpPr>
@@ -2081,7 +2081,7 @@
       </p:sp>
       <p:sp>
         <p:nvSpPr>
-          <p:cNvPr id="655043483" name="Text 13"/>
+          <p:cNvPr id="262049778" name="Text 13"/>
           <p:cNvSpPr/>
           <p:nvPr/>
         </p:nvSpPr>
@@ -2132,7 +2132,7 @@
       </p:sp>
       <p:sp>
         <p:nvSpPr>
-          <p:cNvPr id="479743291" name="Shape 14"/>
+          <p:cNvPr id="1194048368" name="Shape 14"/>
           <p:cNvSpPr/>
           <p:nvPr/>
         </p:nvSpPr>
@@ -2157,7 +2157,7 @@
       </p:sp>
       <p:sp>
         <p:nvSpPr>
-          <p:cNvPr id="1344214785" name="Text 15"/>
+          <p:cNvPr id="2145265093" name="Text 15"/>
           <p:cNvSpPr/>
           <p:nvPr/>
         </p:nvSpPr>
@@ -2197,7 +2197,7 @@
       </p:sp>
       <p:sp>
         <p:nvSpPr>
-          <p:cNvPr id="1401227986" name="Shape 16"/>
+          <p:cNvPr id="1331334855" name="Shape 16"/>
           <p:cNvSpPr/>
           <p:nvPr/>
         </p:nvSpPr>
@@ -2222,7 +2222,7 @@
       </p:sp>
       <p:sp>
         <p:nvSpPr>
-          <p:cNvPr id="1131456024" name="Text 17"/>
+          <p:cNvPr id="1046837355" name="Text 17"/>
           <p:cNvSpPr/>
           <p:nvPr/>
         </p:nvSpPr>
@@ -2262,7 +2262,7 @@
       </p:sp>
       <p:sp>
         <p:nvSpPr>
-          <p:cNvPr id="1560349673" name="Shape 18"/>
+          <p:cNvPr id="292566654" name="Shape 18"/>
           <p:cNvSpPr/>
           <p:nvPr/>
         </p:nvSpPr>
@@ -2287,7 +2287,7 @@
       </p:sp>
       <p:sp>
         <p:nvSpPr>
-          <p:cNvPr id="1423400204" name="Text 19"/>
+          <p:cNvPr id="2103279120" name="Text 19"/>
           <p:cNvSpPr/>
           <p:nvPr/>
         </p:nvSpPr>
@@ -2327,7 +2327,7 @@
       </p:sp>
       <p:sp>
         <p:nvSpPr>
-          <p:cNvPr id="342311925" name="Shape 20"/>
+          <p:cNvPr id="1518227369" name="Shape 20"/>
           <p:cNvSpPr/>
           <p:nvPr/>
         </p:nvSpPr>
@@ -2359,7 +2359,7 @@
       </p:sp>
       <p:sp>
         <p:nvSpPr>
-          <p:cNvPr id="1201799166" name="Shape 21"/>
+          <p:cNvPr id="1418336751" name="Shape 21"/>
           <p:cNvSpPr/>
           <p:nvPr/>
         </p:nvSpPr>
@@ -2384,7 +2384,7 @@
       </p:sp>
       <p:sp>
         <p:nvSpPr>
-          <p:cNvPr id="897199729" name="Shape 22"/>
+          <p:cNvPr id="2031279350" name="Shape 22"/>
           <p:cNvSpPr/>
           <p:nvPr/>
         </p:nvSpPr>
@@ -2409,7 +2409,7 @@
       </p:sp>
       <p:pic>
         <p:nvPicPr>
-          <p:cNvPr id="1025229322" name="Image 1" descr="preencoded.png"/>
+          <p:cNvPr id="1731946862" name="Image 1" descr="preencoded.png"/>
           <p:cNvPicPr>
             <a:picLocks noChangeAspect="1"/>
           </p:cNvPicPr>
@@ -2431,7 +2431,7 @@
       </p:pic>
       <p:sp>
         <p:nvSpPr>
-          <p:cNvPr id="1505281914" name="Text 23"/>
+          <p:cNvPr id="1021581857" name="Text 23"/>
           <p:cNvSpPr/>
           <p:nvPr/>
         </p:nvSpPr>
@@ -2471,7 +2471,7 @@
       </p:sp>
       <p:sp>
         <p:nvSpPr>
-          <p:cNvPr id="1528761150" name="Text 24"/>
+          <p:cNvPr id="1206680202" name="Text 24"/>
           <p:cNvSpPr/>
           <p:nvPr/>
         </p:nvSpPr>
@@ -2511,7 +2511,7 @@
       </p:sp>
       <p:sp>
         <p:nvSpPr>
-          <p:cNvPr id="687515438" name="Shape 25"/>
+          <p:cNvPr id="427221383" name="Shape 25"/>
           <p:cNvSpPr/>
           <p:nvPr/>
         </p:nvSpPr>
@@ -2536,7 +2536,7 @@
       </p:sp>
       <p:sp>
         <p:nvSpPr>
-          <p:cNvPr id="1716991147" name="Shape 26"/>
+          <p:cNvPr id="1103475466" name="Shape 26"/>
           <p:cNvSpPr/>
           <p:nvPr/>
         </p:nvSpPr>
@@ -2561,7 +2561,7 @@
       </p:sp>
       <p:sp>
         <p:nvSpPr>
-          <p:cNvPr id="1483074492" name="Text 27"/>
+          <p:cNvPr id="831923068" name="Text 27"/>
           <p:cNvSpPr/>
           <p:nvPr/>
         </p:nvSpPr>
@@ -2601,7 +2601,7 @@
       </p:sp>
       <p:sp>
         <p:nvSpPr>
-          <p:cNvPr id="263140652" name="Shape 28"/>
+          <p:cNvPr id="2133835782" name="Shape 28"/>
           <p:cNvSpPr/>
           <p:nvPr/>
         </p:nvSpPr>
@@ -2626,7 +2626,7 @@
       </p:sp>
       <p:sp>
         <p:nvSpPr>
-          <p:cNvPr id="1914050719" name="Text 29"/>
+          <p:cNvPr id="1383775520" name="Text 29"/>
           <p:cNvSpPr/>
           <p:nvPr/>
         </p:nvSpPr>
@@ -2666,7 +2666,7 @@
       </p:sp>
       <p:sp>
         <p:nvSpPr>
-          <p:cNvPr id="1698630010" name="Shape 36"/>
+          <p:cNvPr id="704237111" name="Shape 36"/>
           <p:cNvSpPr/>
           <p:nvPr/>
         </p:nvSpPr>
@@ -2698,7 +2698,7 @@
       </p:sp>
       <p:sp>
         <p:nvSpPr>
-          <p:cNvPr id="825444651" name="Shape 37"/>
+          <p:cNvPr id="1476666852" name="Shape 37"/>
           <p:cNvSpPr/>
           <p:nvPr/>
         </p:nvSpPr>
@@ -2723,7 +2723,7 @@
       </p:sp>
       <p:sp>
         <p:nvSpPr>
-          <p:cNvPr id="778056677" name="Shape 38"/>
+          <p:cNvPr id="1381881193" name="Shape 38"/>
           <p:cNvSpPr/>
           <p:nvPr/>
         </p:nvSpPr>
@@ -2748,7 +2748,7 @@
       </p:sp>
       <p:pic>
         <p:nvPicPr>
-          <p:cNvPr id="1453544163" name="Image 2" descr="preencoded.png"/>
+          <p:cNvPr id="738039720" name="Image 2" descr="preencoded.png"/>
           <p:cNvPicPr>
             <a:picLocks noChangeAspect="1"/>
           </p:cNvPicPr>
@@ -2770,7 +2770,7 @@
       </p:pic>
       <p:sp>
         <p:nvSpPr>
-          <p:cNvPr id="1278188704" name="Text 39"/>
+          <p:cNvPr id="1216332869" name="Text 39"/>
           <p:cNvSpPr/>
           <p:nvPr/>
         </p:nvSpPr>
@@ -2810,7 +2810,7 @@
       </p:sp>
       <p:sp>
         <p:nvSpPr>
-          <p:cNvPr id="2139831192" name="Text 40"/>
+          <p:cNvPr id="556513061" name="Text 40"/>
           <p:cNvSpPr/>
           <p:nvPr/>
         </p:nvSpPr>
@@ -2850,7 +2850,7 @@
       </p:sp>
       <p:sp>
         <p:nvSpPr>
-          <p:cNvPr id="2065044597" name="Shape 41"/>
+          <p:cNvPr id="1993128445" name="Shape 41"/>
           <p:cNvSpPr/>
           <p:nvPr/>
         </p:nvSpPr>
@@ -2875,7 +2875,7 @@
       </p:sp>
       <p:sp>
         <p:nvSpPr>
-          <p:cNvPr id="473119705" name="Shape 42"/>
+          <p:cNvPr id="1483849571" name="Shape 42"/>
           <p:cNvSpPr/>
           <p:nvPr/>
         </p:nvSpPr>
@@ -2900,7 +2900,7 @@
       </p:sp>
       <p:sp>
         <p:nvSpPr>
-          <p:cNvPr id="422279102" name="Text 43"/>
+          <p:cNvPr id="17267733" name="Text 43"/>
           <p:cNvSpPr/>
           <p:nvPr/>
         </p:nvSpPr>
@@ -2954,7 +2954,7 @@
         </p:grpSpPr>
         <p:sp>
           <p:nvSpPr>
-            <p:cNvPr id="741594809" name="Shape 8"/>
+            <p:cNvPr id="306292925" name="Shape 8"/>
             <p:cNvSpPr/>
             <p:nvPr/>
           </p:nvSpPr>
@@ -2979,7 +2979,7 @@
         </p:sp>
         <p:sp>
           <p:nvSpPr>
-            <p:cNvPr id="1961571879" name="Text 9"/>
+            <p:cNvPr id="755841879" name="Text 9"/>
             <p:cNvSpPr/>
             <p:nvPr/>
           </p:nvSpPr>
@@ -3190,7 +3190,7 @@
       </p:grpSpPr>
       <p:sp>
         <p:nvSpPr>
-          <p:cNvPr id="20502200" name="Shape 0"/>
+          <p:cNvPr id="2054985740" name="Shape 0"/>
           <p:cNvSpPr/>
           <p:nvPr/>
         </p:nvSpPr>
@@ -3215,7 +3215,7 @@
       </p:sp>
       <p:sp>
         <p:nvSpPr>
-          <p:cNvPr id="1331004540" name="Text 1"/>
+          <p:cNvPr id="474781143" name="Text 1"/>
           <p:cNvSpPr/>
           <p:nvPr/>
         </p:nvSpPr>
@@ -3255,7 +3255,7 @@
       </p:sp>
       <p:sp>
         <p:nvSpPr>
-          <p:cNvPr id="54937020" name="Shape 4"/>
+          <p:cNvPr id="2110078210" name="Shape 4"/>
           <p:cNvSpPr/>
           <p:nvPr/>
         </p:nvSpPr>
@@ -3287,7 +3287,7 @@
       </p:sp>
       <p:sp>
         <p:nvSpPr>
-          <p:cNvPr id="76704009" name="Shape 5"/>
+          <p:cNvPr id="163811406" name="Shape 5"/>
           <p:cNvSpPr/>
           <p:nvPr/>
         </p:nvSpPr>
@@ -3312,7 +3312,7 @@
       </p:sp>
       <p:sp>
         <p:nvSpPr>
-          <p:cNvPr id="498579848" name="Text 6"/>
+          <p:cNvPr id="705125844" name="Text 6"/>
           <p:cNvSpPr/>
           <p:nvPr/>
         </p:nvSpPr>
@@ -3366,7 +3366,7 @@
         </p:grpSpPr>
         <p:sp>
           <p:nvSpPr>
-            <p:cNvPr id="1318781646" name="Shape 2"/>
+            <p:cNvPr id="333009385" name="Shape 2"/>
             <p:cNvSpPr/>
             <p:nvPr/>
           </p:nvSpPr>
@@ -3391,7 +3391,7 @@
         </p:sp>
         <p:pic>
           <p:nvPicPr>
-            <p:cNvPr id="2032669314" name="Image 0" descr="preencoded.png"/>
+            <p:cNvPr id="1278296530" name="Image 0" descr="preencoded.png"/>
             <p:cNvPicPr>
               <a:picLocks noChangeAspect="1"/>
             </p:cNvPicPr>
@@ -3413,7 +3413,7 @@
         </p:pic>
         <p:sp>
           <p:nvSpPr>
-            <p:cNvPr id="610778660" name="Text 3"/>
+            <p:cNvPr id="1950202597" name="Text 3"/>
             <p:cNvSpPr/>
             <p:nvPr/>
           </p:nvSpPr>
@@ -3887,7 +3887,7 @@
         </p:grpSpPr>
         <p:sp>
           <p:nvSpPr>
-            <p:cNvPr id="1524067782" name="Shape 18"/>
+            <p:cNvPr id="1291783675" name="Shape 18"/>
             <p:cNvSpPr/>
             <p:nvPr/>
           </p:nvSpPr>
@@ -3919,7 +3919,7 @@
         </p:sp>
         <p:sp>
           <p:nvSpPr>
-            <p:cNvPr id="1556707634" name="Shape 19"/>
+            <p:cNvPr id="280942065" name="Shape 19"/>
             <p:cNvSpPr/>
             <p:nvPr/>
           </p:nvSpPr>
@@ -3944,7 +3944,7 @@
         </p:sp>
         <p:sp>
           <p:nvSpPr>
-            <p:cNvPr id="580046120" name="Text 20"/>
+            <p:cNvPr id="418197628" name="Text 20"/>
             <p:cNvSpPr/>
             <p:nvPr/>
           </p:nvSpPr>
@@ -3984,7 +3984,7 @@
         </p:sp>
         <p:sp>
           <p:nvSpPr>
-            <p:cNvPr id="991265597" name="Shape 21"/>
+            <p:cNvPr id="850082460" name="Shape 21"/>
             <p:cNvSpPr/>
             <p:nvPr/>
           </p:nvSpPr>
@@ -4009,7 +4009,7 @@
         </p:sp>
         <p:sp>
           <p:nvSpPr>
-            <p:cNvPr id="1270561963" name="Text 22"/>
+            <p:cNvPr id="656508617" name="Text 22"/>
             <p:cNvSpPr/>
             <p:nvPr/>
           </p:nvSpPr>
@@ -4049,7 +4049,7 @@
         </p:sp>
         <p:sp>
           <p:nvSpPr>
-            <p:cNvPr id="1052466958" name="Shape 23"/>
+            <p:cNvPr id="1403370260" name="Shape 23"/>
             <p:cNvSpPr/>
             <p:nvPr/>
           </p:nvSpPr>
@@ -4074,7 +4074,7 @@
         </p:sp>
         <p:sp>
           <p:nvSpPr>
-            <p:cNvPr id="1819491922" name="Text 24"/>
+            <p:cNvPr id="236570075" name="Text 24"/>
             <p:cNvSpPr/>
             <p:nvPr/>
           </p:nvSpPr>
@@ -4114,7 +4114,7 @@
         </p:sp>
         <p:sp>
           <p:nvSpPr>
-            <p:cNvPr id="1030659048" name="Shape 25"/>
+            <p:cNvPr id="1093327027" name="Shape 25"/>
             <p:cNvSpPr/>
             <p:nvPr/>
           </p:nvSpPr>
@@ -4139,7 +4139,7 @@
         </p:sp>
         <p:sp>
           <p:nvSpPr>
-            <p:cNvPr id="1191832387" name="Text 26"/>
+            <p:cNvPr id="1361639373" name="Text 26"/>
             <p:cNvSpPr/>
             <p:nvPr/>
           </p:nvSpPr>
@@ -4530,7 +4530,7 @@
         </p:grpSpPr>
         <p:sp>
           <p:nvSpPr>
-            <p:cNvPr id="528011123" name="Shape 7"/>
+            <p:cNvPr id="1930660542" name="Shape 7"/>
             <p:cNvSpPr/>
             <p:nvPr/>
           </p:nvSpPr>
@@ -4555,7 +4555,7 @@
         </p:sp>
         <p:sp>
           <p:nvSpPr>
-            <p:cNvPr id="1785069085" name="Text 8"/>
+            <p:cNvPr id="2147081096" name="Text 8"/>
             <p:cNvSpPr/>
             <p:nvPr/>
           </p:nvSpPr>
@@ -4610,7 +4610,7 @@
         </p:grpSpPr>
         <p:sp>
           <p:nvSpPr>
-            <p:cNvPr id="1979211759" name="Shape 9"/>
+            <p:cNvPr id="549664658" name="Shape 9"/>
             <p:cNvSpPr/>
             <p:nvPr/>
           </p:nvSpPr>
@@ -4635,7 +4635,7 @@
         </p:sp>
         <p:sp>
           <p:nvSpPr>
-            <p:cNvPr id="1392153501" name="Text 10"/>
+            <p:cNvPr id="800017141" name="Text 10"/>
             <p:cNvSpPr/>
             <p:nvPr/>
           </p:nvSpPr>
@@ -4690,7 +4690,7 @@
         </p:grpSpPr>
         <p:sp>
           <p:nvSpPr>
-            <p:cNvPr id="842049231" name="Shape 11"/>
+            <p:cNvPr id="1510410736" name="Shape 11"/>
             <p:cNvSpPr/>
             <p:nvPr/>
           </p:nvSpPr>
@@ -4715,7 +4715,7 @@
         </p:sp>
         <p:sp>
           <p:nvSpPr>
-            <p:cNvPr id="1579543859" name="Text 12"/>
+            <p:cNvPr id="1851490425" name="Text 12"/>
             <p:cNvSpPr/>
             <p:nvPr/>
           </p:nvSpPr>
@@ -4770,7 +4770,7 @@
         </p:grpSpPr>
         <p:sp>
           <p:nvSpPr>
-            <p:cNvPr id="666204305" name="Shape 13"/>
+            <p:cNvPr id="530412973" name="Shape 13"/>
             <p:cNvSpPr/>
             <p:nvPr/>
           </p:nvSpPr>
@@ -4795,7 +4795,7 @@
         </p:sp>
         <p:sp>
           <p:nvSpPr>
-            <p:cNvPr id="742410550" name="Text 14"/>
+            <p:cNvPr id="1432197281" name="Text 14"/>
             <p:cNvSpPr/>
             <p:nvPr/>
           </p:nvSpPr>
@@ -4850,7 +4850,7 @@
         </p:grpSpPr>
         <p:sp>
           <p:nvSpPr>
-            <p:cNvPr id="1708892105" name="Shape 15"/>
+            <p:cNvPr id="468185029" name="Shape 15"/>
             <p:cNvSpPr/>
             <p:nvPr/>
           </p:nvSpPr>
@@ -4875,7 +4875,7 @@
         </p:sp>
         <p:sp>
           <p:nvSpPr>
-            <p:cNvPr id="867616056" name="Text 16"/>
+            <p:cNvPr id="1004951449" name="Text 16"/>
             <p:cNvSpPr/>
             <p:nvPr/>
           </p:nvSpPr>
@@ -5563,7 +5563,7 @@
       </p:grpSpPr>
       <p:sp>
         <p:nvSpPr>
-          <p:cNvPr id="1694142647" name="Shape 0"/>
+          <p:cNvPr id="64757273" name="Shape 0"/>
           <p:cNvSpPr/>
           <p:nvPr/>
         </p:nvSpPr>
@@ -5588,7 +5588,7 @@
       </p:sp>
       <p:sp>
         <p:nvSpPr>
-          <p:cNvPr id="556027693" name="Text 1"/>
+          <p:cNvPr id="85538965" name="Text 1"/>
           <p:cNvSpPr/>
           <p:nvPr/>
         </p:nvSpPr>
@@ -5628,7 +5628,7 @@
       </p:sp>
       <p:sp>
         <p:nvSpPr>
-          <p:cNvPr id="154671945" name="Shape 2"/>
+          <p:cNvPr id="977289989" name="Shape 2"/>
           <p:cNvSpPr/>
           <p:nvPr/>
         </p:nvSpPr>
@@ -5653,7 +5653,7 @@
       </p:sp>
       <p:sp>
         <p:nvSpPr>
-          <p:cNvPr id="887903545" name="Text 3"/>
+          <p:cNvPr id="129688182" name="Text 3"/>
           <p:cNvSpPr/>
           <p:nvPr/>
         </p:nvSpPr>
@@ -5693,7 +5693,7 @@
       </p:sp>
       <p:sp>
         <p:nvSpPr>
-          <p:cNvPr id="1934465282" name="Shape 29"/>
+          <p:cNvPr id="275406440" name="Shape 29"/>
           <p:cNvSpPr/>
           <p:nvPr/>
         </p:nvSpPr>
@@ -5730,7 +5730,7 @@
         </p:grpSpPr>
         <p:sp>
           <p:nvSpPr>
-            <p:cNvPr id="1850870967" name="Shape 4"/>
+            <p:cNvPr id="1338645073" name="Shape 4"/>
             <p:cNvSpPr/>
             <p:nvPr/>
           </p:nvSpPr>
@@ -5755,7 +5755,7 @@
         </p:sp>
         <p:pic>
           <p:nvPicPr>
-            <p:cNvPr id="1429118464" name="Image 0" descr="preencoded.png"/>
+            <p:cNvPr id="889206525" name="Image 0" descr="preencoded.png"/>
             <p:cNvPicPr>
               <a:picLocks noChangeAspect="1"/>
             </p:cNvPicPr>
@@ -5777,7 +5777,7 @@
         </p:pic>
         <p:sp>
           <p:nvSpPr>
-            <p:cNvPr id="1550325664" name="Text 5"/>
+            <p:cNvPr id="372029419" name="Text 5"/>
             <p:cNvSpPr/>
             <p:nvPr/>
           </p:nvSpPr>
@@ -5832,7 +5832,7 @@
         </p:grpSpPr>
         <p:sp>
           <p:nvSpPr>
-            <p:cNvPr id="2087068412" name="Shape 14"/>
+            <p:cNvPr id="1125833184" name="Shape 14"/>
             <p:cNvSpPr/>
             <p:nvPr/>
           </p:nvSpPr>
@@ -5864,7 +5864,7 @@
         </p:sp>
         <p:sp>
           <p:nvSpPr>
-            <p:cNvPr id="291818101" name="Shape 15"/>
+            <p:cNvPr id="862933267" name="Shape 15"/>
             <p:cNvSpPr/>
             <p:nvPr/>
           </p:nvSpPr>
@@ -5889,7 +5889,7 @@
         </p:sp>
         <p:sp>
           <p:nvSpPr>
-            <p:cNvPr id="1121110501" name="Text 16"/>
+            <p:cNvPr id="1080850083" name="Text 16"/>
             <p:cNvSpPr/>
             <p:nvPr/>
           </p:nvSpPr>
@@ -5940,7 +5940,7 @@
         </p:sp>
         <p:sp>
           <p:nvSpPr>
-            <p:cNvPr id="397050111" name="Shape 17"/>
+            <p:cNvPr id="1034649681" name="Shape 17"/>
             <p:cNvSpPr/>
             <p:nvPr/>
           </p:nvSpPr>
@@ -5965,7 +5965,7 @@
         </p:sp>
         <p:sp>
           <p:nvSpPr>
-            <p:cNvPr id="1571470124" name="Text 18"/>
+            <p:cNvPr id="730646817" name="Text 18"/>
             <p:cNvSpPr/>
             <p:nvPr/>
           </p:nvSpPr>
@@ -6005,7 +6005,7 @@
         </p:sp>
         <p:sp>
           <p:nvSpPr>
-            <p:cNvPr id="1064008261" name="Shape 19"/>
+            <p:cNvPr id="1812917473" name="Shape 19"/>
             <p:cNvSpPr/>
             <p:nvPr/>
           </p:nvSpPr>
@@ -6030,7 +6030,7 @@
         </p:sp>
         <p:sp>
           <p:nvSpPr>
-            <p:cNvPr id="1988361401" name="Text 20"/>
+            <p:cNvPr id="171075944" name="Text 20"/>
             <p:cNvSpPr/>
             <p:nvPr/>
           </p:nvSpPr>
@@ -6108,7 +6108,7 @@
         </p:grpSpPr>
         <p:sp>
           <p:nvSpPr>
-            <p:cNvPr id="1192413400" name="Shape 6"/>
+            <p:cNvPr id="1261029091" name="Shape 6"/>
             <p:cNvSpPr/>
             <p:nvPr/>
           </p:nvSpPr>
@@ -6140,7 +6140,7 @@
         </p:sp>
         <p:sp>
           <p:nvSpPr>
-            <p:cNvPr id="82379806" name="Shape 7"/>
+            <p:cNvPr id="765204893" name="Shape 7"/>
             <p:cNvSpPr/>
             <p:nvPr/>
           </p:nvSpPr>
@@ -6165,7 +6165,7 @@
         </p:sp>
         <p:sp>
           <p:nvSpPr>
-            <p:cNvPr id="1088574176" name="Text 8"/>
+            <p:cNvPr id="83158466" name="Text 8"/>
             <p:cNvSpPr/>
             <p:nvPr/>
           </p:nvSpPr>
@@ -6205,7 +6205,7 @@
         </p:sp>
         <p:sp>
           <p:nvSpPr>
-            <p:cNvPr id="896674806" name="Shape 9"/>
+            <p:cNvPr id="454399619" name="Shape 9"/>
             <p:cNvSpPr/>
             <p:nvPr/>
           </p:nvSpPr>
@@ -6230,7 +6230,7 @@
         </p:sp>
         <p:sp>
           <p:nvSpPr>
-            <p:cNvPr id="219346311" name="Text 10"/>
+            <p:cNvPr id="606694358" name="Text 10"/>
             <p:cNvSpPr/>
             <p:nvPr/>
           </p:nvSpPr>
@@ -6270,7 +6270,7 @@
         </p:sp>
         <p:sp>
           <p:nvSpPr>
-            <p:cNvPr id="1326596751" name="Shape 11"/>
+            <p:cNvPr id="1628612922" name="Shape 11"/>
             <p:cNvSpPr/>
             <p:nvPr/>
           </p:nvSpPr>
@@ -6295,7 +6295,7 @@
         </p:sp>
         <p:sp>
           <p:nvSpPr>
-            <p:cNvPr id="1542093425" name="Text 12"/>
+            <p:cNvPr id="32523337" name="Text 12"/>
             <p:cNvSpPr/>
             <p:nvPr/>
           </p:nvSpPr>
@@ -6402,7 +6402,7 @@
       </p:grpSpPr>
       <p:sp>
         <p:nvSpPr>
-          <p:cNvPr id="1092538122" name="Shape 0"/>
+          <p:cNvPr id="1516136786" name="Shape 0"/>
           <p:cNvSpPr/>
           <p:nvPr/>
         </p:nvSpPr>
@@ -6427,7 +6427,7 @@
       </p:sp>
       <p:sp>
         <p:nvSpPr>
-          <p:cNvPr id="815607103" name="Text 1"/>
+          <p:cNvPr id="407909793" name="Text 1"/>
           <p:cNvSpPr/>
           <p:nvPr/>
         </p:nvSpPr>
@@ -6467,7 +6467,7 @@
       </p:sp>
       <p:sp>
         <p:nvSpPr>
-          <p:cNvPr id="1398344885" name="Shape 2"/>
+          <p:cNvPr id="1343833593" name="Shape 2"/>
           <p:cNvSpPr/>
           <p:nvPr/>
         </p:nvSpPr>
@@ -6492,7 +6492,7 @@
       </p:sp>
       <p:sp>
         <p:nvSpPr>
-          <p:cNvPr id="338305532" name="Text 3"/>
+          <p:cNvPr id="1287430715" name="Text 3"/>
           <p:cNvSpPr/>
           <p:nvPr/>
         </p:nvSpPr>
@@ -6546,7 +6546,7 @@
         </p:grpSpPr>
         <p:sp>
           <p:nvSpPr>
-            <p:cNvPr id="797020859" name="Shape 4"/>
+            <p:cNvPr id="2131607583" name="Shape 4"/>
             <p:cNvSpPr/>
             <p:nvPr/>
           </p:nvSpPr>
@@ -6571,7 +6571,7 @@
         </p:sp>
         <p:pic>
           <p:nvPicPr>
-            <p:cNvPr id="123755915" name="Image 0" descr="preencoded.png"/>
+            <p:cNvPr id="617636203" name="Image 0" descr="preencoded.png"/>
             <p:cNvPicPr>
               <a:picLocks noChangeAspect="1"/>
             </p:cNvPicPr>
@@ -6593,7 +6593,7 @@
         </p:pic>
         <p:sp>
           <p:nvSpPr>
-            <p:cNvPr id="2113143322" name="Text 5"/>
+            <p:cNvPr id="289418284" name="Text 5"/>
             <p:cNvSpPr/>
             <p:nvPr/>
           </p:nvSpPr>
@@ -7097,7 +7097,7 @@
       </p:grpSpPr>
       <p:sp>
         <p:nvSpPr>
-          <p:cNvPr id="662848488" name="Shape 0"/>
+          <p:cNvPr id="784719411" name="Shape 0"/>
           <p:cNvSpPr/>
           <p:nvPr/>
         </p:nvSpPr>
@@ -7122,7 +7122,7 @@
       </p:sp>
       <p:sp>
         <p:nvSpPr>
-          <p:cNvPr id="1572651422" name="Text 1"/>
+          <p:cNvPr id="1520641848" name="Text 1"/>
           <p:cNvSpPr/>
           <p:nvPr/>
         </p:nvSpPr>
@@ -7160,2852 +7160,3394 @@
           </a:p>
         </p:txBody>
       </p:sp>
-      <p:sp>
-        <p:nvSpPr>
-          <p:cNvPr id="572881692" name="Shape 2"/>
-          <p:cNvSpPr/>
+      <p:grpSp>
+        <p:nvGrpSpPr>
+          <p:cNvPr id="573649606" name=""/>
+          <p:cNvGrpSpPr/>
           <p:nvPr/>
-        </p:nvSpPr>
-        <p:spPr bwMode="auto">
-          <a:xfrm>
-            <a:off x="274320" y="749808"/>
-            <a:ext cx="4663440" cy="347472"/>
-          </a:xfrm>
-          <a:prstGeom prst="rect">
-            <a:avLst/>
-          </a:prstGeom>
-          <a:solidFill>
-            <a:srgbClr val="1A2B4A"/>
-          </a:solidFill>
-          <a:ln w="12700">
+        </p:nvGrpSpPr>
+        <p:grpSpPr bwMode="auto">
+          <a:xfrm flipH="0" flipV="0">
+            <a:off x="0" y="701687"/>
+            <a:ext cx="9168527" cy="4409319"/>
+            <a:chOff x="0" y="0"/>
+            <a:chExt cx="9168527" cy="4409319"/>
+          </a:xfrm>
+        </p:grpSpPr>
+        <p:sp>
+          <p:nvSpPr>
+            <p:cNvPr id="606992025" name="Shape 2"/>
+            <p:cNvSpPr/>
+            <p:nvPr/>
+          </p:nvSpPr>
+          <p:spPr bwMode="auto">
+            <a:xfrm>
+              <a:off x="0" y="0"/>
+              <a:ext cx="4699446" cy="321600"/>
+            </a:xfrm>
+            <a:prstGeom prst="rect">
+              <a:avLst/>
+            </a:prstGeom>
             <a:solidFill>
               <a:srgbClr val="1A2B4A"/>
             </a:solidFill>
-            <a:prstDash val="solid"/>
-          </a:ln>
-        </p:spPr>
-      </p:sp>
-      <p:sp>
-        <p:nvSpPr>
-          <p:cNvPr id="982671192" name="Text 3"/>
-          <p:cNvSpPr/>
-          <p:nvPr/>
-        </p:nvSpPr>
-        <p:spPr bwMode="auto">
-          <a:xfrm>
-            <a:off x="320040" y="749808"/>
-            <a:ext cx="4663440" cy="347472"/>
-          </a:xfrm>
-          <a:prstGeom prst="rect">
-            <a:avLst/>
-          </a:prstGeom>
-          <a:noFill/>
-          <a:ln/>
-        </p:spPr>
-        <p:txBody>
-          <a:bodyPr wrap="square" lIns="0" tIns="0" rIns="0" bIns="0" rtlCol="0" anchor="ctr"/>
-          <a:lstStyle/>
-          <a:p>
-            <a:pPr marL="0" indent="0" algn="l">
-              <a:buNone/>
-              <a:defRPr/>
-            </a:pPr>
-            <a:r>
-              <a:rPr lang="en-US" sz="1100" b="1">
-                <a:solidFill>
-                  <a:srgbClr val="FFFFFF"/>
-                </a:solidFill>
-                <a:latin typeface="Calibri"/>
-                <a:ea typeface="Calibri"/>
-                <a:cs typeface="Calibri"/>
-              </a:rPr>
-              <a:t>Feature / Use Case</a:t>
-            </a:r>
-            <a:endParaRPr lang="en-US" sz="1100"/>
-          </a:p>
-        </p:txBody>
-      </p:sp>
-      <p:sp>
-        <p:nvSpPr>
-          <p:cNvPr id="1723390461" name="Shape 4"/>
-          <p:cNvSpPr/>
-          <p:nvPr/>
-        </p:nvSpPr>
-        <p:spPr bwMode="auto">
-          <a:xfrm>
-            <a:off x="5074920" y="749808"/>
-            <a:ext cx="1325880" cy="347472"/>
-          </a:xfrm>
-          <a:prstGeom prst="rect">
-            <a:avLst/>
-          </a:prstGeom>
-          <a:solidFill>
-            <a:srgbClr val="3B82F6"/>
-          </a:solidFill>
-          <a:ln w="12700">
+            <a:ln w="12700">
+              <a:solidFill>
+                <a:srgbClr val="1A2B4A"/>
+              </a:solidFill>
+              <a:prstDash val="solid"/>
+            </a:ln>
+          </p:spPr>
+        </p:sp>
+        <p:sp>
+          <p:nvSpPr>
+            <p:cNvPr id="2231684" name="Text 3"/>
+            <p:cNvSpPr/>
+            <p:nvPr/>
+          </p:nvSpPr>
+          <p:spPr bwMode="auto">
+            <a:xfrm>
+              <a:off x="46072" y="0"/>
+              <a:ext cx="4699446" cy="321600"/>
+            </a:xfrm>
+            <a:prstGeom prst="rect">
+              <a:avLst/>
+            </a:prstGeom>
+            <a:noFill/>
+            <a:ln/>
+          </p:spPr>
+          <p:txBody>
+            <a:bodyPr wrap="square" lIns="0" tIns="0" rIns="0" bIns="0" rtlCol="0" anchor="ctr"/>
+            <a:lstStyle/>
+            <a:p>
+              <a:pPr marL="0" indent="0" algn="l">
+                <a:buNone/>
+                <a:defRPr/>
+              </a:pPr>
+              <a:r>
+                <a:rPr lang="en-US" sz="1100" b="1">
+                  <a:solidFill>
+                    <a:srgbClr val="FFFFFF"/>
+                  </a:solidFill>
+                  <a:latin typeface="Calibri"/>
+                  <a:ea typeface="Calibri"/>
+                  <a:cs typeface="Calibri"/>
+                </a:rPr>
+                <a:t>Feature / Use Case</a:t>
+              </a:r>
+              <a:endParaRPr lang="en-US" sz="1100"/>
+            </a:p>
+          </p:txBody>
+        </p:sp>
+        <p:sp>
+          <p:nvSpPr>
+            <p:cNvPr id="2134024461" name="Shape 4"/>
+            <p:cNvSpPr/>
+            <p:nvPr/>
+          </p:nvSpPr>
+          <p:spPr bwMode="auto">
+            <a:xfrm>
+              <a:off x="4837665" y="0"/>
+              <a:ext cx="1336116" cy="321600"/>
+            </a:xfrm>
+            <a:prstGeom prst="rect">
+              <a:avLst/>
+            </a:prstGeom>
             <a:solidFill>
               <a:srgbClr val="3B82F6"/>
             </a:solidFill>
-            <a:prstDash val="solid"/>
-          </a:ln>
-        </p:spPr>
-      </p:sp>
-      <p:sp>
-        <p:nvSpPr>
-          <p:cNvPr id="1874248766" name="Text 5"/>
-          <p:cNvSpPr/>
-          <p:nvPr/>
-        </p:nvSpPr>
-        <p:spPr bwMode="auto">
-          <a:xfrm>
-            <a:off x="5120640" y="749808"/>
-            <a:ext cx="1325880" cy="347472"/>
-          </a:xfrm>
-          <a:prstGeom prst="rect">
-            <a:avLst/>
-          </a:prstGeom>
-          <a:noFill/>
-          <a:ln/>
-        </p:spPr>
-        <p:txBody>
-          <a:bodyPr wrap="square" lIns="0" tIns="0" rIns="0" bIns="0" rtlCol="0" anchor="ctr"/>
-          <a:lstStyle/>
-          <a:p>
-            <a:pPr marL="0" indent="0" algn="ctr">
-              <a:buNone/>
-              <a:defRPr/>
-            </a:pPr>
-            <a:r>
-              <a:rPr lang="en-US" sz="1100" b="1">
-                <a:solidFill>
-                  <a:srgbClr val="FFFFFF"/>
-                </a:solidFill>
-                <a:latin typeface="Calibri"/>
-                <a:ea typeface="Calibri"/>
-                <a:cs typeface="Calibri"/>
-              </a:rPr>
-              <a:t>Member</a:t>
-            </a:r>
-            <a:endParaRPr lang="en-US" sz="1100"/>
-          </a:p>
-        </p:txBody>
-      </p:sp>
-      <p:sp>
-        <p:nvSpPr>
-          <p:cNvPr id="157738131" name="Shape 6"/>
-          <p:cNvSpPr/>
-          <p:nvPr/>
-        </p:nvSpPr>
-        <p:spPr bwMode="auto">
-          <a:xfrm>
-            <a:off x="6537960" y="749808"/>
-            <a:ext cx="1325880" cy="347472"/>
-          </a:xfrm>
-          <a:prstGeom prst="rect">
-            <a:avLst/>
-          </a:prstGeom>
-          <a:solidFill>
-            <a:srgbClr val="F97316"/>
-          </a:solidFill>
-          <a:ln w="12700">
+            <a:ln w="12700">
+              <a:solidFill>
+                <a:srgbClr val="3B82F6"/>
+              </a:solidFill>
+              <a:prstDash val="solid"/>
+            </a:ln>
+          </p:spPr>
+        </p:sp>
+        <p:sp>
+          <p:nvSpPr>
+            <p:cNvPr id="42336445" name="Text 5"/>
+            <p:cNvSpPr/>
+            <p:nvPr/>
+          </p:nvSpPr>
+          <p:spPr bwMode="auto">
+            <a:xfrm>
+              <a:off x="4883738" y="0"/>
+              <a:ext cx="1336116" cy="321600"/>
+            </a:xfrm>
+            <a:prstGeom prst="rect">
+              <a:avLst/>
+            </a:prstGeom>
+            <a:noFill/>
+            <a:ln/>
+          </p:spPr>
+          <p:txBody>
+            <a:bodyPr wrap="square" lIns="0" tIns="0" rIns="0" bIns="0" rtlCol="0" anchor="ctr"/>
+            <a:lstStyle/>
+            <a:p>
+              <a:pPr marL="0" indent="0" algn="ctr">
+                <a:buNone/>
+                <a:defRPr/>
+              </a:pPr>
+              <a:r>
+                <a:rPr lang="en-US" sz="1100" b="1">
+                  <a:solidFill>
+                    <a:srgbClr val="FFFFFF"/>
+                  </a:solidFill>
+                  <a:latin typeface="Calibri"/>
+                  <a:ea typeface="Calibri"/>
+                  <a:cs typeface="Calibri"/>
+                </a:rPr>
+                <a:t>Member</a:t>
+              </a:r>
+              <a:endParaRPr lang="en-US" sz="1100"/>
+            </a:p>
+          </p:txBody>
+        </p:sp>
+        <p:sp>
+          <p:nvSpPr>
+            <p:cNvPr id="918514894" name="Shape 6"/>
+            <p:cNvSpPr/>
+            <p:nvPr/>
+          </p:nvSpPr>
+          <p:spPr bwMode="auto">
+            <a:xfrm>
+              <a:off x="6312001" y="0"/>
+              <a:ext cx="1336116" cy="321600"/>
+            </a:xfrm>
+            <a:prstGeom prst="rect">
+              <a:avLst/>
+            </a:prstGeom>
             <a:solidFill>
               <a:srgbClr val="F97316"/>
             </a:solidFill>
-            <a:prstDash val="solid"/>
-          </a:ln>
-        </p:spPr>
-      </p:sp>
-      <p:sp>
-        <p:nvSpPr>
-          <p:cNvPr id="529461461" name="Text 7"/>
-          <p:cNvSpPr/>
-          <p:nvPr/>
-        </p:nvSpPr>
-        <p:spPr bwMode="auto">
-          <a:xfrm>
-            <a:off x="6583680" y="749808"/>
-            <a:ext cx="1325880" cy="347472"/>
-          </a:xfrm>
-          <a:prstGeom prst="rect">
-            <a:avLst/>
-          </a:prstGeom>
-          <a:noFill/>
-          <a:ln/>
-        </p:spPr>
-        <p:txBody>
-          <a:bodyPr wrap="square" lIns="0" tIns="0" rIns="0" bIns="0" rtlCol="0" anchor="ctr"/>
-          <a:lstStyle/>
-          <a:p>
-            <a:pPr marL="0" indent="0" algn="ctr">
-              <a:buNone/>
-              <a:defRPr/>
-            </a:pPr>
-            <a:r>
-              <a:rPr lang="en-US" sz="1100" b="1">
-                <a:solidFill>
-                  <a:srgbClr val="FFFFFF"/>
-                </a:solidFill>
-                <a:latin typeface="Calibri"/>
-                <a:ea typeface="Calibri"/>
-                <a:cs typeface="Calibri"/>
-              </a:rPr>
-              <a:t>Manager</a:t>
-            </a:r>
-            <a:endParaRPr lang="en-US" sz="1100"/>
-          </a:p>
-        </p:txBody>
-      </p:sp>
-      <p:sp>
-        <p:nvSpPr>
-          <p:cNvPr id="413596428" name="Shape 8"/>
-          <p:cNvSpPr/>
-          <p:nvPr/>
-        </p:nvSpPr>
-        <p:spPr bwMode="auto">
-          <a:xfrm>
-            <a:off x="8001000" y="749808"/>
-            <a:ext cx="1325880" cy="347472"/>
-          </a:xfrm>
-          <a:prstGeom prst="rect">
-            <a:avLst/>
-          </a:prstGeom>
-          <a:solidFill>
-            <a:srgbClr val="9333EA"/>
-          </a:solidFill>
-          <a:ln w="12700">
+            <a:ln w="12700">
+              <a:solidFill>
+                <a:srgbClr val="F97316"/>
+              </a:solidFill>
+              <a:prstDash val="solid"/>
+            </a:ln>
+          </p:spPr>
+        </p:sp>
+        <p:sp>
+          <p:nvSpPr>
+            <p:cNvPr id="1927255162" name="Text 7"/>
+            <p:cNvSpPr/>
+            <p:nvPr/>
+          </p:nvSpPr>
+          <p:spPr bwMode="auto">
+            <a:xfrm>
+              <a:off x="6358074" y="0"/>
+              <a:ext cx="1336116" cy="321600"/>
+            </a:xfrm>
+            <a:prstGeom prst="rect">
+              <a:avLst/>
+            </a:prstGeom>
+            <a:noFill/>
+            <a:ln/>
+          </p:spPr>
+          <p:txBody>
+            <a:bodyPr wrap="square" lIns="0" tIns="0" rIns="0" bIns="0" rtlCol="0" anchor="ctr"/>
+            <a:lstStyle/>
+            <a:p>
+              <a:pPr marL="0" indent="0" algn="ctr">
+                <a:buNone/>
+                <a:defRPr/>
+              </a:pPr>
+              <a:r>
+                <a:rPr lang="en-US" sz="1100" b="1">
+                  <a:solidFill>
+                    <a:srgbClr val="FFFFFF"/>
+                  </a:solidFill>
+                  <a:latin typeface="Calibri"/>
+                  <a:ea typeface="Calibri"/>
+                  <a:cs typeface="Calibri"/>
+                </a:rPr>
+                <a:t>Manager</a:t>
+              </a:r>
+              <a:endParaRPr lang="en-US" sz="1100"/>
+            </a:p>
+          </p:txBody>
+        </p:sp>
+        <p:sp>
+          <p:nvSpPr>
+            <p:cNvPr id="125736860" name="Shape 8"/>
+            <p:cNvSpPr/>
+            <p:nvPr/>
+          </p:nvSpPr>
+          <p:spPr bwMode="auto">
+            <a:xfrm>
+              <a:off x="7786337" y="0"/>
+              <a:ext cx="1336116" cy="321600"/>
+            </a:xfrm>
+            <a:prstGeom prst="rect">
+              <a:avLst/>
+            </a:prstGeom>
             <a:solidFill>
               <a:srgbClr val="9333EA"/>
             </a:solidFill>
-            <a:prstDash val="solid"/>
-          </a:ln>
-        </p:spPr>
-      </p:sp>
-      <p:sp>
-        <p:nvSpPr>
-          <p:cNvPr id="1081373017" name="Text 9"/>
-          <p:cNvSpPr/>
-          <p:nvPr/>
-        </p:nvSpPr>
-        <p:spPr bwMode="auto">
-          <a:xfrm>
-            <a:off x="8046720" y="749808"/>
-            <a:ext cx="1325880" cy="347472"/>
-          </a:xfrm>
-          <a:prstGeom prst="rect">
-            <a:avLst/>
-          </a:prstGeom>
-          <a:noFill/>
-          <a:ln/>
-        </p:spPr>
-        <p:txBody>
-          <a:bodyPr wrap="square" lIns="0" tIns="0" rIns="0" bIns="0" rtlCol="0" anchor="ctr"/>
-          <a:lstStyle/>
-          <a:p>
-            <a:pPr marL="0" indent="0" algn="ctr">
-              <a:buNone/>
-              <a:defRPr/>
-            </a:pPr>
-            <a:r>
-              <a:rPr lang="en-US" sz="1100" b="1">
-                <a:solidFill>
-                  <a:srgbClr val="FFFFFF"/>
-                </a:solidFill>
-                <a:latin typeface="Calibri"/>
-                <a:ea typeface="Calibri"/>
-                <a:cs typeface="Calibri"/>
-              </a:rPr>
-              <a:t>Admin</a:t>
-            </a:r>
-            <a:endParaRPr lang="en-US" sz="1100"/>
-          </a:p>
-        </p:txBody>
-      </p:sp>
-      <p:sp>
-        <p:nvSpPr>
-          <p:cNvPr id="969190734" name="Shape 10"/>
-          <p:cNvSpPr/>
-          <p:nvPr/>
-        </p:nvSpPr>
-        <p:spPr bwMode="auto">
-          <a:xfrm>
-            <a:off x="274320" y="1115568"/>
-            <a:ext cx="8595360" cy="338328"/>
-          </a:xfrm>
-          <a:prstGeom prst="rect">
-            <a:avLst/>
-          </a:prstGeom>
-          <a:solidFill>
-            <a:srgbClr val="FFFFFF"/>
-          </a:solidFill>
-          <a:ln w="6350">
-            <a:solidFill>
-              <a:srgbClr val="CBD5E1"/>
-            </a:solidFill>
-            <a:prstDash val="solid"/>
-          </a:ln>
-        </p:spPr>
-      </p:sp>
-      <p:sp>
-        <p:nvSpPr>
-          <p:cNvPr id="1747398649" name="Text 11"/>
-          <p:cNvSpPr/>
-          <p:nvPr/>
-        </p:nvSpPr>
-        <p:spPr bwMode="auto">
-          <a:xfrm>
-            <a:off x="347472" y="1115568"/>
-            <a:ext cx="4572000" cy="338328"/>
-          </a:xfrm>
-          <a:prstGeom prst="rect">
-            <a:avLst/>
-          </a:prstGeom>
-          <a:noFill/>
-          <a:ln/>
-        </p:spPr>
-        <p:txBody>
-          <a:bodyPr wrap="square" lIns="0" tIns="0" rIns="0" bIns="0" rtlCol="0" anchor="ctr"/>
-          <a:lstStyle/>
-          <a:p>
-            <a:pPr marL="0" indent="0">
-              <a:buNone/>
-              <a:defRPr/>
-            </a:pPr>
-            <a:r>
-              <a:rPr lang="en-US" sz="1000">
-                <a:solidFill>
-                  <a:srgbClr val="0F172A"/>
-                </a:solidFill>
-                <a:latin typeface="Calibri"/>
-                <a:ea typeface="Calibri"/>
-                <a:cs typeface="Calibri"/>
-              </a:rPr>
-              <a:t>Create / edit / delete tasks</a:t>
-            </a:r>
-            <a:endParaRPr lang="en-US" sz="1000"/>
-          </a:p>
-        </p:txBody>
-      </p:sp>
-      <p:sp>
-        <p:nvSpPr>
-          <p:cNvPr id="1427651682" name="Shape 12"/>
-          <p:cNvSpPr/>
-          <p:nvPr/>
-        </p:nvSpPr>
-        <p:spPr bwMode="auto">
-          <a:xfrm>
-            <a:off x="5628132" y="1175004"/>
-            <a:ext cx="219456" cy="219456"/>
-          </a:xfrm>
-          <a:prstGeom prst="ellipse">
-            <a:avLst/>
-          </a:prstGeom>
-          <a:solidFill>
-            <a:srgbClr val="3B82F6"/>
-          </a:solidFill>
-          <a:ln w="12700">
+            <a:ln w="12700">
+              <a:solidFill>
+                <a:srgbClr val="9333EA"/>
+              </a:solidFill>
+              <a:prstDash val="solid"/>
+            </a:ln>
+          </p:spPr>
+        </p:sp>
+        <p:sp>
+          <p:nvSpPr>
+            <p:cNvPr id="2922425" name="Text 9"/>
+            <p:cNvSpPr/>
+            <p:nvPr/>
+          </p:nvSpPr>
+          <p:spPr bwMode="auto">
+            <a:xfrm>
+              <a:off x="7832410" y="0"/>
+              <a:ext cx="1336116" cy="321600"/>
+            </a:xfrm>
+            <a:prstGeom prst="rect">
+              <a:avLst/>
+            </a:prstGeom>
+            <a:noFill/>
+            <a:ln/>
+          </p:spPr>
+          <p:txBody>
+            <a:bodyPr wrap="square" lIns="0" tIns="0" rIns="0" bIns="0" rtlCol="0" anchor="ctr"/>
+            <a:lstStyle/>
+            <a:p>
+              <a:pPr marL="0" indent="0" algn="ctr">
+                <a:buNone/>
+                <a:defRPr/>
+              </a:pPr>
+              <a:r>
+                <a:rPr lang="en-US" sz="1100" b="1">
+                  <a:solidFill>
+                    <a:srgbClr val="FFFFFF"/>
+                  </a:solidFill>
+                  <a:latin typeface="Calibri"/>
+                  <a:ea typeface="Calibri"/>
+                  <a:cs typeface="Calibri"/>
+                </a:rPr>
+                <a:t>Admin</a:t>
+              </a:r>
+              <a:endParaRPr lang="en-US" sz="1100"/>
+            </a:p>
+          </p:txBody>
+        </p:sp>
+        <p:sp>
+          <p:nvSpPr>
+            <p:cNvPr id="911034568" name="Shape 10"/>
+            <p:cNvSpPr/>
+            <p:nvPr/>
+          </p:nvSpPr>
+          <p:spPr bwMode="auto">
+            <a:xfrm flipH="0" flipV="0">
+              <a:off x="0" y="338527"/>
+              <a:ext cx="9098578" cy="313137"/>
+            </a:xfrm>
+            <a:prstGeom prst="rect">
+              <a:avLst/>
+            </a:prstGeom>
+            <a:solidFill>
+              <a:srgbClr val="FFFFFF"/>
+            </a:solidFill>
+            <a:ln w="6350">
+              <a:solidFill>
+                <a:srgbClr val="CBD5E1"/>
+              </a:solidFill>
+              <a:prstDash val="solid"/>
+            </a:ln>
+          </p:spPr>
+        </p:sp>
+        <p:sp>
+          <p:nvSpPr>
+            <p:cNvPr id="2090558446" name="Text 11"/>
+            <p:cNvSpPr/>
+            <p:nvPr/>
+          </p:nvSpPr>
+          <p:spPr bwMode="auto">
+            <a:xfrm>
+              <a:off x="73716" y="338527"/>
+              <a:ext cx="4607300" cy="313137"/>
+            </a:xfrm>
+            <a:prstGeom prst="rect">
+              <a:avLst/>
+            </a:prstGeom>
+            <a:noFill/>
+            <a:ln/>
+          </p:spPr>
+          <p:txBody>
+            <a:bodyPr wrap="square" lIns="0" tIns="0" rIns="0" bIns="0" rtlCol="0" anchor="ctr"/>
+            <a:lstStyle/>
+            <a:p>
+              <a:pPr marL="0" indent="0">
+                <a:buNone/>
+                <a:defRPr/>
+              </a:pPr>
+              <a:r>
+                <a:rPr lang="en-US" sz="1000">
+                  <a:solidFill>
+                    <a:srgbClr val="0F172A"/>
+                  </a:solidFill>
+                  <a:latin typeface="Calibri"/>
+                  <a:ea typeface="Calibri"/>
+                  <a:cs typeface="Calibri"/>
+                </a:rPr>
+                <a:t>Create / edit / delete tasks</a:t>
+              </a:r>
+              <a:endParaRPr lang="en-US" sz="1000"/>
+            </a:p>
+          </p:txBody>
+        </p:sp>
+        <p:sp>
+          <p:nvSpPr>
+            <p:cNvPr id="651524377" name="Shape 12"/>
+            <p:cNvSpPr/>
+            <p:nvPr/>
+          </p:nvSpPr>
+          <p:spPr bwMode="auto">
+            <a:xfrm>
+              <a:off x="5395148" y="393537"/>
+              <a:ext cx="221150" cy="203116"/>
+            </a:xfrm>
+            <a:prstGeom prst="ellipse">
+              <a:avLst/>
+            </a:prstGeom>
             <a:solidFill>
               <a:srgbClr val="3B82F6"/>
             </a:solidFill>
-            <a:prstDash val="solid"/>
-          </a:ln>
-        </p:spPr>
-      </p:sp>
-      <p:sp>
-        <p:nvSpPr>
-          <p:cNvPr id="688814860" name="Text 13"/>
-          <p:cNvSpPr/>
-          <p:nvPr/>
-        </p:nvSpPr>
-        <p:spPr bwMode="auto">
-          <a:xfrm>
-            <a:off x="5628132" y="1175004"/>
-            <a:ext cx="219456" cy="219456"/>
-          </a:xfrm>
-          <a:prstGeom prst="rect">
-            <a:avLst/>
-          </a:prstGeom>
-          <a:noFill/>
-          <a:ln/>
-        </p:spPr>
-        <p:txBody>
-          <a:bodyPr wrap="square" lIns="0" tIns="0" rIns="0" bIns="0" rtlCol="0" anchor="ctr"/>
-          <a:lstStyle/>
-          <a:p>
-            <a:pPr marL="0" indent="0" algn="ctr">
-              <a:buNone/>
-              <a:defRPr/>
-            </a:pPr>
-            <a:r>
-              <a:rPr lang="en-US" sz="1000" b="1">
-                <a:solidFill>
-                  <a:srgbClr val="FFFFFF"/>
-                </a:solidFill>
-              </a:rPr>
-              <a:t>✓</a:t>
-            </a:r>
-            <a:endParaRPr lang="en-US" sz="1000"/>
-          </a:p>
-        </p:txBody>
-      </p:sp>
-      <p:sp>
-        <p:nvSpPr>
-          <p:cNvPr id="317651676" name="Shape 14"/>
-          <p:cNvSpPr/>
-          <p:nvPr/>
-        </p:nvSpPr>
-        <p:spPr bwMode="auto">
-          <a:xfrm>
-            <a:off x="7091172" y="1175004"/>
-            <a:ext cx="219456" cy="219456"/>
-          </a:xfrm>
-          <a:prstGeom prst="ellipse">
-            <a:avLst/>
-          </a:prstGeom>
-          <a:solidFill>
-            <a:srgbClr val="F97316"/>
-          </a:solidFill>
-          <a:ln w="12700">
+            <a:ln w="12700">
+              <a:solidFill>
+                <a:srgbClr val="3B82F6"/>
+              </a:solidFill>
+              <a:prstDash val="solid"/>
+            </a:ln>
+          </p:spPr>
+        </p:sp>
+        <p:sp>
+          <p:nvSpPr>
+            <p:cNvPr id="95286101" name="Text 13"/>
+            <p:cNvSpPr/>
+            <p:nvPr/>
+          </p:nvSpPr>
+          <p:spPr bwMode="auto">
+            <a:xfrm>
+              <a:off x="5395148" y="393537"/>
+              <a:ext cx="221150" cy="203116"/>
+            </a:xfrm>
+            <a:prstGeom prst="rect">
+              <a:avLst/>
+            </a:prstGeom>
+            <a:noFill/>
+            <a:ln/>
+          </p:spPr>
+          <p:txBody>
+            <a:bodyPr wrap="square" lIns="0" tIns="0" rIns="0" bIns="0" rtlCol="0" anchor="ctr"/>
+            <a:lstStyle/>
+            <a:p>
+              <a:pPr marL="0" indent="0" algn="ctr">
+                <a:buNone/>
+                <a:defRPr/>
+              </a:pPr>
+              <a:r>
+                <a:rPr lang="en-US" sz="1000" b="1">
+                  <a:solidFill>
+                    <a:srgbClr val="FFFFFF"/>
+                  </a:solidFill>
+                </a:rPr>
+                <a:t>✓</a:t>
+              </a:r>
+              <a:endParaRPr lang="en-US" sz="1000"/>
+            </a:p>
+          </p:txBody>
+        </p:sp>
+        <p:sp>
+          <p:nvSpPr>
+            <p:cNvPr id="1111755897" name="Shape 14"/>
+            <p:cNvSpPr/>
+            <p:nvPr/>
+          </p:nvSpPr>
+          <p:spPr bwMode="auto">
+            <a:xfrm>
+              <a:off x="6869485" y="393537"/>
+              <a:ext cx="221150" cy="203116"/>
+            </a:xfrm>
+            <a:prstGeom prst="ellipse">
+              <a:avLst/>
+            </a:prstGeom>
             <a:solidFill>
               <a:srgbClr val="F97316"/>
             </a:solidFill>
-            <a:prstDash val="solid"/>
-          </a:ln>
-        </p:spPr>
-      </p:sp>
-      <p:sp>
-        <p:nvSpPr>
-          <p:cNvPr id="1454939220" name="Text 15"/>
-          <p:cNvSpPr/>
-          <p:nvPr/>
-        </p:nvSpPr>
-        <p:spPr bwMode="auto">
-          <a:xfrm>
-            <a:off x="7091172" y="1175004"/>
-            <a:ext cx="219456" cy="219456"/>
-          </a:xfrm>
-          <a:prstGeom prst="rect">
-            <a:avLst/>
-          </a:prstGeom>
-          <a:noFill/>
-          <a:ln/>
-        </p:spPr>
-        <p:txBody>
-          <a:bodyPr wrap="square" lIns="0" tIns="0" rIns="0" bIns="0" rtlCol="0" anchor="ctr"/>
-          <a:lstStyle/>
-          <a:p>
-            <a:pPr marL="0" indent="0" algn="ctr">
-              <a:buNone/>
-              <a:defRPr/>
-            </a:pPr>
-            <a:r>
-              <a:rPr lang="en-US" sz="1000" b="1">
-                <a:solidFill>
-                  <a:srgbClr val="FFFFFF"/>
-                </a:solidFill>
-              </a:rPr>
-              <a:t>✓</a:t>
-            </a:r>
-            <a:endParaRPr lang="en-US" sz="1000"/>
-          </a:p>
-        </p:txBody>
-      </p:sp>
-      <p:sp>
-        <p:nvSpPr>
-          <p:cNvPr id="1471236501" name="Shape 16"/>
-          <p:cNvSpPr/>
-          <p:nvPr/>
-        </p:nvSpPr>
-        <p:spPr bwMode="auto">
-          <a:xfrm>
-            <a:off x="8554212" y="1175004"/>
-            <a:ext cx="219456" cy="219456"/>
-          </a:xfrm>
-          <a:prstGeom prst="ellipse">
-            <a:avLst/>
-          </a:prstGeom>
-          <a:solidFill>
-            <a:srgbClr val="9333EA"/>
-          </a:solidFill>
-          <a:ln w="12700">
+            <a:ln w="12700">
+              <a:solidFill>
+                <a:srgbClr val="F97316"/>
+              </a:solidFill>
+              <a:prstDash val="solid"/>
+            </a:ln>
+          </p:spPr>
+        </p:sp>
+        <p:sp>
+          <p:nvSpPr>
+            <p:cNvPr id="1595559359" name="Text 15"/>
+            <p:cNvSpPr/>
+            <p:nvPr/>
+          </p:nvSpPr>
+          <p:spPr bwMode="auto">
+            <a:xfrm>
+              <a:off x="6869485" y="393537"/>
+              <a:ext cx="221150" cy="203116"/>
+            </a:xfrm>
+            <a:prstGeom prst="rect">
+              <a:avLst/>
+            </a:prstGeom>
+            <a:noFill/>
+            <a:ln/>
+          </p:spPr>
+          <p:txBody>
+            <a:bodyPr wrap="square" lIns="0" tIns="0" rIns="0" bIns="0" rtlCol="0" anchor="ctr"/>
+            <a:lstStyle/>
+            <a:p>
+              <a:pPr marL="0" indent="0" algn="ctr">
+                <a:buNone/>
+                <a:defRPr/>
+              </a:pPr>
+              <a:r>
+                <a:rPr lang="en-US" sz="1000" b="1">
+                  <a:solidFill>
+                    <a:srgbClr val="FFFFFF"/>
+                  </a:solidFill>
+                </a:rPr>
+                <a:t>✓</a:t>
+              </a:r>
+              <a:endParaRPr lang="en-US" sz="1000"/>
+            </a:p>
+          </p:txBody>
+        </p:sp>
+        <p:sp>
+          <p:nvSpPr>
+            <p:cNvPr id="745201441" name="Shape 16"/>
+            <p:cNvSpPr/>
+            <p:nvPr/>
+          </p:nvSpPr>
+          <p:spPr bwMode="auto">
+            <a:xfrm>
+              <a:off x="8343821" y="393537"/>
+              <a:ext cx="221150" cy="203116"/>
+            </a:xfrm>
+            <a:prstGeom prst="ellipse">
+              <a:avLst/>
+            </a:prstGeom>
             <a:solidFill>
               <a:srgbClr val="9333EA"/>
             </a:solidFill>
-            <a:prstDash val="solid"/>
-          </a:ln>
-        </p:spPr>
-      </p:sp>
-      <p:sp>
-        <p:nvSpPr>
-          <p:cNvPr id="954509956" name="Text 17"/>
-          <p:cNvSpPr/>
-          <p:nvPr/>
-        </p:nvSpPr>
-        <p:spPr bwMode="auto">
-          <a:xfrm>
-            <a:off x="8554212" y="1175004"/>
-            <a:ext cx="219456" cy="219456"/>
-          </a:xfrm>
-          <a:prstGeom prst="rect">
-            <a:avLst/>
-          </a:prstGeom>
-          <a:noFill/>
-          <a:ln/>
-        </p:spPr>
-        <p:txBody>
-          <a:bodyPr wrap="square" lIns="0" tIns="0" rIns="0" bIns="0" rtlCol="0" anchor="ctr"/>
-          <a:lstStyle/>
-          <a:p>
-            <a:pPr marL="0" indent="0" algn="ctr">
-              <a:buNone/>
-              <a:defRPr/>
-            </a:pPr>
-            <a:r>
-              <a:rPr lang="en-US" sz="1000" b="1">
-                <a:solidFill>
-                  <a:srgbClr val="FFFFFF"/>
-                </a:solidFill>
-              </a:rPr>
-              <a:t>✓</a:t>
-            </a:r>
-            <a:endParaRPr lang="en-US" sz="1000"/>
-          </a:p>
-        </p:txBody>
-      </p:sp>
-      <p:sp>
-        <p:nvSpPr>
-          <p:cNvPr id="1163135272" name="Shape 18"/>
-          <p:cNvSpPr/>
-          <p:nvPr/>
-        </p:nvSpPr>
-        <p:spPr bwMode="auto">
-          <a:xfrm>
-            <a:off x="274320" y="1453896"/>
-            <a:ext cx="8595360" cy="338328"/>
-          </a:xfrm>
-          <a:prstGeom prst="rect">
-            <a:avLst/>
-          </a:prstGeom>
-          <a:solidFill>
-            <a:srgbClr val="F1F5F9"/>
-          </a:solidFill>
-          <a:ln w="6350">
-            <a:solidFill>
-              <a:srgbClr val="CBD5E1"/>
-            </a:solidFill>
-            <a:prstDash val="solid"/>
-          </a:ln>
-        </p:spPr>
-      </p:sp>
-      <p:sp>
-        <p:nvSpPr>
-          <p:cNvPr id="1224836105" name="Text 19"/>
-          <p:cNvSpPr/>
-          <p:nvPr/>
-        </p:nvSpPr>
-        <p:spPr bwMode="auto">
-          <a:xfrm>
-            <a:off x="347472" y="1453896"/>
-            <a:ext cx="4572000" cy="338328"/>
-          </a:xfrm>
-          <a:prstGeom prst="rect">
-            <a:avLst/>
-          </a:prstGeom>
-          <a:noFill/>
-          <a:ln/>
-        </p:spPr>
-        <p:txBody>
-          <a:bodyPr wrap="square" lIns="0" tIns="0" rIns="0" bIns="0" rtlCol="0" anchor="ctr"/>
-          <a:lstStyle/>
-          <a:p>
-            <a:pPr marL="0" indent="0">
-              <a:buNone/>
-              <a:defRPr/>
-            </a:pPr>
-            <a:r>
-              <a:rPr lang="en-US" sz="1000">
-                <a:solidFill>
-                  <a:srgbClr val="0F172A"/>
-                </a:solidFill>
-                <a:latin typeface="Calibri"/>
-                <a:ea typeface="Calibri"/>
-                <a:cs typeface="Calibri"/>
-              </a:rPr>
-              <a:t>Change status &amp; priority</a:t>
-            </a:r>
-            <a:endParaRPr lang="en-US" sz="1000"/>
-          </a:p>
-        </p:txBody>
-      </p:sp>
-      <p:sp>
-        <p:nvSpPr>
-          <p:cNvPr id="708237140" name="Shape 20"/>
-          <p:cNvSpPr/>
-          <p:nvPr/>
-        </p:nvSpPr>
-        <p:spPr bwMode="auto">
-          <a:xfrm>
-            <a:off x="5628132" y="1513332"/>
-            <a:ext cx="219456" cy="219456"/>
-          </a:xfrm>
-          <a:prstGeom prst="ellipse">
-            <a:avLst/>
-          </a:prstGeom>
-          <a:solidFill>
-            <a:srgbClr val="3B82F6"/>
-          </a:solidFill>
-          <a:ln w="12700">
+            <a:ln w="12700">
+              <a:solidFill>
+                <a:srgbClr val="9333EA"/>
+              </a:solidFill>
+              <a:prstDash val="solid"/>
+            </a:ln>
+          </p:spPr>
+        </p:sp>
+        <p:sp>
+          <p:nvSpPr>
+            <p:cNvPr id="2006901951" name="Text 17"/>
+            <p:cNvSpPr/>
+            <p:nvPr/>
+          </p:nvSpPr>
+          <p:spPr bwMode="auto">
+            <a:xfrm>
+              <a:off x="8343821" y="393537"/>
+              <a:ext cx="221150" cy="203116"/>
+            </a:xfrm>
+            <a:prstGeom prst="rect">
+              <a:avLst/>
+            </a:prstGeom>
+            <a:noFill/>
+            <a:ln/>
+          </p:spPr>
+          <p:txBody>
+            <a:bodyPr wrap="square" lIns="0" tIns="0" rIns="0" bIns="0" rtlCol="0" anchor="ctr"/>
+            <a:lstStyle/>
+            <a:p>
+              <a:pPr marL="0" indent="0" algn="ctr">
+                <a:buNone/>
+                <a:defRPr/>
+              </a:pPr>
+              <a:r>
+                <a:rPr lang="en-US" sz="1000" b="1">
+                  <a:solidFill>
+                    <a:srgbClr val="FFFFFF"/>
+                  </a:solidFill>
+                </a:rPr>
+                <a:t>✓</a:t>
+              </a:r>
+              <a:endParaRPr lang="en-US" sz="1000"/>
+            </a:p>
+          </p:txBody>
+        </p:sp>
+        <p:sp>
+          <p:nvSpPr>
+            <p:cNvPr id="84448033" name="Shape 18"/>
+            <p:cNvSpPr/>
+            <p:nvPr/>
+          </p:nvSpPr>
+          <p:spPr bwMode="auto">
+            <a:xfrm flipH="0" flipV="0">
+              <a:off x="0" y="651665"/>
+              <a:ext cx="9098578" cy="313137"/>
+            </a:xfrm>
+            <a:prstGeom prst="rect">
+              <a:avLst/>
+            </a:prstGeom>
+            <a:solidFill>
+              <a:srgbClr val="F1F5F9"/>
+            </a:solidFill>
+            <a:ln w="6350">
+              <a:solidFill>
+                <a:srgbClr val="CBD5E1"/>
+              </a:solidFill>
+              <a:prstDash val="solid"/>
+            </a:ln>
+          </p:spPr>
+        </p:sp>
+        <p:sp>
+          <p:nvSpPr>
+            <p:cNvPr id="100511593" name="Text 19"/>
+            <p:cNvSpPr/>
+            <p:nvPr/>
+          </p:nvSpPr>
+          <p:spPr bwMode="auto">
+            <a:xfrm>
+              <a:off x="73716" y="651665"/>
+              <a:ext cx="4607300" cy="313137"/>
+            </a:xfrm>
+            <a:prstGeom prst="rect">
+              <a:avLst/>
+            </a:prstGeom>
+            <a:noFill/>
+            <a:ln/>
+          </p:spPr>
+          <p:txBody>
+            <a:bodyPr wrap="square" lIns="0" tIns="0" rIns="0" bIns="0" rtlCol="0" anchor="ctr"/>
+            <a:lstStyle/>
+            <a:p>
+              <a:pPr marL="0" indent="0">
+                <a:buNone/>
+                <a:defRPr/>
+              </a:pPr>
+              <a:r>
+                <a:rPr lang="en-US" sz="1000">
+                  <a:solidFill>
+                    <a:srgbClr val="0F172A"/>
+                  </a:solidFill>
+                  <a:latin typeface="Calibri"/>
+                  <a:ea typeface="Calibri"/>
+                  <a:cs typeface="Calibri"/>
+                </a:rPr>
+                <a:t>Change status &amp; priority</a:t>
+              </a:r>
+              <a:endParaRPr lang="en-US" sz="1000"/>
+            </a:p>
+          </p:txBody>
+        </p:sp>
+        <p:sp>
+          <p:nvSpPr>
+            <p:cNvPr id="1383062921" name="Shape 20"/>
+            <p:cNvSpPr/>
+            <p:nvPr/>
+          </p:nvSpPr>
+          <p:spPr bwMode="auto">
+            <a:xfrm>
+              <a:off x="5395148" y="706675"/>
+              <a:ext cx="221150" cy="203116"/>
+            </a:xfrm>
+            <a:prstGeom prst="ellipse">
+              <a:avLst/>
+            </a:prstGeom>
             <a:solidFill>
               <a:srgbClr val="3B82F6"/>
             </a:solidFill>
-            <a:prstDash val="solid"/>
-          </a:ln>
-        </p:spPr>
-      </p:sp>
-      <p:sp>
-        <p:nvSpPr>
-          <p:cNvPr id="1172670792" name="Text 21"/>
-          <p:cNvSpPr/>
-          <p:nvPr/>
-        </p:nvSpPr>
-        <p:spPr bwMode="auto">
-          <a:xfrm>
-            <a:off x="5628132" y="1513332"/>
-            <a:ext cx="219456" cy="219456"/>
-          </a:xfrm>
-          <a:prstGeom prst="rect">
-            <a:avLst/>
-          </a:prstGeom>
-          <a:noFill/>
-          <a:ln/>
-        </p:spPr>
-        <p:txBody>
-          <a:bodyPr wrap="square" lIns="0" tIns="0" rIns="0" bIns="0" rtlCol="0" anchor="ctr"/>
-          <a:lstStyle/>
-          <a:p>
-            <a:pPr marL="0" indent="0" algn="ctr">
-              <a:buNone/>
-              <a:defRPr/>
-            </a:pPr>
-            <a:r>
-              <a:rPr lang="en-US" sz="1000" b="1">
-                <a:solidFill>
-                  <a:srgbClr val="FFFFFF"/>
-                </a:solidFill>
-              </a:rPr>
-              <a:t>✓</a:t>
-            </a:r>
-            <a:endParaRPr lang="en-US" sz="1000"/>
-          </a:p>
-        </p:txBody>
-      </p:sp>
-      <p:sp>
-        <p:nvSpPr>
-          <p:cNvPr id="1526640733" name="Shape 22"/>
-          <p:cNvSpPr/>
-          <p:nvPr/>
-        </p:nvSpPr>
-        <p:spPr bwMode="auto">
-          <a:xfrm>
-            <a:off x="7091172" y="1513332"/>
-            <a:ext cx="219456" cy="219456"/>
-          </a:xfrm>
-          <a:prstGeom prst="ellipse">
-            <a:avLst/>
-          </a:prstGeom>
-          <a:solidFill>
-            <a:srgbClr val="F97316"/>
-          </a:solidFill>
-          <a:ln w="12700">
+            <a:ln w="12700">
+              <a:solidFill>
+                <a:srgbClr val="3B82F6"/>
+              </a:solidFill>
+              <a:prstDash val="solid"/>
+            </a:ln>
+          </p:spPr>
+        </p:sp>
+        <p:sp>
+          <p:nvSpPr>
+            <p:cNvPr id="644919390" name="Text 21"/>
+            <p:cNvSpPr/>
+            <p:nvPr/>
+          </p:nvSpPr>
+          <p:spPr bwMode="auto">
+            <a:xfrm>
+              <a:off x="5395148" y="706675"/>
+              <a:ext cx="221150" cy="203116"/>
+            </a:xfrm>
+            <a:prstGeom prst="rect">
+              <a:avLst/>
+            </a:prstGeom>
+            <a:noFill/>
+            <a:ln/>
+          </p:spPr>
+          <p:txBody>
+            <a:bodyPr wrap="square" lIns="0" tIns="0" rIns="0" bIns="0" rtlCol="0" anchor="ctr"/>
+            <a:lstStyle/>
+            <a:p>
+              <a:pPr marL="0" indent="0" algn="ctr">
+                <a:buNone/>
+                <a:defRPr/>
+              </a:pPr>
+              <a:r>
+                <a:rPr lang="en-US" sz="1000" b="1">
+                  <a:solidFill>
+                    <a:srgbClr val="FFFFFF"/>
+                  </a:solidFill>
+                </a:rPr>
+                <a:t>✓</a:t>
+              </a:r>
+              <a:endParaRPr lang="en-US" sz="1000"/>
+            </a:p>
+          </p:txBody>
+        </p:sp>
+        <p:sp>
+          <p:nvSpPr>
+            <p:cNvPr id="1190849090" name="Shape 22"/>
+            <p:cNvSpPr/>
+            <p:nvPr/>
+          </p:nvSpPr>
+          <p:spPr bwMode="auto">
+            <a:xfrm>
+              <a:off x="6869485" y="706675"/>
+              <a:ext cx="221150" cy="203116"/>
+            </a:xfrm>
+            <a:prstGeom prst="ellipse">
+              <a:avLst/>
+            </a:prstGeom>
             <a:solidFill>
               <a:srgbClr val="F97316"/>
             </a:solidFill>
-            <a:prstDash val="solid"/>
-          </a:ln>
-        </p:spPr>
-      </p:sp>
-      <p:sp>
-        <p:nvSpPr>
-          <p:cNvPr id="1737706270" name="Text 23"/>
-          <p:cNvSpPr/>
-          <p:nvPr/>
-        </p:nvSpPr>
-        <p:spPr bwMode="auto">
-          <a:xfrm>
-            <a:off x="7091172" y="1513332"/>
-            <a:ext cx="219456" cy="219456"/>
-          </a:xfrm>
-          <a:prstGeom prst="rect">
-            <a:avLst/>
-          </a:prstGeom>
-          <a:noFill/>
-          <a:ln/>
-        </p:spPr>
-        <p:txBody>
-          <a:bodyPr wrap="square" lIns="0" tIns="0" rIns="0" bIns="0" rtlCol="0" anchor="ctr"/>
-          <a:lstStyle/>
-          <a:p>
-            <a:pPr marL="0" indent="0" algn="ctr">
-              <a:buNone/>
-              <a:defRPr/>
-            </a:pPr>
-            <a:r>
-              <a:rPr lang="en-US" sz="1000" b="1">
-                <a:solidFill>
-                  <a:srgbClr val="FFFFFF"/>
-                </a:solidFill>
-              </a:rPr>
-              <a:t>✓</a:t>
-            </a:r>
-            <a:endParaRPr lang="en-US" sz="1000"/>
-          </a:p>
-        </p:txBody>
-      </p:sp>
-      <p:sp>
-        <p:nvSpPr>
-          <p:cNvPr id="1166129878" name="Shape 24"/>
-          <p:cNvSpPr/>
-          <p:nvPr/>
-        </p:nvSpPr>
-        <p:spPr bwMode="auto">
-          <a:xfrm>
-            <a:off x="8554212" y="1513332"/>
-            <a:ext cx="219456" cy="219456"/>
-          </a:xfrm>
-          <a:prstGeom prst="ellipse">
-            <a:avLst/>
-          </a:prstGeom>
-          <a:solidFill>
-            <a:srgbClr val="9333EA"/>
-          </a:solidFill>
-          <a:ln w="12700">
+            <a:ln w="12700">
+              <a:solidFill>
+                <a:srgbClr val="F97316"/>
+              </a:solidFill>
+              <a:prstDash val="solid"/>
+            </a:ln>
+          </p:spPr>
+        </p:sp>
+        <p:sp>
+          <p:nvSpPr>
+            <p:cNvPr id="332059512" name="Text 23"/>
+            <p:cNvSpPr/>
+            <p:nvPr/>
+          </p:nvSpPr>
+          <p:spPr bwMode="auto">
+            <a:xfrm>
+              <a:off x="6869485" y="706675"/>
+              <a:ext cx="221150" cy="203116"/>
+            </a:xfrm>
+            <a:prstGeom prst="rect">
+              <a:avLst/>
+            </a:prstGeom>
+            <a:noFill/>
+            <a:ln/>
+          </p:spPr>
+          <p:txBody>
+            <a:bodyPr wrap="square" lIns="0" tIns="0" rIns="0" bIns="0" rtlCol="0" anchor="ctr"/>
+            <a:lstStyle/>
+            <a:p>
+              <a:pPr marL="0" indent="0" algn="ctr">
+                <a:buNone/>
+                <a:defRPr/>
+              </a:pPr>
+              <a:r>
+                <a:rPr lang="en-US" sz="1000" b="1">
+                  <a:solidFill>
+                    <a:srgbClr val="FFFFFF"/>
+                  </a:solidFill>
+                </a:rPr>
+                <a:t>✓</a:t>
+              </a:r>
+              <a:endParaRPr lang="en-US" sz="1000"/>
+            </a:p>
+          </p:txBody>
+        </p:sp>
+        <p:sp>
+          <p:nvSpPr>
+            <p:cNvPr id="941093916" name="Shape 24"/>
+            <p:cNvSpPr/>
+            <p:nvPr/>
+          </p:nvSpPr>
+          <p:spPr bwMode="auto">
+            <a:xfrm>
+              <a:off x="8343821" y="706675"/>
+              <a:ext cx="221150" cy="203116"/>
+            </a:xfrm>
+            <a:prstGeom prst="ellipse">
+              <a:avLst/>
+            </a:prstGeom>
             <a:solidFill>
               <a:srgbClr val="9333EA"/>
             </a:solidFill>
-            <a:prstDash val="solid"/>
-          </a:ln>
-        </p:spPr>
-      </p:sp>
-      <p:sp>
-        <p:nvSpPr>
-          <p:cNvPr id="211533253" name="Text 25"/>
-          <p:cNvSpPr/>
-          <p:nvPr/>
-        </p:nvSpPr>
-        <p:spPr bwMode="auto">
-          <a:xfrm>
-            <a:off x="8554212" y="1513332"/>
-            <a:ext cx="219456" cy="219456"/>
-          </a:xfrm>
-          <a:prstGeom prst="rect">
-            <a:avLst/>
-          </a:prstGeom>
-          <a:noFill/>
-          <a:ln/>
-        </p:spPr>
-        <p:txBody>
-          <a:bodyPr wrap="square" lIns="0" tIns="0" rIns="0" bIns="0" rtlCol="0" anchor="ctr"/>
-          <a:lstStyle/>
-          <a:p>
-            <a:pPr marL="0" indent="0" algn="ctr">
-              <a:buNone/>
-              <a:defRPr/>
-            </a:pPr>
-            <a:r>
-              <a:rPr lang="en-US" sz="1000" b="1">
-                <a:solidFill>
-                  <a:srgbClr val="FFFFFF"/>
-                </a:solidFill>
-              </a:rPr>
-              <a:t>✓</a:t>
-            </a:r>
-            <a:endParaRPr lang="en-US" sz="1000"/>
-          </a:p>
-        </p:txBody>
-      </p:sp>
-      <p:sp>
-        <p:nvSpPr>
-          <p:cNvPr id="1059406974" name="Shape 26"/>
-          <p:cNvSpPr/>
-          <p:nvPr/>
-        </p:nvSpPr>
-        <p:spPr bwMode="auto">
-          <a:xfrm>
-            <a:off x="274320" y="1792224"/>
-            <a:ext cx="8595360" cy="338328"/>
-          </a:xfrm>
-          <a:prstGeom prst="rect">
-            <a:avLst/>
-          </a:prstGeom>
-          <a:solidFill>
-            <a:srgbClr val="FFFFFF"/>
-          </a:solidFill>
-          <a:ln w="6350">
-            <a:solidFill>
-              <a:srgbClr val="CBD5E1"/>
-            </a:solidFill>
-            <a:prstDash val="solid"/>
-          </a:ln>
-        </p:spPr>
-      </p:sp>
-      <p:sp>
-        <p:nvSpPr>
-          <p:cNvPr id="2142033800" name="Text 27"/>
-          <p:cNvSpPr/>
-          <p:nvPr/>
-        </p:nvSpPr>
-        <p:spPr bwMode="auto">
-          <a:xfrm>
-            <a:off x="347472" y="1792224"/>
-            <a:ext cx="4572000" cy="338328"/>
-          </a:xfrm>
-          <a:prstGeom prst="rect">
-            <a:avLst/>
-          </a:prstGeom>
-          <a:noFill/>
-          <a:ln/>
-        </p:spPr>
-        <p:txBody>
-          <a:bodyPr wrap="square" lIns="0" tIns="0" rIns="0" bIns="0" rtlCol="0" anchor="ctr"/>
-          <a:lstStyle/>
-          <a:p>
-            <a:pPr marL="0" indent="0">
-              <a:buNone/>
-              <a:defRPr/>
-            </a:pPr>
-            <a:r>
-              <a:rPr lang="en-US" sz="1000">
-                <a:solidFill>
-                  <a:srgbClr val="0F172A"/>
-                </a:solidFill>
-                <a:latin typeface="Calibri"/>
-                <a:ea typeface="Calibri"/>
-                <a:cs typeface="Calibri"/>
-              </a:rPr>
-              <a:t>Manage comments</a:t>
-            </a:r>
-            <a:endParaRPr lang="en-US" sz="1000"/>
-          </a:p>
-        </p:txBody>
-      </p:sp>
-      <p:sp>
-        <p:nvSpPr>
-          <p:cNvPr id="739613081" name="Shape 28"/>
-          <p:cNvSpPr/>
-          <p:nvPr/>
-        </p:nvSpPr>
-        <p:spPr bwMode="auto">
-          <a:xfrm>
-            <a:off x="5628132" y="1851660"/>
-            <a:ext cx="219456" cy="219456"/>
-          </a:xfrm>
-          <a:prstGeom prst="ellipse">
-            <a:avLst/>
-          </a:prstGeom>
-          <a:solidFill>
-            <a:srgbClr val="3B82F6"/>
-          </a:solidFill>
-          <a:ln w="12700">
+            <a:ln w="12700">
+              <a:solidFill>
+                <a:srgbClr val="9333EA"/>
+              </a:solidFill>
+              <a:prstDash val="solid"/>
+            </a:ln>
+          </p:spPr>
+        </p:sp>
+        <p:sp>
+          <p:nvSpPr>
+            <p:cNvPr id="2023938585" name="Text 25"/>
+            <p:cNvSpPr/>
+            <p:nvPr/>
+          </p:nvSpPr>
+          <p:spPr bwMode="auto">
+            <a:xfrm>
+              <a:off x="8343821" y="706675"/>
+              <a:ext cx="221150" cy="203116"/>
+            </a:xfrm>
+            <a:prstGeom prst="rect">
+              <a:avLst/>
+            </a:prstGeom>
+            <a:noFill/>
+            <a:ln/>
+          </p:spPr>
+          <p:txBody>
+            <a:bodyPr wrap="square" lIns="0" tIns="0" rIns="0" bIns="0" rtlCol="0" anchor="ctr"/>
+            <a:lstStyle/>
+            <a:p>
+              <a:pPr marL="0" indent="0" algn="ctr">
+                <a:buNone/>
+                <a:defRPr/>
+              </a:pPr>
+              <a:r>
+                <a:rPr lang="en-US" sz="1000" b="1">
+                  <a:solidFill>
+                    <a:srgbClr val="FFFFFF"/>
+                  </a:solidFill>
+                </a:rPr>
+                <a:t>✓</a:t>
+              </a:r>
+              <a:endParaRPr lang="en-US" sz="1000"/>
+            </a:p>
+          </p:txBody>
+        </p:sp>
+        <p:sp>
+          <p:nvSpPr>
+            <p:cNvPr id="1177605902" name="Shape 26"/>
+            <p:cNvSpPr/>
+            <p:nvPr/>
+          </p:nvSpPr>
+          <p:spPr bwMode="auto">
+            <a:xfrm flipH="0" flipV="0">
+              <a:off x="0" y="964802"/>
+              <a:ext cx="9098578" cy="313137"/>
+            </a:xfrm>
+            <a:prstGeom prst="rect">
+              <a:avLst/>
+            </a:prstGeom>
+            <a:solidFill>
+              <a:srgbClr val="FFFFFF"/>
+            </a:solidFill>
+            <a:ln w="6350">
+              <a:solidFill>
+                <a:srgbClr val="CBD5E1"/>
+              </a:solidFill>
+              <a:prstDash val="solid"/>
+            </a:ln>
+          </p:spPr>
+        </p:sp>
+        <p:sp>
+          <p:nvSpPr>
+            <p:cNvPr id="250135447" name="Text 27"/>
+            <p:cNvSpPr/>
+            <p:nvPr/>
+          </p:nvSpPr>
+          <p:spPr bwMode="auto">
+            <a:xfrm>
+              <a:off x="73716" y="964802"/>
+              <a:ext cx="4607300" cy="313137"/>
+            </a:xfrm>
+            <a:prstGeom prst="rect">
+              <a:avLst/>
+            </a:prstGeom>
+            <a:noFill/>
+            <a:ln/>
+          </p:spPr>
+          <p:txBody>
+            <a:bodyPr wrap="square" lIns="0" tIns="0" rIns="0" bIns="0" rtlCol="0" anchor="ctr"/>
+            <a:lstStyle/>
+            <a:p>
+              <a:pPr marL="0" indent="0">
+                <a:buNone/>
+                <a:defRPr/>
+              </a:pPr>
+              <a:r>
+                <a:rPr lang="en-US" sz="1000">
+                  <a:solidFill>
+                    <a:srgbClr val="0F172A"/>
+                  </a:solidFill>
+                  <a:latin typeface="Calibri"/>
+                  <a:ea typeface="Calibri"/>
+                  <a:cs typeface="Calibri"/>
+                </a:rPr>
+                <a:t>Create / edit / delete comments</a:t>
+              </a:r>
+              <a:endParaRPr lang="en-US" sz="1000"/>
+            </a:p>
+          </p:txBody>
+        </p:sp>
+        <p:sp>
+          <p:nvSpPr>
+            <p:cNvPr id="1099224223" name="Shape 28"/>
+            <p:cNvSpPr/>
+            <p:nvPr/>
+          </p:nvSpPr>
+          <p:spPr bwMode="auto">
+            <a:xfrm>
+              <a:off x="5395148" y="1019813"/>
+              <a:ext cx="221150" cy="203116"/>
+            </a:xfrm>
+            <a:prstGeom prst="ellipse">
+              <a:avLst/>
+            </a:prstGeom>
             <a:solidFill>
               <a:srgbClr val="3B82F6"/>
             </a:solidFill>
-            <a:prstDash val="solid"/>
-          </a:ln>
-        </p:spPr>
-      </p:sp>
-      <p:sp>
-        <p:nvSpPr>
-          <p:cNvPr id="975151080" name="Text 29"/>
-          <p:cNvSpPr/>
-          <p:nvPr/>
-        </p:nvSpPr>
-        <p:spPr bwMode="auto">
-          <a:xfrm>
-            <a:off x="5628132" y="1851660"/>
-            <a:ext cx="219456" cy="219456"/>
-          </a:xfrm>
-          <a:prstGeom prst="rect">
-            <a:avLst/>
-          </a:prstGeom>
-          <a:noFill/>
-          <a:ln/>
-        </p:spPr>
-        <p:txBody>
-          <a:bodyPr wrap="square" lIns="0" tIns="0" rIns="0" bIns="0" rtlCol="0" anchor="ctr"/>
-          <a:lstStyle/>
-          <a:p>
-            <a:pPr marL="0" indent="0" algn="ctr">
-              <a:buNone/>
-              <a:defRPr/>
-            </a:pPr>
-            <a:r>
-              <a:rPr lang="en-US" sz="1000" b="1">
-                <a:solidFill>
-                  <a:srgbClr val="FFFFFF"/>
-                </a:solidFill>
-              </a:rPr>
-              <a:t>✓</a:t>
-            </a:r>
-            <a:endParaRPr lang="en-US" sz="1000"/>
-          </a:p>
-        </p:txBody>
-      </p:sp>
-      <p:sp>
-        <p:nvSpPr>
-          <p:cNvPr id="1683542529" name="Shape 30"/>
-          <p:cNvSpPr/>
-          <p:nvPr/>
-        </p:nvSpPr>
-        <p:spPr bwMode="auto">
-          <a:xfrm>
-            <a:off x="7091172" y="1851660"/>
-            <a:ext cx="219456" cy="219456"/>
-          </a:xfrm>
-          <a:prstGeom prst="ellipse">
-            <a:avLst/>
-          </a:prstGeom>
-          <a:solidFill>
-            <a:srgbClr val="F97316"/>
-          </a:solidFill>
-          <a:ln w="12700">
+            <a:ln w="12700">
+              <a:solidFill>
+                <a:srgbClr val="3B82F6"/>
+              </a:solidFill>
+              <a:prstDash val="solid"/>
+            </a:ln>
+          </p:spPr>
+        </p:sp>
+        <p:sp>
+          <p:nvSpPr>
+            <p:cNvPr id="1919532903" name="Text 29"/>
+            <p:cNvSpPr/>
+            <p:nvPr/>
+          </p:nvSpPr>
+          <p:spPr bwMode="auto">
+            <a:xfrm>
+              <a:off x="5395148" y="1019813"/>
+              <a:ext cx="221150" cy="203116"/>
+            </a:xfrm>
+            <a:prstGeom prst="rect">
+              <a:avLst/>
+            </a:prstGeom>
+            <a:noFill/>
+            <a:ln/>
+          </p:spPr>
+          <p:txBody>
+            <a:bodyPr wrap="square" lIns="0" tIns="0" rIns="0" bIns="0" rtlCol="0" anchor="ctr"/>
+            <a:lstStyle/>
+            <a:p>
+              <a:pPr marL="0" indent="0" algn="ctr">
+                <a:buNone/>
+                <a:defRPr/>
+              </a:pPr>
+              <a:r>
+                <a:rPr lang="en-US" sz="1000" b="1">
+                  <a:solidFill>
+                    <a:srgbClr val="FFFFFF"/>
+                  </a:solidFill>
+                </a:rPr>
+                <a:t>✓</a:t>
+              </a:r>
+              <a:endParaRPr lang="en-US" sz="1000"/>
+            </a:p>
+          </p:txBody>
+        </p:sp>
+        <p:sp>
+          <p:nvSpPr>
+            <p:cNvPr id="1672286081" name="Shape 30"/>
+            <p:cNvSpPr/>
+            <p:nvPr/>
+          </p:nvSpPr>
+          <p:spPr bwMode="auto">
+            <a:xfrm>
+              <a:off x="6869485" y="1019813"/>
+              <a:ext cx="221150" cy="203116"/>
+            </a:xfrm>
+            <a:prstGeom prst="ellipse">
+              <a:avLst/>
+            </a:prstGeom>
             <a:solidFill>
               <a:srgbClr val="F97316"/>
             </a:solidFill>
-            <a:prstDash val="solid"/>
-          </a:ln>
-        </p:spPr>
-      </p:sp>
-      <p:sp>
-        <p:nvSpPr>
-          <p:cNvPr id="504507761" name="Text 31"/>
-          <p:cNvSpPr/>
-          <p:nvPr/>
-        </p:nvSpPr>
-        <p:spPr bwMode="auto">
-          <a:xfrm>
-            <a:off x="7091172" y="1851660"/>
-            <a:ext cx="219456" cy="219456"/>
-          </a:xfrm>
-          <a:prstGeom prst="rect">
-            <a:avLst/>
-          </a:prstGeom>
-          <a:noFill/>
-          <a:ln/>
-        </p:spPr>
-        <p:txBody>
-          <a:bodyPr wrap="square" lIns="0" tIns="0" rIns="0" bIns="0" rtlCol="0" anchor="ctr"/>
-          <a:lstStyle/>
-          <a:p>
-            <a:pPr marL="0" indent="0" algn="ctr">
-              <a:buNone/>
-              <a:defRPr/>
-            </a:pPr>
-            <a:r>
-              <a:rPr lang="en-US" sz="1000" b="1">
-                <a:solidFill>
-                  <a:srgbClr val="FFFFFF"/>
-                </a:solidFill>
-              </a:rPr>
-              <a:t>✓</a:t>
-            </a:r>
-            <a:endParaRPr lang="en-US" sz="1000"/>
-          </a:p>
-        </p:txBody>
-      </p:sp>
-      <p:sp>
-        <p:nvSpPr>
-          <p:cNvPr id="463067095" name="Shape 32"/>
-          <p:cNvSpPr/>
-          <p:nvPr/>
-        </p:nvSpPr>
-        <p:spPr bwMode="auto">
-          <a:xfrm>
-            <a:off x="8554212" y="1851660"/>
-            <a:ext cx="219456" cy="219456"/>
-          </a:xfrm>
-          <a:prstGeom prst="ellipse">
-            <a:avLst/>
-          </a:prstGeom>
-          <a:solidFill>
-            <a:srgbClr val="9333EA"/>
-          </a:solidFill>
-          <a:ln w="12700">
+            <a:ln w="12700">
+              <a:solidFill>
+                <a:srgbClr val="F97316"/>
+              </a:solidFill>
+              <a:prstDash val="solid"/>
+            </a:ln>
+          </p:spPr>
+        </p:sp>
+        <p:sp>
+          <p:nvSpPr>
+            <p:cNvPr id="98979876" name="Text 31"/>
+            <p:cNvSpPr/>
+            <p:nvPr/>
+          </p:nvSpPr>
+          <p:spPr bwMode="auto">
+            <a:xfrm>
+              <a:off x="6869485" y="1019813"/>
+              <a:ext cx="221150" cy="203116"/>
+            </a:xfrm>
+            <a:prstGeom prst="rect">
+              <a:avLst/>
+            </a:prstGeom>
+            <a:noFill/>
+            <a:ln/>
+          </p:spPr>
+          <p:txBody>
+            <a:bodyPr wrap="square" lIns="0" tIns="0" rIns="0" bIns="0" rtlCol="0" anchor="ctr"/>
+            <a:lstStyle/>
+            <a:p>
+              <a:pPr marL="0" indent="0" algn="ctr">
+                <a:buNone/>
+                <a:defRPr/>
+              </a:pPr>
+              <a:r>
+                <a:rPr lang="en-US" sz="1000" b="1">
+                  <a:solidFill>
+                    <a:srgbClr val="FFFFFF"/>
+                  </a:solidFill>
+                </a:rPr>
+                <a:t>✓</a:t>
+              </a:r>
+              <a:endParaRPr lang="en-US" sz="1000"/>
+            </a:p>
+          </p:txBody>
+        </p:sp>
+        <p:sp>
+          <p:nvSpPr>
+            <p:cNvPr id="2123209013" name="Shape 32"/>
+            <p:cNvSpPr/>
+            <p:nvPr/>
+          </p:nvSpPr>
+          <p:spPr bwMode="auto">
+            <a:xfrm>
+              <a:off x="8343821" y="1019813"/>
+              <a:ext cx="221150" cy="203116"/>
+            </a:xfrm>
+            <a:prstGeom prst="ellipse">
+              <a:avLst/>
+            </a:prstGeom>
             <a:solidFill>
               <a:srgbClr val="9333EA"/>
             </a:solidFill>
-            <a:prstDash val="solid"/>
-          </a:ln>
-        </p:spPr>
-      </p:sp>
-      <p:sp>
-        <p:nvSpPr>
-          <p:cNvPr id="1077633107" name="Text 33"/>
-          <p:cNvSpPr/>
-          <p:nvPr/>
-        </p:nvSpPr>
-        <p:spPr bwMode="auto">
-          <a:xfrm>
-            <a:off x="8554212" y="1851660"/>
-            <a:ext cx="219456" cy="219456"/>
-          </a:xfrm>
-          <a:prstGeom prst="rect">
-            <a:avLst/>
-          </a:prstGeom>
-          <a:noFill/>
-          <a:ln/>
-        </p:spPr>
-        <p:txBody>
-          <a:bodyPr wrap="square" lIns="0" tIns="0" rIns="0" bIns="0" rtlCol="0" anchor="ctr"/>
-          <a:lstStyle/>
-          <a:p>
-            <a:pPr marL="0" indent="0" algn="ctr">
-              <a:buNone/>
-              <a:defRPr/>
-            </a:pPr>
-            <a:r>
-              <a:rPr lang="en-US" sz="1000" b="1">
-                <a:solidFill>
-                  <a:srgbClr val="FFFFFF"/>
-                </a:solidFill>
-              </a:rPr>
-              <a:t>✓</a:t>
-            </a:r>
-            <a:endParaRPr lang="en-US" sz="1000"/>
-          </a:p>
-        </p:txBody>
-      </p:sp>
-      <p:sp>
-        <p:nvSpPr>
-          <p:cNvPr id="144110371" name="Shape 34"/>
-          <p:cNvSpPr/>
-          <p:nvPr/>
-        </p:nvSpPr>
-        <p:spPr bwMode="auto">
-          <a:xfrm>
-            <a:off x="274320" y="2130552"/>
-            <a:ext cx="8595360" cy="338328"/>
-          </a:xfrm>
-          <a:prstGeom prst="rect">
-            <a:avLst/>
-          </a:prstGeom>
-          <a:solidFill>
-            <a:srgbClr val="F1F5F9"/>
-          </a:solidFill>
-          <a:ln w="6350">
-            <a:solidFill>
-              <a:srgbClr val="CBD5E1"/>
-            </a:solidFill>
-            <a:prstDash val="solid"/>
-          </a:ln>
-        </p:spPr>
-      </p:sp>
-      <p:sp>
-        <p:nvSpPr>
-          <p:cNvPr id="2129398674" name="Text 35"/>
-          <p:cNvSpPr/>
-          <p:nvPr/>
-        </p:nvSpPr>
-        <p:spPr bwMode="auto">
-          <a:xfrm>
-            <a:off x="347472" y="2130552"/>
-            <a:ext cx="4572000" cy="338328"/>
-          </a:xfrm>
-          <a:prstGeom prst="rect">
-            <a:avLst/>
-          </a:prstGeom>
-          <a:noFill/>
-          <a:ln/>
-        </p:spPr>
-        <p:txBody>
-          <a:bodyPr wrap="square" lIns="0" tIns="0" rIns="0" bIns="0" rtlCol="0" anchor="ctr"/>
-          <a:lstStyle/>
-          <a:p>
-            <a:pPr marL="0" indent="0">
-              <a:buNone/>
-              <a:defRPr/>
-            </a:pPr>
-            <a:r>
-              <a:rPr lang="en-US" sz="1000">
-                <a:solidFill>
-                  <a:srgbClr val="0F172A"/>
-                </a:solidFill>
-                <a:latin typeface="Calibri"/>
-                <a:ea typeface="Calibri"/>
-                <a:cs typeface="Calibri"/>
-              </a:rPr>
-              <a:t>Search &amp; filter</a:t>
-            </a:r>
-            <a:endParaRPr lang="en-US" sz="1000"/>
-          </a:p>
-        </p:txBody>
-      </p:sp>
-      <p:sp>
-        <p:nvSpPr>
-          <p:cNvPr id="1800297343" name="Shape 36"/>
-          <p:cNvSpPr/>
-          <p:nvPr/>
-        </p:nvSpPr>
-        <p:spPr bwMode="auto">
-          <a:xfrm>
-            <a:off x="5628132" y="2189988"/>
-            <a:ext cx="219456" cy="219456"/>
-          </a:xfrm>
-          <a:prstGeom prst="ellipse">
-            <a:avLst/>
-          </a:prstGeom>
-          <a:solidFill>
-            <a:srgbClr val="3B82F6"/>
-          </a:solidFill>
-          <a:ln w="12700">
+            <a:ln w="12700">
+              <a:solidFill>
+                <a:srgbClr val="9333EA"/>
+              </a:solidFill>
+              <a:prstDash val="solid"/>
+            </a:ln>
+          </p:spPr>
+        </p:sp>
+        <p:sp>
+          <p:nvSpPr>
+            <p:cNvPr id="1527280371" name="Text 33"/>
+            <p:cNvSpPr/>
+            <p:nvPr/>
+          </p:nvSpPr>
+          <p:spPr bwMode="auto">
+            <a:xfrm>
+              <a:off x="8343821" y="1019813"/>
+              <a:ext cx="221150" cy="203116"/>
+            </a:xfrm>
+            <a:prstGeom prst="rect">
+              <a:avLst/>
+            </a:prstGeom>
+            <a:noFill/>
+            <a:ln/>
+          </p:spPr>
+          <p:txBody>
+            <a:bodyPr wrap="square" lIns="0" tIns="0" rIns="0" bIns="0" rtlCol="0" anchor="ctr"/>
+            <a:lstStyle/>
+            <a:p>
+              <a:pPr marL="0" indent="0" algn="ctr">
+                <a:buNone/>
+                <a:defRPr/>
+              </a:pPr>
+              <a:r>
+                <a:rPr lang="en-US" sz="1000" b="1">
+                  <a:solidFill>
+                    <a:srgbClr val="FFFFFF"/>
+                  </a:solidFill>
+                </a:rPr>
+                <a:t>✓</a:t>
+              </a:r>
+              <a:endParaRPr lang="en-US" sz="1000"/>
+            </a:p>
+          </p:txBody>
+        </p:sp>
+        <p:sp>
+          <p:nvSpPr>
+            <p:cNvPr id="1981546480" name="Shape 34"/>
+            <p:cNvSpPr/>
+            <p:nvPr/>
+          </p:nvSpPr>
+          <p:spPr bwMode="auto">
+            <a:xfrm flipH="0" flipV="0">
+              <a:off x="0" y="1277940"/>
+              <a:ext cx="9098578" cy="313137"/>
+            </a:xfrm>
+            <a:prstGeom prst="rect">
+              <a:avLst/>
+            </a:prstGeom>
+            <a:solidFill>
+              <a:srgbClr val="F1F5F9"/>
+            </a:solidFill>
+            <a:ln w="6350">
+              <a:solidFill>
+                <a:srgbClr val="CBD5E1"/>
+              </a:solidFill>
+              <a:prstDash val="solid"/>
+            </a:ln>
+          </p:spPr>
+        </p:sp>
+        <p:sp>
+          <p:nvSpPr>
+            <p:cNvPr id="740284981" name="Text 35"/>
+            <p:cNvSpPr/>
+            <p:nvPr/>
+          </p:nvSpPr>
+          <p:spPr bwMode="auto">
+            <a:xfrm>
+              <a:off x="73716" y="1277940"/>
+              <a:ext cx="4607300" cy="313137"/>
+            </a:xfrm>
+            <a:prstGeom prst="rect">
+              <a:avLst/>
+            </a:prstGeom>
+            <a:noFill/>
+            <a:ln/>
+          </p:spPr>
+          <p:txBody>
+            <a:bodyPr wrap="square" lIns="0" tIns="0" rIns="0" bIns="0" rtlCol="0" anchor="ctr"/>
+            <a:lstStyle/>
+            <a:p>
+              <a:pPr marL="0" indent="0">
+                <a:buNone/>
+                <a:defRPr/>
+              </a:pPr>
+              <a:r>
+                <a:rPr lang="en-US" sz="1000">
+                  <a:solidFill>
+                    <a:srgbClr val="0F172A"/>
+                  </a:solidFill>
+                  <a:latin typeface="Calibri"/>
+                  <a:ea typeface="Calibri"/>
+                  <a:cs typeface="Calibri"/>
+                </a:rPr>
+                <a:t>Create / edit / delete epics</a:t>
+              </a:r>
+              <a:endParaRPr lang="en-US" sz="1000"/>
+            </a:p>
+          </p:txBody>
+        </p:sp>
+        <p:sp>
+          <p:nvSpPr>
+            <p:cNvPr id="561683017" name="Shape 36"/>
+            <p:cNvSpPr/>
+            <p:nvPr/>
+          </p:nvSpPr>
+          <p:spPr bwMode="auto">
+            <a:xfrm>
+              <a:off x="5395148" y="1332951"/>
+              <a:ext cx="221150" cy="203116"/>
+            </a:xfrm>
+            <a:prstGeom prst="ellipse">
+              <a:avLst/>
+            </a:prstGeom>
             <a:solidFill>
               <a:srgbClr val="3B82F6"/>
             </a:solidFill>
-            <a:prstDash val="solid"/>
-          </a:ln>
-        </p:spPr>
-      </p:sp>
-      <p:sp>
-        <p:nvSpPr>
-          <p:cNvPr id="1722029219" name="Text 37"/>
-          <p:cNvSpPr/>
-          <p:nvPr/>
-        </p:nvSpPr>
-        <p:spPr bwMode="auto">
-          <a:xfrm>
-            <a:off x="5628132" y="2189988"/>
-            <a:ext cx="219456" cy="219456"/>
-          </a:xfrm>
-          <a:prstGeom prst="rect">
-            <a:avLst/>
-          </a:prstGeom>
-          <a:noFill/>
-          <a:ln/>
-        </p:spPr>
-        <p:txBody>
-          <a:bodyPr wrap="square" lIns="0" tIns="0" rIns="0" bIns="0" rtlCol="0" anchor="ctr"/>
-          <a:lstStyle/>
-          <a:p>
-            <a:pPr marL="0" indent="0" algn="ctr">
-              <a:buNone/>
-              <a:defRPr/>
-            </a:pPr>
-            <a:r>
-              <a:rPr lang="en-US" sz="1000" b="1">
-                <a:solidFill>
-                  <a:srgbClr val="FFFFFF"/>
-                </a:solidFill>
-              </a:rPr>
-              <a:t>✓</a:t>
-            </a:r>
-            <a:endParaRPr lang="en-US" sz="1000"/>
-          </a:p>
-        </p:txBody>
-      </p:sp>
-      <p:sp>
-        <p:nvSpPr>
-          <p:cNvPr id="1745466406" name="Shape 38"/>
-          <p:cNvSpPr/>
-          <p:nvPr/>
-        </p:nvSpPr>
-        <p:spPr bwMode="auto">
-          <a:xfrm>
-            <a:off x="7091172" y="2189988"/>
-            <a:ext cx="219456" cy="219456"/>
-          </a:xfrm>
-          <a:prstGeom prst="ellipse">
-            <a:avLst/>
-          </a:prstGeom>
-          <a:solidFill>
-            <a:srgbClr val="F97316"/>
-          </a:solidFill>
-          <a:ln w="12700">
+            <a:ln w="12700">
+              <a:solidFill>
+                <a:srgbClr val="3B82F6"/>
+              </a:solidFill>
+              <a:prstDash val="solid"/>
+            </a:ln>
+          </p:spPr>
+        </p:sp>
+        <p:sp>
+          <p:nvSpPr>
+            <p:cNvPr id="1227104612" name="Text 37"/>
+            <p:cNvSpPr/>
+            <p:nvPr/>
+          </p:nvSpPr>
+          <p:spPr bwMode="auto">
+            <a:xfrm>
+              <a:off x="5395148" y="1332951"/>
+              <a:ext cx="221150" cy="203116"/>
+            </a:xfrm>
+            <a:prstGeom prst="rect">
+              <a:avLst/>
+            </a:prstGeom>
+            <a:noFill/>
+            <a:ln/>
+          </p:spPr>
+          <p:txBody>
+            <a:bodyPr wrap="square" lIns="0" tIns="0" rIns="0" bIns="0" rtlCol="0" anchor="ctr"/>
+            <a:lstStyle/>
+            <a:p>
+              <a:pPr marL="0" indent="0" algn="ctr">
+                <a:buNone/>
+                <a:defRPr/>
+              </a:pPr>
+              <a:r>
+                <a:rPr lang="en-US" sz="1000" b="1">
+                  <a:solidFill>
+                    <a:srgbClr val="FFFFFF"/>
+                  </a:solidFill>
+                </a:rPr>
+                <a:t>✓</a:t>
+              </a:r>
+              <a:endParaRPr lang="en-US" sz="1000"/>
+            </a:p>
+          </p:txBody>
+        </p:sp>
+        <p:sp>
+          <p:nvSpPr>
+            <p:cNvPr id="2046931064" name="Shape 38"/>
+            <p:cNvSpPr/>
+            <p:nvPr/>
+          </p:nvSpPr>
+          <p:spPr bwMode="auto">
+            <a:xfrm>
+              <a:off x="6869485" y="1332951"/>
+              <a:ext cx="221150" cy="203116"/>
+            </a:xfrm>
+            <a:prstGeom prst="ellipse">
+              <a:avLst/>
+            </a:prstGeom>
             <a:solidFill>
               <a:srgbClr val="F97316"/>
             </a:solidFill>
-            <a:prstDash val="solid"/>
-          </a:ln>
-        </p:spPr>
-      </p:sp>
-      <p:sp>
-        <p:nvSpPr>
-          <p:cNvPr id="1958491572" name="Text 39"/>
-          <p:cNvSpPr/>
-          <p:nvPr/>
-        </p:nvSpPr>
-        <p:spPr bwMode="auto">
-          <a:xfrm>
-            <a:off x="7091172" y="2189988"/>
-            <a:ext cx="219456" cy="219456"/>
-          </a:xfrm>
-          <a:prstGeom prst="rect">
-            <a:avLst/>
-          </a:prstGeom>
-          <a:noFill/>
-          <a:ln/>
-        </p:spPr>
-        <p:txBody>
-          <a:bodyPr wrap="square" lIns="0" tIns="0" rIns="0" bIns="0" rtlCol="0" anchor="ctr"/>
-          <a:lstStyle/>
-          <a:p>
-            <a:pPr marL="0" indent="0" algn="ctr">
-              <a:buNone/>
-              <a:defRPr/>
-            </a:pPr>
-            <a:r>
-              <a:rPr lang="en-US" sz="1000" b="1">
-                <a:solidFill>
-                  <a:srgbClr val="FFFFFF"/>
-                </a:solidFill>
-              </a:rPr>
-              <a:t>✓</a:t>
-            </a:r>
-            <a:endParaRPr lang="en-US" sz="1000"/>
-          </a:p>
-        </p:txBody>
-      </p:sp>
-      <p:sp>
-        <p:nvSpPr>
-          <p:cNvPr id="1964650230" name="Shape 40"/>
-          <p:cNvSpPr/>
-          <p:nvPr/>
-        </p:nvSpPr>
-        <p:spPr bwMode="auto">
-          <a:xfrm>
-            <a:off x="8554212" y="2189988"/>
-            <a:ext cx="219456" cy="219456"/>
-          </a:xfrm>
-          <a:prstGeom prst="ellipse">
-            <a:avLst/>
-          </a:prstGeom>
-          <a:solidFill>
-            <a:srgbClr val="9333EA"/>
-          </a:solidFill>
-          <a:ln w="12700">
+            <a:ln w="12700">
+              <a:solidFill>
+                <a:srgbClr val="F97316"/>
+              </a:solidFill>
+              <a:prstDash val="solid"/>
+            </a:ln>
+          </p:spPr>
+        </p:sp>
+        <p:sp>
+          <p:nvSpPr>
+            <p:cNvPr id="736417488" name="Text 39"/>
+            <p:cNvSpPr/>
+            <p:nvPr/>
+          </p:nvSpPr>
+          <p:spPr bwMode="auto">
+            <a:xfrm>
+              <a:off x="6869485" y="1332951"/>
+              <a:ext cx="221150" cy="203116"/>
+            </a:xfrm>
+            <a:prstGeom prst="rect">
+              <a:avLst/>
+            </a:prstGeom>
+            <a:noFill/>
+            <a:ln/>
+          </p:spPr>
+          <p:txBody>
+            <a:bodyPr wrap="square" lIns="0" tIns="0" rIns="0" bIns="0" rtlCol="0" anchor="ctr"/>
+            <a:lstStyle/>
+            <a:p>
+              <a:pPr marL="0" indent="0" algn="ctr">
+                <a:buNone/>
+                <a:defRPr/>
+              </a:pPr>
+              <a:r>
+                <a:rPr lang="en-US" sz="1000" b="1">
+                  <a:solidFill>
+                    <a:srgbClr val="FFFFFF"/>
+                  </a:solidFill>
+                </a:rPr>
+                <a:t>✓</a:t>
+              </a:r>
+              <a:endParaRPr lang="en-US" sz="1000"/>
+            </a:p>
+          </p:txBody>
+        </p:sp>
+        <p:sp>
+          <p:nvSpPr>
+            <p:cNvPr id="1060130452" name="Shape 40"/>
+            <p:cNvSpPr/>
+            <p:nvPr/>
+          </p:nvSpPr>
+          <p:spPr bwMode="auto">
+            <a:xfrm>
+              <a:off x="8343821" y="1332951"/>
+              <a:ext cx="221150" cy="203116"/>
+            </a:xfrm>
+            <a:prstGeom prst="ellipse">
+              <a:avLst/>
+            </a:prstGeom>
             <a:solidFill>
               <a:srgbClr val="9333EA"/>
             </a:solidFill>
-            <a:prstDash val="solid"/>
-          </a:ln>
-        </p:spPr>
-      </p:sp>
-      <p:sp>
-        <p:nvSpPr>
-          <p:cNvPr id="1990594831" name="Text 41"/>
-          <p:cNvSpPr/>
-          <p:nvPr/>
-        </p:nvSpPr>
-        <p:spPr bwMode="auto">
-          <a:xfrm>
-            <a:off x="8554212" y="2189988"/>
-            <a:ext cx="219456" cy="219456"/>
-          </a:xfrm>
-          <a:prstGeom prst="rect">
-            <a:avLst/>
-          </a:prstGeom>
-          <a:noFill/>
-          <a:ln/>
-        </p:spPr>
-        <p:txBody>
-          <a:bodyPr wrap="square" lIns="0" tIns="0" rIns="0" bIns="0" rtlCol="0" anchor="ctr"/>
-          <a:lstStyle/>
-          <a:p>
-            <a:pPr marL="0" indent="0" algn="ctr">
-              <a:buNone/>
-              <a:defRPr/>
-            </a:pPr>
-            <a:r>
-              <a:rPr lang="en-US" sz="1000" b="1">
-                <a:solidFill>
-                  <a:srgbClr val="FFFFFF"/>
-                </a:solidFill>
-              </a:rPr>
-              <a:t>✓</a:t>
-            </a:r>
-            <a:endParaRPr lang="en-US" sz="1000"/>
-          </a:p>
-        </p:txBody>
-      </p:sp>
-      <p:sp>
-        <p:nvSpPr>
-          <p:cNvPr id="630047346" name="Shape 42"/>
-          <p:cNvSpPr/>
-          <p:nvPr/>
-        </p:nvSpPr>
-        <p:spPr bwMode="auto">
-          <a:xfrm>
-            <a:off x="274320" y="2468880"/>
-            <a:ext cx="8595360" cy="338328"/>
-          </a:xfrm>
-          <a:prstGeom prst="rect">
-            <a:avLst/>
-          </a:prstGeom>
-          <a:solidFill>
-            <a:srgbClr val="FFFFFF"/>
-          </a:solidFill>
-          <a:ln w="6350">
-            <a:solidFill>
-              <a:srgbClr val="CBD5E1"/>
-            </a:solidFill>
-            <a:prstDash val="solid"/>
-          </a:ln>
-        </p:spPr>
-      </p:sp>
-      <p:sp>
-        <p:nvSpPr>
-          <p:cNvPr id="1472407487" name="Text 43"/>
-          <p:cNvSpPr/>
-          <p:nvPr/>
-        </p:nvSpPr>
-        <p:spPr bwMode="auto">
-          <a:xfrm>
-            <a:off x="347472" y="2468880"/>
-            <a:ext cx="4572000" cy="338328"/>
-          </a:xfrm>
-          <a:prstGeom prst="rect">
-            <a:avLst/>
-          </a:prstGeom>
-          <a:noFill/>
-          <a:ln/>
-        </p:spPr>
-        <p:txBody>
-          <a:bodyPr wrap="square" lIns="0" tIns="0" rIns="0" bIns="0" rtlCol="0" anchor="ctr"/>
-          <a:lstStyle/>
-          <a:p>
-            <a:pPr marL="0" indent="0">
-              <a:buNone/>
-              <a:defRPr/>
-            </a:pPr>
-            <a:r>
-              <a:rPr lang="en-US" sz="1000">
-                <a:solidFill>
-                  <a:srgbClr val="0F172A"/>
-                </a:solidFill>
-                <a:latin typeface="Calibri"/>
-                <a:ea typeface="Calibri"/>
-                <a:cs typeface="Calibri"/>
-              </a:rPr>
-              <a:t>Open dashboard</a:t>
-            </a:r>
-            <a:endParaRPr lang="en-US" sz="1000"/>
-          </a:p>
-        </p:txBody>
-      </p:sp>
-      <p:sp>
-        <p:nvSpPr>
-          <p:cNvPr id="32706799" name="Shape 44"/>
-          <p:cNvSpPr/>
-          <p:nvPr/>
-        </p:nvSpPr>
-        <p:spPr bwMode="auto">
-          <a:xfrm>
-            <a:off x="5628132" y="2528316"/>
-            <a:ext cx="219456" cy="219456"/>
-          </a:xfrm>
-          <a:prstGeom prst="ellipse">
-            <a:avLst/>
-          </a:prstGeom>
-          <a:solidFill>
-            <a:srgbClr val="3B82F6"/>
-          </a:solidFill>
-          <a:ln w="12700">
+            <a:ln w="12700">
+              <a:solidFill>
+                <a:srgbClr val="9333EA"/>
+              </a:solidFill>
+              <a:prstDash val="solid"/>
+            </a:ln>
+          </p:spPr>
+        </p:sp>
+        <p:sp>
+          <p:nvSpPr>
+            <p:cNvPr id="2110235181" name="Text 41"/>
+            <p:cNvSpPr/>
+            <p:nvPr/>
+          </p:nvSpPr>
+          <p:spPr bwMode="auto">
+            <a:xfrm>
+              <a:off x="8343821" y="1332951"/>
+              <a:ext cx="221150" cy="203116"/>
+            </a:xfrm>
+            <a:prstGeom prst="rect">
+              <a:avLst/>
+            </a:prstGeom>
+            <a:noFill/>
+            <a:ln/>
+          </p:spPr>
+          <p:txBody>
+            <a:bodyPr wrap="square" lIns="0" tIns="0" rIns="0" bIns="0" rtlCol="0" anchor="ctr"/>
+            <a:lstStyle/>
+            <a:p>
+              <a:pPr marL="0" indent="0" algn="ctr">
+                <a:buNone/>
+                <a:defRPr/>
+              </a:pPr>
+              <a:r>
+                <a:rPr lang="en-US" sz="1000" b="1">
+                  <a:solidFill>
+                    <a:srgbClr val="FFFFFF"/>
+                  </a:solidFill>
+                </a:rPr>
+                <a:t>✓</a:t>
+              </a:r>
+              <a:endParaRPr lang="en-US" sz="1000"/>
+            </a:p>
+          </p:txBody>
+        </p:sp>
+        <p:sp>
+          <p:nvSpPr>
+            <p:cNvPr id="34761740" name="Shape 42"/>
+            <p:cNvSpPr/>
+            <p:nvPr/>
+          </p:nvSpPr>
+          <p:spPr bwMode="auto">
+            <a:xfrm flipH="0" flipV="0">
+              <a:off x="0" y="1591078"/>
+              <a:ext cx="9098578" cy="313137"/>
+            </a:xfrm>
+            <a:prstGeom prst="rect">
+              <a:avLst/>
+            </a:prstGeom>
+            <a:solidFill>
+              <a:srgbClr val="FFFFFF"/>
+            </a:solidFill>
+            <a:ln w="6350">
+              <a:solidFill>
+                <a:srgbClr val="CBD5E1"/>
+              </a:solidFill>
+              <a:prstDash val="solid"/>
+            </a:ln>
+          </p:spPr>
+        </p:sp>
+        <p:sp>
+          <p:nvSpPr>
+            <p:cNvPr id="1947324267" name="Text 43"/>
+            <p:cNvSpPr/>
+            <p:nvPr/>
+          </p:nvSpPr>
+          <p:spPr bwMode="auto">
+            <a:xfrm>
+              <a:off x="73716" y="1591078"/>
+              <a:ext cx="4607300" cy="313137"/>
+            </a:xfrm>
+            <a:prstGeom prst="rect">
+              <a:avLst/>
+            </a:prstGeom>
+            <a:noFill/>
+            <a:ln/>
+          </p:spPr>
+          <p:txBody>
+            <a:bodyPr wrap="square" lIns="0" tIns="0" rIns="0" bIns="0" rtlCol="0" anchor="ctr"/>
+            <a:lstStyle/>
+            <a:p>
+              <a:pPr marL="0" indent="0">
+                <a:buNone/>
+                <a:defRPr/>
+              </a:pPr>
+              <a:r>
+                <a:rPr lang="en-US" sz="1000">
+                  <a:solidFill>
+                    <a:srgbClr val="0F172A"/>
+                  </a:solidFill>
+                  <a:latin typeface="Calibri"/>
+                  <a:ea typeface="Calibri"/>
+                  <a:cs typeface="Calibri"/>
+                </a:rPr>
+                <a:t>Assign epic to task</a:t>
+              </a:r>
+              <a:endParaRPr lang="en-US" sz="1000"/>
+            </a:p>
+          </p:txBody>
+        </p:sp>
+        <p:sp>
+          <p:nvSpPr>
+            <p:cNvPr id="1380571264" name="Shape 44"/>
+            <p:cNvSpPr/>
+            <p:nvPr/>
+          </p:nvSpPr>
+          <p:spPr bwMode="auto">
+            <a:xfrm>
+              <a:off x="5395148" y="1646089"/>
+              <a:ext cx="221150" cy="203116"/>
+            </a:xfrm>
+            <a:prstGeom prst="ellipse">
+              <a:avLst/>
+            </a:prstGeom>
             <a:solidFill>
               <a:srgbClr val="3B82F6"/>
             </a:solidFill>
-            <a:prstDash val="solid"/>
-          </a:ln>
-        </p:spPr>
-      </p:sp>
-      <p:sp>
-        <p:nvSpPr>
-          <p:cNvPr id="1217394868" name="Text 45"/>
-          <p:cNvSpPr/>
-          <p:nvPr/>
-        </p:nvSpPr>
-        <p:spPr bwMode="auto">
-          <a:xfrm>
-            <a:off x="5628132" y="2528316"/>
-            <a:ext cx="219456" cy="219456"/>
-          </a:xfrm>
-          <a:prstGeom prst="rect">
-            <a:avLst/>
-          </a:prstGeom>
-          <a:noFill/>
-          <a:ln/>
-        </p:spPr>
-        <p:txBody>
-          <a:bodyPr wrap="square" lIns="0" tIns="0" rIns="0" bIns="0" rtlCol="0" anchor="ctr"/>
-          <a:lstStyle/>
-          <a:p>
-            <a:pPr marL="0" indent="0" algn="ctr">
-              <a:buNone/>
-              <a:defRPr/>
-            </a:pPr>
-            <a:r>
-              <a:rPr lang="en-US" sz="1000" b="1">
-                <a:solidFill>
-                  <a:srgbClr val="FFFFFF"/>
-                </a:solidFill>
-              </a:rPr>
-              <a:t>✓</a:t>
-            </a:r>
-            <a:endParaRPr lang="en-US" sz="1000"/>
-          </a:p>
-        </p:txBody>
-      </p:sp>
-      <p:sp>
-        <p:nvSpPr>
-          <p:cNvPr id="984788300" name="Shape 46"/>
-          <p:cNvSpPr/>
-          <p:nvPr/>
-        </p:nvSpPr>
-        <p:spPr bwMode="auto">
-          <a:xfrm>
-            <a:off x="7091172" y="2528316"/>
-            <a:ext cx="219456" cy="219456"/>
-          </a:xfrm>
-          <a:prstGeom prst="ellipse">
-            <a:avLst/>
-          </a:prstGeom>
-          <a:solidFill>
-            <a:srgbClr val="F97316"/>
-          </a:solidFill>
-          <a:ln w="12700">
+            <a:ln w="12700">
+              <a:solidFill>
+                <a:srgbClr val="3B82F6"/>
+              </a:solidFill>
+              <a:prstDash val="solid"/>
+            </a:ln>
+          </p:spPr>
+        </p:sp>
+        <p:sp>
+          <p:nvSpPr>
+            <p:cNvPr id="347611539" name="Text 45"/>
+            <p:cNvSpPr/>
+            <p:nvPr/>
+          </p:nvSpPr>
+          <p:spPr bwMode="auto">
+            <a:xfrm>
+              <a:off x="5395148" y="1646089"/>
+              <a:ext cx="221150" cy="203116"/>
+            </a:xfrm>
+            <a:prstGeom prst="rect">
+              <a:avLst/>
+            </a:prstGeom>
+            <a:noFill/>
+            <a:ln/>
+          </p:spPr>
+          <p:txBody>
+            <a:bodyPr wrap="square" lIns="0" tIns="0" rIns="0" bIns="0" rtlCol="0" anchor="ctr"/>
+            <a:lstStyle/>
+            <a:p>
+              <a:pPr marL="0" indent="0" algn="ctr">
+                <a:buNone/>
+                <a:defRPr/>
+              </a:pPr>
+              <a:r>
+                <a:rPr lang="en-US" sz="1000" b="1">
+                  <a:solidFill>
+                    <a:srgbClr val="FFFFFF"/>
+                  </a:solidFill>
+                </a:rPr>
+                <a:t>✓</a:t>
+              </a:r>
+              <a:endParaRPr lang="en-US" sz="1000"/>
+            </a:p>
+          </p:txBody>
+        </p:sp>
+        <p:sp>
+          <p:nvSpPr>
+            <p:cNvPr id="964071559" name="Shape 46"/>
+            <p:cNvSpPr/>
+            <p:nvPr/>
+          </p:nvSpPr>
+          <p:spPr bwMode="auto">
+            <a:xfrm>
+              <a:off x="6869485" y="1646089"/>
+              <a:ext cx="221150" cy="203116"/>
+            </a:xfrm>
+            <a:prstGeom prst="ellipse">
+              <a:avLst/>
+            </a:prstGeom>
             <a:solidFill>
               <a:srgbClr val="F97316"/>
             </a:solidFill>
-            <a:prstDash val="solid"/>
-          </a:ln>
-        </p:spPr>
-      </p:sp>
-      <p:sp>
-        <p:nvSpPr>
-          <p:cNvPr id="1738937078" name="Text 47"/>
-          <p:cNvSpPr/>
-          <p:nvPr/>
-        </p:nvSpPr>
-        <p:spPr bwMode="auto">
-          <a:xfrm>
-            <a:off x="7091172" y="2528316"/>
-            <a:ext cx="219456" cy="219456"/>
-          </a:xfrm>
-          <a:prstGeom prst="rect">
-            <a:avLst/>
-          </a:prstGeom>
-          <a:noFill/>
-          <a:ln/>
-        </p:spPr>
-        <p:txBody>
-          <a:bodyPr wrap="square" lIns="0" tIns="0" rIns="0" bIns="0" rtlCol="0" anchor="ctr"/>
-          <a:lstStyle/>
-          <a:p>
-            <a:pPr marL="0" indent="0" algn="ctr">
-              <a:buNone/>
-              <a:defRPr/>
-            </a:pPr>
-            <a:r>
-              <a:rPr lang="en-US" sz="1000" b="1">
-                <a:solidFill>
-                  <a:srgbClr val="FFFFFF"/>
-                </a:solidFill>
-              </a:rPr>
-              <a:t>✓</a:t>
-            </a:r>
-            <a:endParaRPr lang="en-US" sz="1000"/>
-          </a:p>
-        </p:txBody>
-      </p:sp>
-      <p:sp>
-        <p:nvSpPr>
-          <p:cNvPr id="592455303" name="Shape 48"/>
-          <p:cNvSpPr/>
-          <p:nvPr/>
-        </p:nvSpPr>
-        <p:spPr bwMode="auto">
-          <a:xfrm>
-            <a:off x="8554212" y="2528316"/>
-            <a:ext cx="219456" cy="219456"/>
-          </a:xfrm>
-          <a:prstGeom prst="ellipse">
-            <a:avLst/>
-          </a:prstGeom>
-          <a:solidFill>
-            <a:srgbClr val="9333EA"/>
-          </a:solidFill>
-          <a:ln w="12700">
+            <a:ln w="12700">
+              <a:solidFill>
+                <a:srgbClr val="F97316"/>
+              </a:solidFill>
+              <a:prstDash val="solid"/>
+            </a:ln>
+          </p:spPr>
+        </p:sp>
+        <p:sp>
+          <p:nvSpPr>
+            <p:cNvPr id="1524674980" name="Text 47"/>
+            <p:cNvSpPr/>
+            <p:nvPr/>
+          </p:nvSpPr>
+          <p:spPr bwMode="auto">
+            <a:xfrm>
+              <a:off x="6869485" y="1646089"/>
+              <a:ext cx="221150" cy="203116"/>
+            </a:xfrm>
+            <a:prstGeom prst="rect">
+              <a:avLst/>
+            </a:prstGeom>
+            <a:noFill/>
+            <a:ln/>
+          </p:spPr>
+          <p:txBody>
+            <a:bodyPr wrap="square" lIns="0" tIns="0" rIns="0" bIns="0" rtlCol="0" anchor="ctr"/>
+            <a:lstStyle/>
+            <a:p>
+              <a:pPr marL="0" indent="0" algn="ctr">
+                <a:buNone/>
+                <a:defRPr/>
+              </a:pPr>
+              <a:r>
+                <a:rPr lang="en-US" sz="1000" b="1">
+                  <a:solidFill>
+                    <a:srgbClr val="FFFFFF"/>
+                  </a:solidFill>
+                </a:rPr>
+                <a:t>✓</a:t>
+              </a:r>
+              <a:endParaRPr lang="en-US" sz="1000"/>
+            </a:p>
+          </p:txBody>
+        </p:sp>
+        <p:sp>
+          <p:nvSpPr>
+            <p:cNvPr id="7887145" name="Shape 48"/>
+            <p:cNvSpPr/>
+            <p:nvPr/>
+          </p:nvSpPr>
+          <p:spPr bwMode="auto">
+            <a:xfrm>
+              <a:off x="8343821" y="1646089"/>
+              <a:ext cx="221150" cy="203116"/>
+            </a:xfrm>
+            <a:prstGeom prst="ellipse">
+              <a:avLst/>
+            </a:prstGeom>
             <a:solidFill>
               <a:srgbClr val="9333EA"/>
             </a:solidFill>
-            <a:prstDash val="solid"/>
-          </a:ln>
-        </p:spPr>
-      </p:sp>
-      <p:sp>
-        <p:nvSpPr>
-          <p:cNvPr id="176905474" name="Text 49"/>
-          <p:cNvSpPr/>
-          <p:nvPr/>
-        </p:nvSpPr>
-        <p:spPr bwMode="auto">
-          <a:xfrm>
-            <a:off x="8554212" y="2528316"/>
-            <a:ext cx="219456" cy="219456"/>
-          </a:xfrm>
-          <a:prstGeom prst="rect">
-            <a:avLst/>
-          </a:prstGeom>
-          <a:noFill/>
-          <a:ln/>
-        </p:spPr>
-        <p:txBody>
-          <a:bodyPr wrap="square" lIns="0" tIns="0" rIns="0" bIns="0" rtlCol="0" anchor="ctr"/>
-          <a:lstStyle/>
-          <a:p>
-            <a:pPr marL="0" indent="0" algn="ctr">
-              <a:buNone/>
-              <a:defRPr/>
-            </a:pPr>
-            <a:r>
-              <a:rPr lang="en-US" sz="1000" b="1">
-                <a:solidFill>
-                  <a:srgbClr val="FFFFFF"/>
-                </a:solidFill>
-              </a:rPr>
-              <a:t>✓</a:t>
-            </a:r>
-            <a:endParaRPr lang="en-US" sz="1000"/>
-          </a:p>
-        </p:txBody>
-      </p:sp>
-      <p:sp>
-        <p:nvSpPr>
-          <p:cNvPr id="99714870" name="Shape 50"/>
-          <p:cNvSpPr/>
-          <p:nvPr/>
-        </p:nvSpPr>
-        <p:spPr bwMode="auto">
-          <a:xfrm>
-            <a:off x="274320" y="2807208"/>
-            <a:ext cx="8595360" cy="338328"/>
-          </a:xfrm>
-          <a:prstGeom prst="rect">
-            <a:avLst/>
-          </a:prstGeom>
-          <a:solidFill>
-            <a:srgbClr val="F1F5F9"/>
-          </a:solidFill>
-          <a:ln w="6350">
-            <a:solidFill>
-              <a:srgbClr val="CBD5E1"/>
-            </a:solidFill>
-            <a:prstDash val="solid"/>
-          </a:ln>
-        </p:spPr>
-      </p:sp>
-      <p:sp>
-        <p:nvSpPr>
-          <p:cNvPr id="862856699" name="Text 51"/>
-          <p:cNvSpPr/>
-          <p:nvPr/>
-        </p:nvSpPr>
-        <p:spPr bwMode="auto">
-          <a:xfrm>
-            <a:off x="347472" y="2807208"/>
-            <a:ext cx="4572000" cy="338328"/>
-          </a:xfrm>
-          <a:prstGeom prst="rect">
-            <a:avLst/>
-          </a:prstGeom>
-          <a:noFill/>
-          <a:ln/>
-        </p:spPr>
-        <p:txBody>
-          <a:bodyPr wrap="square" lIns="0" tIns="0" rIns="0" bIns="0" rtlCol="0" anchor="ctr"/>
-          <a:lstStyle/>
-          <a:p>
-            <a:pPr marL="0" indent="0">
-              <a:buNone/>
-              <a:defRPr/>
-            </a:pPr>
-            <a:r>
-              <a:rPr lang="en-US" sz="1000">
-                <a:solidFill>
-                  <a:srgbClr val="0F172A"/>
-                </a:solidFill>
-                <a:latin typeface="Calibri"/>
-                <a:ea typeface="Calibri"/>
-                <a:cs typeface="Calibri"/>
-              </a:rPr>
-              <a:t>Login / sign up</a:t>
-            </a:r>
-            <a:endParaRPr lang="en-US" sz="1000"/>
-          </a:p>
-        </p:txBody>
-      </p:sp>
-      <p:sp>
-        <p:nvSpPr>
-          <p:cNvPr id="465513931" name="Shape 52"/>
-          <p:cNvSpPr/>
-          <p:nvPr/>
-        </p:nvSpPr>
-        <p:spPr bwMode="auto">
-          <a:xfrm>
-            <a:off x="5628132" y="2866644"/>
-            <a:ext cx="219456" cy="219456"/>
-          </a:xfrm>
-          <a:prstGeom prst="ellipse">
-            <a:avLst/>
-          </a:prstGeom>
-          <a:solidFill>
-            <a:srgbClr val="3B82F6"/>
-          </a:solidFill>
-          <a:ln w="12700">
+            <a:ln w="12700">
+              <a:solidFill>
+                <a:srgbClr val="9333EA"/>
+              </a:solidFill>
+              <a:prstDash val="solid"/>
+            </a:ln>
+          </p:spPr>
+        </p:sp>
+        <p:sp>
+          <p:nvSpPr>
+            <p:cNvPr id="391639294" name="Text 49"/>
+            <p:cNvSpPr/>
+            <p:nvPr/>
+          </p:nvSpPr>
+          <p:spPr bwMode="auto">
+            <a:xfrm>
+              <a:off x="8343821" y="1646089"/>
+              <a:ext cx="221150" cy="203116"/>
+            </a:xfrm>
+            <a:prstGeom prst="rect">
+              <a:avLst/>
+            </a:prstGeom>
+            <a:noFill/>
+            <a:ln/>
+          </p:spPr>
+          <p:txBody>
+            <a:bodyPr wrap="square" lIns="0" tIns="0" rIns="0" bIns="0" rtlCol="0" anchor="ctr"/>
+            <a:lstStyle/>
+            <a:p>
+              <a:pPr marL="0" indent="0" algn="ctr">
+                <a:buNone/>
+                <a:defRPr/>
+              </a:pPr>
+              <a:r>
+                <a:rPr lang="en-US" sz="1000" b="1">
+                  <a:solidFill>
+                    <a:srgbClr val="FFFFFF"/>
+                  </a:solidFill>
+                </a:rPr>
+                <a:t>✓</a:t>
+              </a:r>
+              <a:endParaRPr lang="en-US" sz="1000"/>
+            </a:p>
+          </p:txBody>
+        </p:sp>
+        <p:sp>
+          <p:nvSpPr>
+            <p:cNvPr id="1992998960" name="Shape 50"/>
+            <p:cNvSpPr/>
+            <p:nvPr/>
+          </p:nvSpPr>
+          <p:spPr bwMode="auto">
+            <a:xfrm flipH="0" flipV="0">
+              <a:off x="0" y="1904216"/>
+              <a:ext cx="9098578" cy="313137"/>
+            </a:xfrm>
+            <a:prstGeom prst="rect">
+              <a:avLst/>
+            </a:prstGeom>
+            <a:solidFill>
+              <a:srgbClr val="F1F5F9"/>
+            </a:solidFill>
+            <a:ln w="6350">
+              <a:solidFill>
+                <a:srgbClr val="CBD5E1"/>
+              </a:solidFill>
+              <a:prstDash val="solid"/>
+            </a:ln>
+          </p:spPr>
+        </p:sp>
+        <p:sp>
+          <p:nvSpPr>
+            <p:cNvPr id="1387035667" name="Text 51"/>
+            <p:cNvSpPr/>
+            <p:nvPr/>
+          </p:nvSpPr>
+          <p:spPr bwMode="auto">
+            <a:xfrm>
+              <a:off x="73716" y="1904216"/>
+              <a:ext cx="4607300" cy="313137"/>
+            </a:xfrm>
+            <a:prstGeom prst="rect">
+              <a:avLst/>
+            </a:prstGeom>
+            <a:noFill/>
+            <a:ln/>
+          </p:spPr>
+          <p:txBody>
+            <a:bodyPr wrap="square" lIns="0" tIns="0" rIns="0" bIns="0" rtlCol="0" anchor="ctr"/>
+            <a:lstStyle/>
+            <a:p>
+              <a:pPr marL="0" indent="0">
+                <a:buNone/>
+                <a:defRPr/>
+              </a:pPr>
+              <a:r>
+                <a:rPr lang="en-US" sz="1000">
+                  <a:solidFill>
+                    <a:srgbClr val="0F172A"/>
+                  </a:solidFill>
+                  <a:latin typeface="Calibri"/>
+                  <a:ea typeface="Calibri"/>
+                  <a:cs typeface="Calibri"/>
+                </a:rPr>
+                <a:t>Assign project member to task</a:t>
+              </a:r>
+              <a:endParaRPr lang="en-US" sz="1000"/>
+            </a:p>
+          </p:txBody>
+        </p:sp>
+        <p:sp>
+          <p:nvSpPr>
+            <p:cNvPr id="1316202197" name="Shape 52"/>
+            <p:cNvSpPr/>
+            <p:nvPr/>
+          </p:nvSpPr>
+          <p:spPr bwMode="auto">
+            <a:xfrm>
+              <a:off x="5395148" y="1959227"/>
+              <a:ext cx="221150" cy="203116"/>
+            </a:xfrm>
+            <a:prstGeom prst="ellipse">
+              <a:avLst/>
+            </a:prstGeom>
             <a:solidFill>
               <a:srgbClr val="3B82F6"/>
             </a:solidFill>
-            <a:prstDash val="solid"/>
-          </a:ln>
-        </p:spPr>
-      </p:sp>
-      <p:sp>
-        <p:nvSpPr>
-          <p:cNvPr id="1201956918" name="Text 53"/>
-          <p:cNvSpPr/>
-          <p:nvPr/>
-        </p:nvSpPr>
-        <p:spPr bwMode="auto">
-          <a:xfrm>
-            <a:off x="5628132" y="2866644"/>
-            <a:ext cx="219456" cy="219456"/>
-          </a:xfrm>
-          <a:prstGeom prst="rect">
-            <a:avLst/>
-          </a:prstGeom>
-          <a:noFill/>
-          <a:ln/>
-        </p:spPr>
-        <p:txBody>
-          <a:bodyPr wrap="square" lIns="0" tIns="0" rIns="0" bIns="0" rtlCol="0" anchor="ctr"/>
-          <a:lstStyle/>
-          <a:p>
-            <a:pPr marL="0" indent="0" algn="ctr">
-              <a:buNone/>
-              <a:defRPr/>
-            </a:pPr>
-            <a:r>
-              <a:rPr lang="en-US" sz="1000" b="1">
-                <a:solidFill>
-                  <a:srgbClr val="FFFFFF"/>
-                </a:solidFill>
-              </a:rPr>
-              <a:t>✓</a:t>
-            </a:r>
-            <a:endParaRPr lang="en-US" sz="1000"/>
-          </a:p>
-        </p:txBody>
-      </p:sp>
-      <p:sp>
-        <p:nvSpPr>
-          <p:cNvPr id="2056775593" name="Shape 54"/>
-          <p:cNvSpPr/>
-          <p:nvPr/>
-        </p:nvSpPr>
-        <p:spPr bwMode="auto">
-          <a:xfrm>
-            <a:off x="7091172" y="2866644"/>
-            <a:ext cx="219456" cy="219456"/>
-          </a:xfrm>
-          <a:prstGeom prst="ellipse">
-            <a:avLst/>
-          </a:prstGeom>
-          <a:solidFill>
-            <a:srgbClr val="F97316"/>
-          </a:solidFill>
-          <a:ln w="12700">
+            <a:ln w="12700">
+              <a:solidFill>
+                <a:srgbClr val="3B82F6"/>
+              </a:solidFill>
+              <a:prstDash val="solid"/>
+            </a:ln>
+          </p:spPr>
+        </p:sp>
+        <p:sp>
+          <p:nvSpPr>
+            <p:cNvPr id="1995046052" name="Text 53"/>
+            <p:cNvSpPr/>
+            <p:nvPr/>
+          </p:nvSpPr>
+          <p:spPr bwMode="auto">
+            <a:xfrm>
+              <a:off x="5395148" y="1959227"/>
+              <a:ext cx="221150" cy="203116"/>
+            </a:xfrm>
+            <a:prstGeom prst="rect">
+              <a:avLst/>
+            </a:prstGeom>
+            <a:noFill/>
+            <a:ln/>
+          </p:spPr>
+          <p:txBody>
+            <a:bodyPr wrap="square" lIns="0" tIns="0" rIns="0" bIns="0" rtlCol="0" anchor="ctr"/>
+            <a:lstStyle/>
+            <a:p>
+              <a:pPr marL="0" indent="0" algn="ctr">
+                <a:buNone/>
+                <a:defRPr/>
+              </a:pPr>
+              <a:r>
+                <a:rPr lang="en-US" sz="1000" b="1">
+                  <a:solidFill>
+                    <a:srgbClr val="FFFFFF"/>
+                  </a:solidFill>
+                </a:rPr>
+                <a:t>✓</a:t>
+              </a:r>
+              <a:endParaRPr lang="en-US" sz="1000"/>
+            </a:p>
+          </p:txBody>
+        </p:sp>
+        <p:sp>
+          <p:nvSpPr>
+            <p:cNvPr id="1529429505" name="Shape 54"/>
+            <p:cNvSpPr/>
+            <p:nvPr/>
+          </p:nvSpPr>
+          <p:spPr bwMode="auto">
+            <a:xfrm>
+              <a:off x="6869485" y="1959227"/>
+              <a:ext cx="221150" cy="203116"/>
+            </a:xfrm>
+            <a:prstGeom prst="ellipse">
+              <a:avLst/>
+            </a:prstGeom>
             <a:solidFill>
               <a:srgbClr val="F97316"/>
             </a:solidFill>
-            <a:prstDash val="solid"/>
-          </a:ln>
-        </p:spPr>
-      </p:sp>
-      <p:sp>
-        <p:nvSpPr>
-          <p:cNvPr id="1325704124" name="Text 55"/>
-          <p:cNvSpPr/>
-          <p:nvPr/>
-        </p:nvSpPr>
-        <p:spPr bwMode="auto">
-          <a:xfrm>
-            <a:off x="7091172" y="2866644"/>
-            <a:ext cx="219456" cy="219456"/>
-          </a:xfrm>
-          <a:prstGeom prst="rect">
-            <a:avLst/>
-          </a:prstGeom>
-          <a:noFill/>
-          <a:ln/>
-        </p:spPr>
-        <p:txBody>
-          <a:bodyPr wrap="square" lIns="0" tIns="0" rIns="0" bIns="0" rtlCol="0" anchor="ctr"/>
-          <a:lstStyle/>
-          <a:p>
-            <a:pPr marL="0" indent="0" algn="ctr">
-              <a:buNone/>
-              <a:defRPr/>
-            </a:pPr>
-            <a:r>
-              <a:rPr lang="en-US" sz="1000" b="1">
-                <a:solidFill>
-                  <a:srgbClr val="FFFFFF"/>
-                </a:solidFill>
-              </a:rPr>
-              <a:t>✓</a:t>
-            </a:r>
-            <a:endParaRPr lang="en-US" sz="1000"/>
-          </a:p>
-        </p:txBody>
-      </p:sp>
-      <p:sp>
-        <p:nvSpPr>
-          <p:cNvPr id="17342035" name="Shape 56"/>
-          <p:cNvSpPr/>
-          <p:nvPr/>
-        </p:nvSpPr>
-        <p:spPr bwMode="auto">
-          <a:xfrm>
-            <a:off x="8554212" y="2866644"/>
-            <a:ext cx="219456" cy="219456"/>
-          </a:xfrm>
-          <a:prstGeom prst="ellipse">
-            <a:avLst/>
-          </a:prstGeom>
-          <a:solidFill>
-            <a:srgbClr val="9333EA"/>
-          </a:solidFill>
-          <a:ln w="12700">
+            <a:ln w="12700">
+              <a:solidFill>
+                <a:srgbClr val="F97316"/>
+              </a:solidFill>
+              <a:prstDash val="solid"/>
+            </a:ln>
+          </p:spPr>
+        </p:sp>
+        <p:sp>
+          <p:nvSpPr>
+            <p:cNvPr id="1454825536" name="Text 55"/>
+            <p:cNvSpPr/>
+            <p:nvPr/>
+          </p:nvSpPr>
+          <p:spPr bwMode="auto">
+            <a:xfrm>
+              <a:off x="6869485" y="1959227"/>
+              <a:ext cx="221150" cy="203116"/>
+            </a:xfrm>
+            <a:prstGeom prst="rect">
+              <a:avLst/>
+            </a:prstGeom>
+            <a:noFill/>
+            <a:ln/>
+          </p:spPr>
+          <p:txBody>
+            <a:bodyPr wrap="square" lIns="0" tIns="0" rIns="0" bIns="0" rtlCol="0" anchor="ctr"/>
+            <a:lstStyle/>
+            <a:p>
+              <a:pPr marL="0" indent="0" algn="ctr">
+                <a:buNone/>
+                <a:defRPr/>
+              </a:pPr>
+              <a:r>
+                <a:rPr lang="en-US" sz="1000" b="1">
+                  <a:solidFill>
+                    <a:srgbClr val="FFFFFF"/>
+                  </a:solidFill>
+                </a:rPr>
+                <a:t>✓</a:t>
+              </a:r>
+              <a:endParaRPr lang="en-US" sz="1000"/>
+            </a:p>
+          </p:txBody>
+        </p:sp>
+        <p:sp>
+          <p:nvSpPr>
+            <p:cNvPr id="938115358" name="Shape 56"/>
+            <p:cNvSpPr/>
+            <p:nvPr/>
+          </p:nvSpPr>
+          <p:spPr bwMode="auto">
+            <a:xfrm>
+              <a:off x="8343821" y="1959227"/>
+              <a:ext cx="221150" cy="203116"/>
+            </a:xfrm>
+            <a:prstGeom prst="ellipse">
+              <a:avLst/>
+            </a:prstGeom>
             <a:solidFill>
               <a:srgbClr val="9333EA"/>
             </a:solidFill>
-            <a:prstDash val="solid"/>
-          </a:ln>
-        </p:spPr>
-      </p:sp>
-      <p:sp>
-        <p:nvSpPr>
-          <p:cNvPr id="1372155868" name="Text 57"/>
-          <p:cNvSpPr/>
-          <p:nvPr/>
-        </p:nvSpPr>
-        <p:spPr bwMode="auto">
-          <a:xfrm>
-            <a:off x="8554212" y="2866644"/>
-            <a:ext cx="219456" cy="219456"/>
-          </a:xfrm>
-          <a:prstGeom prst="rect">
-            <a:avLst/>
-          </a:prstGeom>
-          <a:noFill/>
-          <a:ln/>
-        </p:spPr>
-        <p:txBody>
-          <a:bodyPr wrap="square" lIns="0" tIns="0" rIns="0" bIns="0" rtlCol="0" anchor="ctr"/>
-          <a:lstStyle/>
-          <a:p>
-            <a:pPr marL="0" indent="0" algn="ctr">
-              <a:buNone/>
-              <a:defRPr/>
-            </a:pPr>
-            <a:r>
-              <a:rPr lang="en-US" sz="1000" b="1">
-                <a:solidFill>
-                  <a:srgbClr val="FFFFFF"/>
-                </a:solidFill>
-              </a:rPr>
-              <a:t>✓</a:t>
-            </a:r>
-            <a:endParaRPr lang="en-US" sz="1000"/>
-          </a:p>
-        </p:txBody>
-      </p:sp>
-      <p:sp>
-        <p:nvSpPr>
-          <p:cNvPr id="1438722078" name="Shape 58"/>
-          <p:cNvSpPr/>
-          <p:nvPr/>
-        </p:nvSpPr>
-        <p:spPr bwMode="auto">
-          <a:xfrm>
-            <a:off x="274320" y="3145536"/>
-            <a:ext cx="8595360" cy="338328"/>
-          </a:xfrm>
-          <a:prstGeom prst="rect">
-            <a:avLst/>
-          </a:prstGeom>
-          <a:solidFill>
-            <a:srgbClr val="FFFFFF"/>
-          </a:solidFill>
-          <a:ln w="6350">
-            <a:solidFill>
-              <a:srgbClr val="CBD5E1"/>
-            </a:solidFill>
-            <a:prstDash val="solid"/>
-          </a:ln>
-        </p:spPr>
-      </p:sp>
-      <p:sp>
-        <p:nvSpPr>
-          <p:cNvPr id="150293323" name="Text 59"/>
-          <p:cNvSpPr/>
-          <p:nvPr/>
-        </p:nvSpPr>
-        <p:spPr bwMode="auto">
-          <a:xfrm>
-            <a:off x="347472" y="3145536"/>
-            <a:ext cx="4572000" cy="338328"/>
-          </a:xfrm>
-          <a:prstGeom prst="rect">
-            <a:avLst/>
-          </a:prstGeom>
-          <a:noFill/>
-          <a:ln/>
-        </p:spPr>
-        <p:txBody>
-          <a:bodyPr wrap="square" lIns="0" tIns="0" rIns="0" bIns="0" rtlCol="0" anchor="ctr"/>
-          <a:lstStyle/>
-          <a:p>
-            <a:pPr marL="0" indent="0">
-              <a:buNone/>
-              <a:defRPr/>
-            </a:pPr>
-            <a:r>
-              <a:rPr lang="en-US" sz="1000">
-                <a:solidFill>
-                  <a:srgbClr val="0F172A"/>
-                </a:solidFill>
-                <a:latin typeface="Calibri"/>
-                <a:ea typeface="Calibri"/>
-                <a:cs typeface="Calibri"/>
-              </a:rPr>
-              <a:t>Create / delete projects</a:t>
-            </a:r>
-            <a:endParaRPr lang="en-US" sz="1000"/>
-          </a:p>
-        </p:txBody>
-      </p:sp>
-      <p:sp>
-        <p:nvSpPr>
-          <p:cNvPr id="668608059" name="Text 60"/>
-          <p:cNvSpPr/>
-          <p:nvPr/>
-        </p:nvSpPr>
-        <p:spPr bwMode="auto">
-          <a:xfrm>
-            <a:off x="5074920" y="3145536"/>
-            <a:ext cx="1325880" cy="338328"/>
-          </a:xfrm>
-          <a:prstGeom prst="rect">
-            <a:avLst/>
-          </a:prstGeom>
-          <a:noFill/>
-          <a:ln/>
-        </p:spPr>
-        <p:txBody>
-          <a:bodyPr wrap="square" lIns="0" tIns="0" rIns="0" bIns="0" rtlCol="0" anchor="ctr"/>
-          <a:lstStyle/>
-          <a:p>
-            <a:pPr marL="0" indent="0" algn="ctr">
-              <a:buNone/>
-              <a:defRPr/>
-            </a:pPr>
-            <a:r>
-              <a:rPr lang="en-US" sz="1400">
-                <a:solidFill>
-                  <a:srgbClr val="CBD5E1"/>
-                </a:solidFill>
-              </a:rPr>
-              <a:t>–</a:t>
-            </a:r>
-            <a:endParaRPr lang="en-US" sz="1400"/>
-          </a:p>
-        </p:txBody>
-      </p:sp>
-      <p:sp>
-        <p:nvSpPr>
-          <p:cNvPr id="1172195884" name="Shape 61"/>
-          <p:cNvSpPr/>
-          <p:nvPr/>
-        </p:nvSpPr>
-        <p:spPr bwMode="auto">
-          <a:xfrm>
-            <a:off x="7091172" y="3204972"/>
-            <a:ext cx="219456" cy="219456"/>
-          </a:xfrm>
-          <a:prstGeom prst="ellipse">
-            <a:avLst/>
-          </a:prstGeom>
-          <a:solidFill>
-            <a:srgbClr val="F97316"/>
-          </a:solidFill>
-          <a:ln w="12700">
+            <a:ln w="12700">
+              <a:solidFill>
+                <a:srgbClr val="9333EA"/>
+              </a:solidFill>
+              <a:prstDash val="solid"/>
+            </a:ln>
+          </p:spPr>
+        </p:sp>
+        <p:sp>
+          <p:nvSpPr>
+            <p:cNvPr id="133385255" name="Text 57"/>
+            <p:cNvSpPr/>
+            <p:nvPr/>
+          </p:nvSpPr>
+          <p:spPr bwMode="auto">
+            <a:xfrm>
+              <a:off x="8343821" y="1959227"/>
+              <a:ext cx="221150" cy="203116"/>
+            </a:xfrm>
+            <a:prstGeom prst="rect">
+              <a:avLst/>
+            </a:prstGeom>
+            <a:noFill/>
+            <a:ln/>
+          </p:spPr>
+          <p:txBody>
+            <a:bodyPr wrap="square" lIns="0" tIns="0" rIns="0" bIns="0" rtlCol="0" anchor="ctr"/>
+            <a:lstStyle/>
+            <a:p>
+              <a:pPr marL="0" indent="0" algn="ctr">
+                <a:buNone/>
+                <a:defRPr/>
+              </a:pPr>
+              <a:r>
+                <a:rPr lang="en-US" sz="1000" b="1">
+                  <a:solidFill>
+                    <a:srgbClr val="FFFFFF"/>
+                  </a:solidFill>
+                </a:rPr>
+                <a:t>✓</a:t>
+              </a:r>
+              <a:endParaRPr lang="en-US" sz="1000"/>
+            </a:p>
+          </p:txBody>
+        </p:sp>
+        <p:sp>
+          <p:nvSpPr>
+            <p:cNvPr id="1410815736" name="Shape 58"/>
+            <p:cNvSpPr/>
+            <p:nvPr/>
+          </p:nvSpPr>
+          <p:spPr bwMode="auto">
+            <a:xfrm flipH="0" flipV="0">
+              <a:off x="0" y="2217354"/>
+              <a:ext cx="9098578" cy="313137"/>
+            </a:xfrm>
+            <a:prstGeom prst="rect">
+              <a:avLst/>
+            </a:prstGeom>
+            <a:solidFill>
+              <a:srgbClr val="FFFFFF"/>
+            </a:solidFill>
+            <a:ln w="6350">
+              <a:solidFill>
+                <a:srgbClr val="CBD5E1"/>
+              </a:solidFill>
+              <a:prstDash val="solid"/>
+            </a:ln>
+          </p:spPr>
+        </p:sp>
+        <p:sp>
+          <p:nvSpPr>
+            <p:cNvPr id="2054821121" name="Text 59"/>
+            <p:cNvSpPr/>
+            <p:nvPr/>
+          </p:nvSpPr>
+          <p:spPr bwMode="auto">
+            <a:xfrm>
+              <a:off x="73716" y="2217354"/>
+              <a:ext cx="4607300" cy="313137"/>
+            </a:xfrm>
+            <a:prstGeom prst="rect">
+              <a:avLst/>
+            </a:prstGeom>
+            <a:noFill/>
+            <a:ln/>
+          </p:spPr>
+          <p:txBody>
+            <a:bodyPr wrap="square" lIns="0" tIns="0" rIns="0" bIns="0" rtlCol="0" anchor="ctr"/>
+            <a:lstStyle/>
+            <a:p>
+              <a:pPr marL="0" indent="0">
+                <a:buNone/>
+                <a:defRPr/>
+              </a:pPr>
+              <a:r>
+                <a:rPr lang="en-US" sz="1000">
+                  <a:solidFill>
+                    <a:srgbClr val="0F172A"/>
+                  </a:solidFill>
+                  <a:latin typeface="Calibri"/>
+                  <a:ea typeface="Calibri"/>
+                  <a:cs typeface="Calibri"/>
+                </a:rPr>
+                <a:t>Search &amp; filter tasks</a:t>
+              </a:r>
+              <a:endParaRPr lang="en-US" sz="1000"/>
+            </a:p>
+          </p:txBody>
+        </p:sp>
+        <p:sp>
+          <p:nvSpPr>
+            <p:cNvPr id="2021245846" name="Shape 60"/>
+            <p:cNvSpPr/>
+            <p:nvPr/>
+          </p:nvSpPr>
+          <p:spPr bwMode="auto">
+            <a:xfrm>
+              <a:off x="5395148" y="2272365"/>
+              <a:ext cx="221150" cy="203116"/>
+            </a:xfrm>
+            <a:prstGeom prst="ellipse">
+              <a:avLst/>
+            </a:prstGeom>
+            <a:solidFill>
+              <a:srgbClr val="3B82F6"/>
+            </a:solidFill>
+            <a:ln w="12700">
+              <a:solidFill>
+                <a:srgbClr val="3B82F6"/>
+              </a:solidFill>
+              <a:prstDash val="solid"/>
+            </a:ln>
+          </p:spPr>
+        </p:sp>
+        <p:sp>
+          <p:nvSpPr>
+            <p:cNvPr id="312903530" name="Text 61"/>
+            <p:cNvSpPr/>
+            <p:nvPr/>
+          </p:nvSpPr>
+          <p:spPr bwMode="auto">
+            <a:xfrm>
+              <a:off x="5395148" y="2272365"/>
+              <a:ext cx="221150" cy="203116"/>
+            </a:xfrm>
+            <a:prstGeom prst="rect">
+              <a:avLst/>
+            </a:prstGeom>
+            <a:noFill/>
+            <a:ln/>
+          </p:spPr>
+          <p:txBody>
+            <a:bodyPr wrap="square" lIns="0" tIns="0" rIns="0" bIns="0" rtlCol="0" anchor="ctr"/>
+            <a:lstStyle/>
+            <a:p>
+              <a:pPr marL="0" indent="0" algn="ctr">
+                <a:buNone/>
+                <a:defRPr/>
+              </a:pPr>
+              <a:r>
+                <a:rPr lang="en-US" sz="1000" b="1">
+                  <a:solidFill>
+                    <a:srgbClr val="FFFFFF"/>
+                  </a:solidFill>
+                </a:rPr>
+                <a:t>✓</a:t>
+              </a:r>
+              <a:endParaRPr lang="en-US" sz="1000"/>
+            </a:p>
+          </p:txBody>
+        </p:sp>
+        <p:sp>
+          <p:nvSpPr>
+            <p:cNvPr id="138913928" name="Shape 62"/>
+            <p:cNvSpPr/>
+            <p:nvPr/>
+          </p:nvSpPr>
+          <p:spPr bwMode="auto">
+            <a:xfrm>
+              <a:off x="6869485" y="2272365"/>
+              <a:ext cx="221150" cy="203116"/>
+            </a:xfrm>
+            <a:prstGeom prst="ellipse">
+              <a:avLst/>
+            </a:prstGeom>
             <a:solidFill>
               <a:srgbClr val="F97316"/>
             </a:solidFill>
-            <a:prstDash val="solid"/>
-          </a:ln>
-        </p:spPr>
-      </p:sp>
-      <p:sp>
-        <p:nvSpPr>
-          <p:cNvPr id="2135556454" name="Text 62"/>
-          <p:cNvSpPr/>
-          <p:nvPr/>
-        </p:nvSpPr>
-        <p:spPr bwMode="auto">
-          <a:xfrm>
-            <a:off x="7091172" y="3204972"/>
-            <a:ext cx="219456" cy="219456"/>
-          </a:xfrm>
-          <a:prstGeom prst="rect">
-            <a:avLst/>
-          </a:prstGeom>
-          <a:noFill/>
-          <a:ln/>
-        </p:spPr>
-        <p:txBody>
-          <a:bodyPr wrap="square" lIns="0" tIns="0" rIns="0" bIns="0" rtlCol="0" anchor="ctr"/>
-          <a:lstStyle/>
-          <a:p>
-            <a:pPr marL="0" indent="0" algn="ctr">
-              <a:buNone/>
-              <a:defRPr/>
-            </a:pPr>
-            <a:r>
-              <a:rPr lang="en-US" sz="1000" b="1">
-                <a:solidFill>
-                  <a:srgbClr val="FFFFFF"/>
-                </a:solidFill>
-              </a:rPr>
-              <a:t>✓</a:t>
-            </a:r>
-            <a:endParaRPr lang="en-US" sz="1000"/>
-          </a:p>
-        </p:txBody>
-      </p:sp>
-      <p:sp>
-        <p:nvSpPr>
-          <p:cNvPr id="460826602" name="Shape 63"/>
-          <p:cNvSpPr/>
-          <p:nvPr/>
-        </p:nvSpPr>
-        <p:spPr bwMode="auto">
-          <a:xfrm>
-            <a:off x="8554212" y="3204972"/>
-            <a:ext cx="219456" cy="219456"/>
-          </a:xfrm>
-          <a:prstGeom prst="ellipse">
-            <a:avLst/>
-          </a:prstGeom>
-          <a:solidFill>
-            <a:srgbClr val="9333EA"/>
-          </a:solidFill>
-          <a:ln w="12700">
+            <a:ln w="12700">
+              <a:solidFill>
+                <a:srgbClr val="F97316"/>
+              </a:solidFill>
+              <a:prstDash val="solid"/>
+            </a:ln>
+          </p:spPr>
+        </p:sp>
+        <p:sp>
+          <p:nvSpPr>
+            <p:cNvPr id="1301545676" name="Text 63"/>
+            <p:cNvSpPr/>
+            <p:nvPr/>
+          </p:nvSpPr>
+          <p:spPr bwMode="auto">
+            <a:xfrm>
+              <a:off x="6869485" y="2272365"/>
+              <a:ext cx="221150" cy="203116"/>
+            </a:xfrm>
+            <a:prstGeom prst="rect">
+              <a:avLst/>
+            </a:prstGeom>
+            <a:noFill/>
+            <a:ln/>
+          </p:spPr>
+          <p:txBody>
+            <a:bodyPr wrap="square" lIns="0" tIns="0" rIns="0" bIns="0" rtlCol="0" anchor="ctr"/>
+            <a:lstStyle/>
+            <a:p>
+              <a:pPr marL="0" indent="0" algn="ctr">
+                <a:buNone/>
+                <a:defRPr/>
+              </a:pPr>
+              <a:r>
+                <a:rPr lang="en-US" sz="1000" b="1">
+                  <a:solidFill>
+                    <a:srgbClr val="FFFFFF"/>
+                  </a:solidFill>
+                </a:rPr>
+                <a:t>✓</a:t>
+              </a:r>
+              <a:endParaRPr lang="en-US" sz="1000"/>
+            </a:p>
+          </p:txBody>
+        </p:sp>
+        <p:sp>
+          <p:nvSpPr>
+            <p:cNvPr id="913034468" name="Shape 64"/>
+            <p:cNvSpPr/>
+            <p:nvPr/>
+          </p:nvSpPr>
+          <p:spPr bwMode="auto">
+            <a:xfrm>
+              <a:off x="8343821" y="2272365"/>
+              <a:ext cx="221150" cy="203116"/>
+            </a:xfrm>
+            <a:prstGeom prst="ellipse">
+              <a:avLst/>
+            </a:prstGeom>
             <a:solidFill>
               <a:srgbClr val="9333EA"/>
             </a:solidFill>
-            <a:prstDash val="solid"/>
-          </a:ln>
-        </p:spPr>
-      </p:sp>
-      <p:sp>
-        <p:nvSpPr>
-          <p:cNvPr id="1029717304" name="Text 64"/>
-          <p:cNvSpPr/>
-          <p:nvPr/>
-        </p:nvSpPr>
-        <p:spPr bwMode="auto">
-          <a:xfrm>
-            <a:off x="8554212" y="3204972"/>
-            <a:ext cx="219456" cy="219456"/>
-          </a:xfrm>
-          <a:prstGeom prst="rect">
-            <a:avLst/>
-          </a:prstGeom>
-          <a:noFill/>
-          <a:ln/>
-        </p:spPr>
-        <p:txBody>
-          <a:bodyPr wrap="square" lIns="0" tIns="0" rIns="0" bIns="0" rtlCol="0" anchor="ctr"/>
-          <a:lstStyle/>
-          <a:p>
-            <a:pPr marL="0" indent="0" algn="ctr">
-              <a:buNone/>
-              <a:defRPr/>
-            </a:pPr>
-            <a:r>
-              <a:rPr lang="en-US" sz="1000" b="1">
-                <a:solidFill>
-                  <a:srgbClr val="FFFFFF"/>
-                </a:solidFill>
-              </a:rPr>
-              <a:t>✓</a:t>
-            </a:r>
-            <a:endParaRPr lang="en-US" sz="1000"/>
-          </a:p>
-        </p:txBody>
-      </p:sp>
-      <p:sp>
-        <p:nvSpPr>
-          <p:cNvPr id="819653706" name="Shape 65"/>
-          <p:cNvSpPr/>
-          <p:nvPr/>
-        </p:nvSpPr>
-        <p:spPr bwMode="auto">
-          <a:xfrm>
-            <a:off x="274320" y="3483864"/>
-            <a:ext cx="8595360" cy="338328"/>
-          </a:xfrm>
-          <a:prstGeom prst="rect">
-            <a:avLst/>
-          </a:prstGeom>
-          <a:solidFill>
-            <a:srgbClr val="F1F5F9"/>
-          </a:solidFill>
-          <a:ln w="6350">
-            <a:solidFill>
-              <a:srgbClr val="CBD5E1"/>
-            </a:solidFill>
-            <a:prstDash val="solid"/>
-          </a:ln>
-        </p:spPr>
-      </p:sp>
-      <p:sp>
-        <p:nvSpPr>
-          <p:cNvPr id="1691257589" name="Text 66"/>
-          <p:cNvSpPr/>
-          <p:nvPr/>
-        </p:nvSpPr>
-        <p:spPr bwMode="auto">
-          <a:xfrm>
-            <a:off x="347472" y="3483864"/>
-            <a:ext cx="4572000" cy="338328"/>
-          </a:xfrm>
-          <a:prstGeom prst="rect">
-            <a:avLst/>
-          </a:prstGeom>
-          <a:noFill/>
-          <a:ln/>
-        </p:spPr>
-        <p:txBody>
-          <a:bodyPr wrap="square" lIns="0" tIns="0" rIns="0" bIns="0" rtlCol="0" anchor="ctr"/>
-          <a:lstStyle/>
-          <a:p>
-            <a:pPr marL="0" indent="0">
-              <a:buNone/>
-              <a:defRPr/>
-            </a:pPr>
-            <a:r>
-              <a:rPr lang="en-US" sz="1000">
-                <a:solidFill>
-                  <a:srgbClr val="0F172A"/>
-                </a:solidFill>
-                <a:latin typeface="Calibri"/>
-                <a:ea typeface="Calibri"/>
-                <a:cs typeface="Calibri"/>
-              </a:rPr>
-              <a:t>Assign / remove members</a:t>
-            </a:r>
-            <a:endParaRPr lang="en-US" sz="1000"/>
-          </a:p>
-        </p:txBody>
-      </p:sp>
-      <p:sp>
-        <p:nvSpPr>
-          <p:cNvPr id="1023798355" name="Text 67"/>
-          <p:cNvSpPr/>
-          <p:nvPr/>
-        </p:nvSpPr>
-        <p:spPr bwMode="auto">
-          <a:xfrm>
-            <a:off x="5074920" y="3483864"/>
-            <a:ext cx="1325880" cy="338328"/>
-          </a:xfrm>
-          <a:prstGeom prst="rect">
-            <a:avLst/>
-          </a:prstGeom>
-          <a:noFill/>
-          <a:ln/>
-        </p:spPr>
-        <p:txBody>
-          <a:bodyPr wrap="square" lIns="0" tIns="0" rIns="0" bIns="0" rtlCol="0" anchor="ctr"/>
-          <a:lstStyle/>
-          <a:p>
-            <a:pPr marL="0" indent="0" algn="ctr">
-              <a:buNone/>
-              <a:defRPr/>
-            </a:pPr>
-            <a:r>
-              <a:rPr lang="en-US" sz="1400">
-                <a:solidFill>
-                  <a:srgbClr val="CBD5E1"/>
-                </a:solidFill>
-              </a:rPr>
-              <a:t>–</a:t>
-            </a:r>
-            <a:endParaRPr lang="en-US" sz="1400"/>
-          </a:p>
-        </p:txBody>
-      </p:sp>
-      <p:sp>
-        <p:nvSpPr>
-          <p:cNvPr id="227530084" name="Shape 68"/>
-          <p:cNvSpPr/>
-          <p:nvPr/>
-        </p:nvSpPr>
-        <p:spPr bwMode="auto">
-          <a:xfrm>
-            <a:off x="7091172" y="3543300"/>
-            <a:ext cx="219456" cy="219456"/>
-          </a:xfrm>
-          <a:prstGeom prst="ellipse">
-            <a:avLst/>
-          </a:prstGeom>
-          <a:solidFill>
-            <a:srgbClr val="F97316"/>
-          </a:solidFill>
-          <a:ln w="12700">
+            <a:ln w="12700">
+              <a:solidFill>
+                <a:srgbClr val="9333EA"/>
+              </a:solidFill>
+              <a:prstDash val="solid"/>
+            </a:ln>
+          </p:spPr>
+        </p:sp>
+        <p:sp>
+          <p:nvSpPr>
+            <p:cNvPr id="176624548" name="Text 65"/>
+            <p:cNvSpPr/>
+            <p:nvPr/>
+          </p:nvSpPr>
+          <p:spPr bwMode="auto">
+            <a:xfrm>
+              <a:off x="8343821" y="2272365"/>
+              <a:ext cx="221150" cy="203116"/>
+            </a:xfrm>
+            <a:prstGeom prst="rect">
+              <a:avLst/>
+            </a:prstGeom>
+            <a:noFill/>
+            <a:ln/>
+          </p:spPr>
+          <p:txBody>
+            <a:bodyPr wrap="square" lIns="0" tIns="0" rIns="0" bIns="0" rtlCol="0" anchor="ctr"/>
+            <a:lstStyle/>
+            <a:p>
+              <a:pPr marL="0" indent="0" algn="ctr">
+                <a:buNone/>
+                <a:defRPr/>
+              </a:pPr>
+              <a:r>
+                <a:rPr lang="en-US" sz="1000" b="1">
+                  <a:solidFill>
+                    <a:srgbClr val="FFFFFF"/>
+                  </a:solidFill>
+                </a:rPr>
+                <a:t>✓</a:t>
+              </a:r>
+              <a:endParaRPr lang="en-US" sz="1000"/>
+            </a:p>
+          </p:txBody>
+        </p:sp>
+        <p:sp>
+          <p:nvSpPr>
+            <p:cNvPr id="720075059" name="Shape 66"/>
+            <p:cNvSpPr/>
+            <p:nvPr/>
+          </p:nvSpPr>
+          <p:spPr bwMode="auto">
+            <a:xfrm flipH="0" flipV="0">
+              <a:off x="0" y="2530492"/>
+              <a:ext cx="9098578" cy="313137"/>
+            </a:xfrm>
+            <a:prstGeom prst="rect">
+              <a:avLst/>
+            </a:prstGeom>
+            <a:solidFill>
+              <a:srgbClr val="F1F5F9"/>
+            </a:solidFill>
+            <a:ln w="6350">
+              <a:solidFill>
+                <a:srgbClr val="CBD5E1"/>
+              </a:solidFill>
+              <a:prstDash val="solid"/>
+            </a:ln>
+          </p:spPr>
+        </p:sp>
+        <p:sp>
+          <p:nvSpPr>
+            <p:cNvPr id="1663078205" name="Text 67"/>
+            <p:cNvSpPr/>
+            <p:nvPr/>
+          </p:nvSpPr>
+          <p:spPr bwMode="auto">
+            <a:xfrm>
+              <a:off x="73716" y="2530492"/>
+              <a:ext cx="4607300" cy="313137"/>
+            </a:xfrm>
+            <a:prstGeom prst="rect">
+              <a:avLst/>
+            </a:prstGeom>
+            <a:noFill/>
+            <a:ln/>
+          </p:spPr>
+          <p:txBody>
+            <a:bodyPr wrap="square" lIns="0" tIns="0" rIns="0" bIns="0" rtlCol="0" anchor="ctr"/>
+            <a:lstStyle/>
+            <a:p>
+              <a:pPr marL="0" indent="0">
+                <a:buNone/>
+                <a:defRPr/>
+              </a:pPr>
+              <a:r>
+                <a:rPr lang="en-US" sz="1000">
+                  <a:solidFill>
+                    <a:srgbClr val="0F172A"/>
+                  </a:solidFill>
+                  <a:latin typeface="Calibri"/>
+                  <a:ea typeface="Calibri"/>
+                  <a:cs typeface="Calibri"/>
+                </a:rPr>
+                <a:t>Open dashboard</a:t>
+              </a:r>
+              <a:endParaRPr lang="en-US" sz="1000"/>
+            </a:p>
+          </p:txBody>
+        </p:sp>
+        <p:sp>
+          <p:nvSpPr>
+            <p:cNvPr id="1250902593" name="Shape 68"/>
+            <p:cNvSpPr/>
+            <p:nvPr/>
+          </p:nvSpPr>
+          <p:spPr bwMode="auto">
+            <a:xfrm>
+              <a:off x="5395148" y="2585503"/>
+              <a:ext cx="221150" cy="203116"/>
+            </a:xfrm>
+            <a:prstGeom prst="ellipse">
+              <a:avLst/>
+            </a:prstGeom>
+            <a:solidFill>
+              <a:srgbClr val="3B82F6"/>
+            </a:solidFill>
+            <a:ln w="12700">
+              <a:solidFill>
+                <a:srgbClr val="3B82F6"/>
+              </a:solidFill>
+              <a:prstDash val="solid"/>
+            </a:ln>
+          </p:spPr>
+        </p:sp>
+        <p:sp>
+          <p:nvSpPr>
+            <p:cNvPr id="912467893" name="Text 69"/>
+            <p:cNvSpPr/>
+            <p:nvPr/>
+          </p:nvSpPr>
+          <p:spPr bwMode="auto">
+            <a:xfrm>
+              <a:off x="5395148" y="2585503"/>
+              <a:ext cx="221150" cy="203116"/>
+            </a:xfrm>
+            <a:prstGeom prst="rect">
+              <a:avLst/>
+            </a:prstGeom>
+            <a:noFill/>
+            <a:ln/>
+          </p:spPr>
+          <p:txBody>
+            <a:bodyPr wrap="square" lIns="0" tIns="0" rIns="0" bIns="0" rtlCol="0" anchor="ctr"/>
+            <a:lstStyle/>
+            <a:p>
+              <a:pPr marL="0" indent="0" algn="ctr">
+                <a:buNone/>
+                <a:defRPr/>
+              </a:pPr>
+              <a:r>
+                <a:rPr lang="en-US" sz="1000" b="1">
+                  <a:solidFill>
+                    <a:srgbClr val="FFFFFF"/>
+                  </a:solidFill>
+                </a:rPr>
+                <a:t>✓</a:t>
+              </a:r>
+              <a:endParaRPr lang="en-US" sz="1000"/>
+            </a:p>
+          </p:txBody>
+        </p:sp>
+        <p:sp>
+          <p:nvSpPr>
+            <p:cNvPr id="1225898774" name="Shape 70"/>
+            <p:cNvSpPr/>
+            <p:nvPr/>
+          </p:nvSpPr>
+          <p:spPr bwMode="auto">
+            <a:xfrm>
+              <a:off x="6869485" y="2585503"/>
+              <a:ext cx="221150" cy="203116"/>
+            </a:xfrm>
+            <a:prstGeom prst="ellipse">
+              <a:avLst/>
+            </a:prstGeom>
             <a:solidFill>
               <a:srgbClr val="F97316"/>
             </a:solidFill>
-            <a:prstDash val="solid"/>
-          </a:ln>
-        </p:spPr>
-      </p:sp>
-      <p:sp>
-        <p:nvSpPr>
-          <p:cNvPr id="1997075844" name="Text 69"/>
-          <p:cNvSpPr/>
-          <p:nvPr/>
-        </p:nvSpPr>
-        <p:spPr bwMode="auto">
-          <a:xfrm>
-            <a:off x="7091172" y="3543300"/>
-            <a:ext cx="219456" cy="219456"/>
-          </a:xfrm>
-          <a:prstGeom prst="rect">
-            <a:avLst/>
-          </a:prstGeom>
-          <a:noFill/>
-          <a:ln/>
-        </p:spPr>
-        <p:txBody>
-          <a:bodyPr wrap="square" lIns="0" tIns="0" rIns="0" bIns="0" rtlCol="0" anchor="ctr"/>
-          <a:lstStyle/>
-          <a:p>
-            <a:pPr marL="0" indent="0" algn="ctr">
-              <a:buNone/>
-              <a:defRPr/>
-            </a:pPr>
-            <a:r>
-              <a:rPr lang="en-US" sz="1000" b="1">
-                <a:solidFill>
-                  <a:srgbClr val="FFFFFF"/>
-                </a:solidFill>
-              </a:rPr>
-              <a:t>✓</a:t>
-            </a:r>
-            <a:endParaRPr lang="en-US" sz="1000"/>
-          </a:p>
-        </p:txBody>
-      </p:sp>
-      <p:sp>
-        <p:nvSpPr>
-          <p:cNvPr id="1647348641" name="Shape 70"/>
-          <p:cNvSpPr/>
-          <p:nvPr/>
-        </p:nvSpPr>
-        <p:spPr bwMode="auto">
-          <a:xfrm>
-            <a:off x="8554212" y="3543300"/>
-            <a:ext cx="219456" cy="219456"/>
-          </a:xfrm>
-          <a:prstGeom prst="ellipse">
-            <a:avLst/>
-          </a:prstGeom>
-          <a:solidFill>
-            <a:srgbClr val="9333EA"/>
-          </a:solidFill>
-          <a:ln w="12700">
+            <a:ln w="12700">
+              <a:solidFill>
+                <a:srgbClr val="F97316"/>
+              </a:solidFill>
+              <a:prstDash val="solid"/>
+            </a:ln>
+          </p:spPr>
+        </p:sp>
+        <p:sp>
+          <p:nvSpPr>
+            <p:cNvPr id="598666425" name="Text 71"/>
+            <p:cNvSpPr/>
+            <p:nvPr/>
+          </p:nvSpPr>
+          <p:spPr bwMode="auto">
+            <a:xfrm>
+              <a:off x="6869485" y="2585503"/>
+              <a:ext cx="221150" cy="203116"/>
+            </a:xfrm>
+            <a:prstGeom prst="rect">
+              <a:avLst/>
+            </a:prstGeom>
+            <a:noFill/>
+            <a:ln/>
+          </p:spPr>
+          <p:txBody>
+            <a:bodyPr wrap="square" lIns="0" tIns="0" rIns="0" bIns="0" rtlCol="0" anchor="ctr"/>
+            <a:lstStyle/>
+            <a:p>
+              <a:pPr marL="0" indent="0" algn="ctr">
+                <a:buNone/>
+                <a:defRPr/>
+              </a:pPr>
+              <a:r>
+                <a:rPr lang="en-US" sz="1000" b="1">
+                  <a:solidFill>
+                    <a:srgbClr val="FFFFFF"/>
+                  </a:solidFill>
+                </a:rPr>
+                <a:t>✓</a:t>
+              </a:r>
+              <a:endParaRPr lang="en-US" sz="1000"/>
+            </a:p>
+          </p:txBody>
+        </p:sp>
+        <p:sp>
+          <p:nvSpPr>
+            <p:cNvPr id="449938293" name="Shape 72"/>
+            <p:cNvSpPr/>
+            <p:nvPr/>
+          </p:nvSpPr>
+          <p:spPr bwMode="auto">
+            <a:xfrm>
+              <a:off x="8343821" y="2585503"/>
+              <a:ext cx="221150" cy="203116"/>
+            </a:xfrm>
+            <a:prstGeom prst="ellipse">
+              <a:avLst/>
+            </a:prstGeom>
             <a:solidFill>
               <a:srgbClr val="9333EA"/>
             </a:solidFill>
-            <a:prstDash val="solid"/>
-          </a:ln>
-        </p:spPr>
-      </p:sp>
-      <p:sp>
-        <p:nvSpPr>
-          <p:cNvPr id="197113204" name="Text 71"/>
-          <p:cNvSpPr/>
-          <p:nvPr/>
-        </p:nvSpPr>
-        <p:spPr bwMode="auto">
-          <a:xfrm>
-            <a:off x="8554212" y="3543300"/>
-            <a:ext cx="219456" cy="219456"/>
-          </a:xfrm>
-          <a:prstGeom prst="rect">
-            <a:avLst/>
-          </a:prstGeom>
-          <a:noFill/>
-          <a:ln/>
-        </p:spPr>
-        <p:txBody>
-          <a:bodyPr wrap="square" lIns="0" tIns="0" rIns="0" bIns="0" rtlCol="0" anchor="ctr"/>
-          <a:lstStyle/>
-          <a:p>
-            <a:pPr marL="0" indent="0" algn="ctr">
-              <a:buNone/>
-              <a:defRPr/>
-            </a:pPr>
-            <a:r>
-              <a:rPr lang="en-US" sz="1000" b="1">
-                <a:solidFill>
-                  <a:srgbClr val="FFFFFF"/>
-                </a:solidFill>
-              </a:rPr>
-              <a:t>✓</a:t>
-            </a:r>
-            <a:endParaRPr lang="en-US" sz="1000"/>
-          </a:p>
-        </p:txBody>
-      </p:sp>
-      <p:sp>
-        <p:nvSpPr>
-          <p:cNvPr id="989913449" name="Shape 72"/>
-          <p:cNvSpPr/>
-          <p:nvPr/>
-        </p:nvSpPr>
-        <p:spPr bwMode="auto">
-          <a:xfrm>
-            <a:off x="274320" y="3822192"/>
-            <a:ext cx="8595360" cy="338328"/>
-          </a:xfrm>
-          <a:prstGeom prst="rect">
-            <a:avLst/>
-          </a:prstGeom>
-          <a:solidFill>
-            <a:srgbClr val="FFFFFF"/>
-          </a:solidFill>
-          <a:ln w="6350">
-            <a:solidFill>
-              <a:srgbClr val="CBD5E1"/>
-            </a:solidFill>
-            <a:prstDash val="solid"/>
-          </a:ln>
-        </p:spPr>
-      </p:sp>
-      <p:sp>
-        <p:nvSpPr>
-          <p:cNvPr id="428623193" name="Text 73"/>
-          <p:cNvSpPr/>
-          <p:nvPr/>
-        </p:nvSpPr>
-        <p:spPr bwMode="auto">
-          <a:xfrm>
-            <a:off x="347472" y="3822192"/>
-            <a:ext cx="4572000" cy="338328"/>
-          </a:xfrm>
-          <a:prstGeom prst="rect">
-            <a:avLst/>
-          </a:prstGeom>
-          <a:noFill/>
-          <a:ln/>
-        </p:spPr>
-        <p:txBody>
-          <a:bodyPr wrap="square" lIns="0" tIns="0" rIns="0" bIns="0" rtlCol="0" anchor="ctr"/>
-          <a:lstStyle/>
-          <a:p>
-            <a:pPr marL="0" indent="0">
-              <a:buNone/>
-              <a:defRPr/>
-            </a:pPr>
-            <a:r>
-              <a:rPr lang="en-US" sz="1000">
-                <a:solidFill>
-                  <a:srgbClr val="0F172A"/>
-                </a:solidFill>
-                <a:latin typeface="Calibri"/>
-                <a:ea typeface="Calibri"/>
-                <a:cs typeface="Calibri"/>
-              </a:rPr>
-              <a:t>Delegate tasks / manage epics</a:t>
-            </a:r>
-            <a:endParaRPr lang="en-US" sz="1000"/>
-          </a:p>
-        </p:txBody>
-      </p:sp>
-      <p:sp>
-        <p:nvSpPr>
-          <p:cNvPr id="1777973327" name="Text 74"/>
-          <p:cNvSpPr/>
-          <p:nvPr/>
-        </p:nvSpPr>
-        <p:spPr bwMode="auto">
-          <a:xfrm>
-            <a:off x="5074920" y="3822192"/>
-            <a:ext cx="1325880" cy="338328"/>
-          </a:xfrm>
-          <a:prstGeom prst="rect">
-            <a:avLst/>
-          </a:prstGeom>
-          <a:noFill/>
-          <a:ln/>
-        </p:spPr>
-        <p:txBody>
-          <a:bodyPr wrap="square" lIns="0" tIns="0" rIns="0" bIns="0" rtlCol="0" anchor="ctr"/>
-          <a:lstStyle/>
-          <a:p>
-            <a:pPr marL="0" indent="0" algn="ctr">
-              <a:buNone/>
-              <a:defRPr/>
-            </a:pPr>
-            <a:r>
-              <a:rPr lang="en-US" sz="1400">
-                <a:solidFill>
-                  <a:srgbClr val="CBD5E1"/>
-                </a:solidFill>
-              </a:rPr>
-              <a:t>–</a:t>
-            </a:r>
-            <a:endParaRPr lang="en-US" sz="1400"/>
-          </a:p>
-        </p:txBody>
-      </p:sp>
-      <p:sp>
-        <p:nvSpPr>
-          <p:cNvPr id="193217584" name="Shape 75"/>
-          <p:cNvSpPr/>
-          <p:nvPr/>
-        </p:nvSpPr>
-        <p:spPr bwMode="auto">
-          <a:xfrm>
-            <a:off x="7091172" y="3881627"/>
-            <a:ext cx="219456" cy="219456"/>
-          </a:xfrm>
-          <a:prstGeom prst="ellipse">
-            <a:avLst/>
-          </a:prstGeom>
-          <a:solidFill>
-            <a:srgbClr val="F97316"/>
-          </a:solidFill>
-          <a:ln w="12700">
+            <a:ln w="12700">
+              <a:solidFill>
+                <a:srgbClr val="9333EA"/>
+              </a:solidFill>
+              <a:prstDash val="solid"/>
+            </a:ln>
+          </p:spPr>
+        </p:sp>
+        <p:sp>
+          <p:nvSpPr>
+            <p:cNvPr id="784950302" name="Text 73"/>
+            <p:cNvSpPr/>
+            <p:nvPr/>
+          </p:nvSpPr>
+          <p:spPr bwMode="auto">
+            <a:xfrm>
+              <a:off x="8343821" y="2585503"/>
+              <a:ext cx="221150" cy="203116"/>
+            </a:xfrm>
+            <a:prstGeom prst="rect">
+              <a:avLst/>
+            </a:prstGeom>
+            <a:noFill/>
+            <a:ln/>
+          </p:spPr>
+          <p:txBody>
+            <a:bodyPr wrap="square" lIns="0" tIns="0" rIns="0" bIns="0" rtlCol="0" anchor="ctr"/>
+            <a:lstStyle/>
+            <a:p>
+              <a:pPr marL="0" indent="0" algn="ctr">
+                <a:buNone/>
+                <a:defRPr/>
+              </a:pPr>
+              <a:r>
+                <a:rPr lang="en-US" sz="1000" b="1">
+                  <a:solidFill>
+                    <a:srgbClr val="FFFFFF"/>
+                  </a:solidFill>
+                </a:rPr>
+                <a:t>✓</a:t>
+              </a:r>
+              <a:endParaRPr lang="en-US" sz="1000"/>
+            </a:p>
+          </p:txBody>
+        </p:sp>
+        <p:sp>
+          <p:nvSpPr>
+            <p:cNvPr id="1431125696" name="Shape 74"/>
+            <p:cNvSpPr/>
+            <p:nvPr/>
+          </p:nvSpPr>
+          <p:spPr bwMode="auto">
+            <a:xfrm flipH="0" flipV="0">
+              <a:off x="0" y="2843629"/>
+              <a:ext cx="9098578" cy="313137"/>
+            </a:xfrm>
+            <a:prstGeom prst="rect">
+              <a:avLst/>
+            </a:prstGeom>
+            <a:solidFill>
+              <a:srgbClr val="FFFFFF"/>
+            </a:solidFill>
+            <a:ln w="6350">
+              <a:solidFill>
+                <a:srgbClr val="CBD5E1"/>
+              </a:solidFill>
+              <a:prstDash val="solid"/>
+            </a:ln>
+          </p:spPr>
+        </p:sp>
+        <p:sp>
+          <p:nvSpPr>
+            <p:cNvPr id="271617161" name="Text 75"/>
+            <p:cNvSpPr/>
+            <p:nvPr/>
+          </p:nvSpPr>
+          <p:spPr bwMode="auto">
+            <a:xfrm>
+              <a:off x="73716" y="2843629"/>
+              <a:ext cx="4607300" cy="313137"/>
+            </a:xfrm>
+            <a:prstGeom prst="rect">
+              <a:avLst/>
+            </a:prstGeom>
+            <a:noFill/>
+            <a:ln/>
+          </p:spPr>
+          <p:txBody>
+            <a:bodyPr wrap="square" lIns="0" tIns="0" rIns="0" bIns="0" rtlCol="0" anchor="ctr"/>
+            <a:lstStyle/>
+            <a:p>
+              <a:pPr marL="0" indent="0">
+                <a:buNone/>
+                <a:defRPr/>
+              </a:pPr>
+              <a:r>
+                <a:rPr lang="en-US" sz="1000">
+                  <a:solidFill>
+                    <a:srgbClr val="0F172A"/>
+                  </a:solidFill>
+                  <a:latin typeface="Calibri"/>
+                  <a:ea typeface="Calibri"/>
+                  <a:cs typeface="Calibri"/>
+                </a:rPr>
+                <a:t>Login / sign up</a:t>
+              </a:r>
+              <a:endParaRPr lang="en-US" sz="1000"/>
+            </a:p>
+          </p:txBody>
+        </p:sp>
+        <p:sp>
+          <p:nvSpPr>
+            <p:cNvPr id="526527996" name="Shape 76"/>
+            <p:cNvSpPr/>
+            <p:nvPr/>
+          </p:nvSpPr>
+          <p:spPr bwMode="auto">
+            <a:xfrm>
+              <a:off x="5395148" y="2898639"/>
+              <a:ext cx="221150" cy="203116"/>
+            </a:xfrm>
+            <a:prstGeom prst="ellipse">
+              <a:avLst/>
+            </a:prstGeom>
+            <a:solidFill>
+              <a:srgbClr val="3B82F6"/>
+            </a:solidFill>
+            <a:ln w="12700">
+              <a:solidFill>
+                <a:srgbClr val="3B82F6"/>
+              </a:solidFill>
+              <a:prstDash val="solid"/>
+            </a:ln>
+          </p:spPr>
+        </p:sp>
+        <p:sp>
+          <p:nvSpPr>
+            <p:cNvPr id="17469711" name="Text 77"/>
+            <p:cNvSpPr/>
+            <p:nvPr/>
+          </p:nvSpPr>
+          <p:spPr bwMode="auto">
+            <a:xfrm>
+              <a:off x="5395148" y="2898639"/>
+              <a:ext cx="221150" cy="203116"/>
+            </a:xfrm>
+            <a:prstGeom prst="rect">
+              <a:avLst/>
+            </a:prstGeom>
+            <a:noFill/>
+            <a:ln/>
+          </p:spPr>
+          <p:txBody>
+            <a:bodyPr wrap="square" lIns="0" tIns="0" rIns="0" bIns="0" rtlCol="0" anchor="ctr"/>
+            <a:lstStyle/>
+            <a:p>
+              <a:pPr marL="0" indent="0" algn="ctr">
+                <a:buNone/>
+                <a:defRPr/>
+              </a:pPr>
+              <a:r>
+                <a:rPr lang="en-US" sz="1000" b="1">
+                  <a:solidFill>
+                    <a:srgbClr val="FFFFFF"/>
+                  </a:solidFill>
+                </a:rPr>
+                <a:t>✓</a:t>
+              </a:r>
+              <a:endParaRPr lang="en-US" sz="1000"/>
+            </a:p>
+          </p:txBody>
+        </p:sp>
+        <p:sp>
+          <p:nvSpPr>
+            <p:cNvPr id="502138241" name="Shape 78"/>
+            <p:cNvSpPr/>
+            <p:nvPr/>
+          </p:nvSpPr>
+          <p:spPr bwMode="auto">
+            <a:xfrm>
+              <a:off x="6869485" y="2898639"/>
+              <a:ext cx="221150" cy="203116"/>
+            </a:xfrm>
+            <a:prstGeom prst="ellipse">
+              <a:avLst/>
+            </a:prstGeom>
             <a:solidFill>
               <a:srgbClr val="F97316"/>
             </a:solidFill>
-            <a:prstDash val="solid"/>
-          </a:ln>
-        </p:spPr>
-      </p:sp>
-      <p:sp>
-        <p:nvSpPr>
-          <p:cNvPr id="36943640" name="Text 76"/>
-          <p:cNvSpPr/>
-          <p:nvPr/>
-        </p:nvSpPr>
-        <p:spPr bwMode="auto">
-          <a:xfrm>
-            <a:off x="7091172" y="3881627"/>
-            <a:ext cx="219456" cy="219456"/>
-          </a:xfrm>
-          <a:prstGeom prst="rect">
-            <a:avLst/>
-          </a:prstGeom>
-          <a:noFill/>
-          <a:ln/>
-        </p:spPr>
-        <p:txBody>
-          <a:bodyPr wrap="square" lIns="0" tIns="0" rIns="0" bIns="0" rtlCol="0" anchor="ctr"/>
-          <a:lstStyle/>
-          <a:p>
-            <a:pPr marL="0" indent="0" algn="ctr">
-              <a:buNone/>
-              <a:defRPr/>
-            </a:pPr>
-            <a:r>
-              <a:rPr lang="en-US" sz="1000" b="1">
-                <a:solidFill>
-                  <a:srgbClr val="FFFFFF"/>
-                </a:solidFill>
-              </a:rPr>
-              <a:t>✓</a:t>
-            </a:r>
-            <a:endParaRPr lang="en-US" sz="1000"/>
-          </a:p>
-        </p:txBody>
-      </p:sp>
-      <p:sp>
-        <p:nvSpPr>
-          <p:cNvPr id="285636769" name="Shape 77"/>
-          <p:cNvSpPr/>
-          <p:nvPr/>
-        </p:nvSpPr>
-        <p:spPr bwMode="auto">
-          <a:xfrm>
-            <a:off x="8554212" y="3881627"/>
-            <a:ext cx="219456" cy="219456"/>
-          </a:xfrm>
-          <a:prstGeom prst="ellipse">
-            <a:avLst/>
-          </a:prstGeom>
-          <a:solidFill>
-            <a:srgbClr val="9333EA"/>
-          </a:solidFill>
-          <a:ln w="12700">
+            <a:ln w="12700">
+              <a:solidFill>
+                <a:srgbClr val="F97316"/>
+              </a:solidFill>
+              <a:prstDash val="solid"/>
+            </a:ln>
+          </p:spPr>
+        </p:sp>
+        <p:sp>
+          <p:nvSpPr>
+            <p:cNvPr id="1812107019" name="Text 79"/>
+            <p:cNvSpPr/>
+            <p:nvPr/>
+          </p:nvSpPr>
+          <p:spPr bwMode="auto">
+            <a:xfrm>
+              <a:off x="6869485" y="2898639"/>
+              <a:ext cx="221150" cy="203116"/>
+            </a:xfrm>
+            <a:prstGeom prst="rect">
+              <a:avLst/>
+            </a:prstGeom>
+            <a:noFill/>
+            <a:ln/>
+          </p:spPr>
+          <p:txBody>
+            <a:bodyPr wrap="square" lIns="0" tIns="0" rIns="0" bIns="0" rtlCol="0" anchor="ctr"/>
+            <a:lstStyle/>
+            <a:p>
+              <a:pPr marL="0" indent="0" algn="ctr">
+                <a:buNone/>
+                <a:defRPr/>
+              </a:pPr>
+              <a:r>
+                <a:rPr lang="en-US" sz="1000" b="1">
+                  <a:solidFill>
+                    <a:srgbClr val="FFFFFF"/>
+                  </a:solidFill>
+                </a:rPr>
+                <a:t>✓</a:t>
+              </a:r>
+              <a:endParaRPr lang="en-US" sz="1000"/>
+            </a:p>
+          </p:txBody>
+        </p:sp>
+        <p:sp>
+          <p:nvSpPr>
+            <p:cNvPr id="1448041851" name="Shape 80"/>
+            <p:cNvSpPr/>
+            <p:nvPr/>
+          </p:nvSpPr>
+          <p:spPr bwMode="auto">
+            <a:xfrm>
+              <a:off x="8343821" y="2898639"/>
+              <a:ext cx="221150" cy="203116"/>
+            </a:xfrm>
+            <a:prstGeom prst="ellipse">
+              <a:avLst/>
+            </a:prstGeom>
             <a:solidFill>
               <a:srgbClr val="9333EA"/>
             </a:solidFill>
-            <a:prstDash val="solid"/>
-          </a:ln>
-        </p:spPr>
-      </p:sp>
-      <p:sp>
-        <p:nvSpPr>
-          <p:cNvPr id="554548678" name="Text 78"/>
-          <p:cNvSpPr/>
-          <p:nvPr/>
-        </p:nvSpPr>
-        <p:spPr bwMode="auto">
-          <a:xfrm>
-            <a:off x="8554212" y="3881627"/>
-            <a:ext cx="219456" cy="219456"/>
-          </a:xfrm>
-          <a:prstGeom prst="rect">
-            <a:avLst/>
-          </a:prstGeom>
-          <a:noFill/>
-          <a:ln/>
-        </p:spPr>
-        <p:txBody>
-          <a:bodyPr wrap="square" lIns="0" tIns="0" rIns="0" bIns="0" rtlCol="0" anchor="ctr"/>
-          <a:lstStyle/>
-          <a:p>
-            <a:pPr marL="0" indent="0" algn="ctr">
-              <a:buNone/>
-              <a:defRPr/>
-            </a:pPr>
-            <a:r>
-              <a:rPr lang="en-US" sz="1000" b="1">
-                <a:solidFill>
-                  <a:srgbClr val="FFFFFF"/>
-                </a:solidFill>
-              </a:rPr>
-              <a:t>✓</a:t>
-            </a:r>
-            <a:endParaRPr lang="en-US" sz="1000"/>
-          </a:p>
-        </p:txBody>
-      </p:sp>
-      <p:sp>
-        <p:nvSpPr>
-          <p:cNvPr id="499568974" name="Shape 79"/>
-          <p:cNvSpPr/>
-          <p:nvPr/>
-        </p:nvSpPr>
-        <p:spPr bwMode="auto">
-          <a:xfrm>
-            <a:off x="274320" y="4160519"/>
-            <a:ext cx="8595360" cy="338328"/>
-          </a:xfrm>
-          <a:prstGeom prst="rect">
-            <a:avLst/>
-          </a:prstGeom>
-          <a:solidFill>
-            <a:srgbClr val="F1F5F9"/>
-          </a:solidFill>
-          <a:ln w="6350">
-            <a:solidFill>
-              <a:srgbClr val="CBD5E1"/>
-            </a:solidFill>
-            <a:prstDash val="solid"/>
-          </a:ln>
-        </p:spPr>
-      </p:sp>
-      <p:sp>
-        <p:nvSpPr>
-          <p:cNvPr id="146532931" name="Text 80"/>
-          <p:cNvSpPr/>
-          <p:nvPr/>
-        </p:nvSpPr>
-        <p:spPr bwMode="auto">
-          <a:xfrm>
-            <a:off x="347472" y="4160519"/>
-            <a:ext cx="4572000" cy="338328"/>
-          </a:xfrm>
-          <a:prstGeom prst="rect">
-            <a:avLst/>
-          </a:prstGeom>
-          <a:noFill/>
-          <a:ln/>
-        </p:spPr>
-        <p:txBody>
-          <a:bodyPr wrap="square" lIns="0" tIns="0" rIns="0" bIns="0" rtlCol="0" anchor="ctr"/>
-          <a:lstStyle/>
-          <a:p>
-            <a:pPr marL="0" indent="0">
-              <a:buNone/>
-              <a:defRPr/>
-            </a:pPr>
-            <a:r>
-              <a:rPr lang="en-US" sz="1000">
-                <a:solidFill>
-                  <a:srgbClr val="0F172A"/>
-                </a:solidFill>
-                <a:latin typeface="Calibri"/>
-                <a:ea typeface="Calibri"/>
-                <a:cs typeface="Calibri"/>
-              </a:rPr>
-              <a:t>Change member roles</a:t>
-            </a:r>
-            <a:endParaRPr lang="en-US" sz="1000"/>
-          </a:p>
-        </p:txBody>
-      </p:sp>
-      <p:sp>
-        <p:nvSpPr>
-          <p:cNvPr id="1594517886" name="Text 81"/>
-          <p:cNvSpPr/>
-          <p:nvPr/>
-        </p:nvSpPr>
-        <p:spPr bwMode="auto">
-          <a:xfrm>
-            <a:off x="5074920" y="4160519"/>
-            <a:ext cx="1325880" cy="338328"/>
-          </a:xfrm>
-          <a:prstGeom prst="rect">
-            <a:avLst/>
-          </a:prstGeom>
-          <a:noFill/>
-          <a:ln/>
-        </p:spPr>
-        <p:txBody>
-          <a:bodyPr wrap="square" lIns="0" tIns="0" rIns="0" bIns="0" rtlCol="0" anchor="ctr"/>
-          <a:lstStyle/>
-          <a:p>
-            <a:pPr marL="0" indent="0" algn="ctr">
-              <a:buNone/>
-              <a:defRPr/>
-            </a:pPr>
-            <a:r>
-              <a:rPr lang="en-US" sz="1400">
-                <a:solidFill>
-                  <a:srgbClr val="CBD5E1"/>
-                </a:solidFill>
-              </a:rPr>
-              <a:t>–</a:t>
-            </a:r>
-            <a:endParaRPr lang="en-US" sz="1400"/>
-          </a:p>
-        </p:txBody>
-      </p:sp>
-      <p:sp>
-        <p:nvSpPr>
-          <p:cNvPr id="592449835" name="Text 82"/>
-          <p:cNvSpPr/>
-          <p:nvPr/>
-        </p:nvSpPr>
-        <p:spPr bwMode="auto">
-          <a:xfrm>
-            <a:off x="6537960" y="4160519"/>
-            <a:ext cx="1325880" cy="338328"/>
-          </a:xfrm>
-          <a:prstGeom prst="rect">
-            <a:avLst/>
-          </a:prstGeom>
-          <a:noFill/>
-          <a:ln/>
-        </p:spPr>
-        <p:txBody>
-          <a:bodyPr wrap="square" lIns="0" tIns="0" rIns="0" bIns="0" rtlCol="0" anchor="ctr"/>
-          <a:lstStyle/>
-          <a:p>
-            <a:pPr marL="0" indent="0" algn="ctr">
-              <a:buNone/>
-              <a:defRPr/>
-            </a:pPr>
-            <a:r>
-              <a:rPr lang="en-US" sz="1400">
-                <a:solidFill>
-                  <a:srgbClr val="CBD5E1"/>
-                </a:solidFill>
-              </a:rPr>
-              <a:t>–</a:t>
-            </a:r>
-            <a:endParaRPr lang="en-US" sz="1400"/>
-          </a:p>
-        </p:txBody>
-      </p:sp>
-      <p:sp>
-        <p:nvSpPr>
-          <p:cNvPr id="428644045" name="Shape 83"/>
-          <p:cNvSpPr/>
-          <p:nvPr/>
-        </p:nvSpPr>
-        <p:spPr bwMode="auto">
-          <a:xfrm>
-            <a:off x="8554212" y="4219956"/>
-            <a:ext cx="219456" cy="219456"/>
-          </a:xfrm>
-          <a:prstGeom prst="ellipse">
-            <a:avLst/>
-          </a:prstGeom>
-          <a:solidFill>
-            <a:srgbClr val="9333EA"/>
-          </a:solidFill>
-          <a:ln w="12700">
+            <a:ln w="12700">
+              <a:solidFill>
+                <a:srgbClr val="9333EA"/>
+              </a:solidFill>
+              <a:prstDash val="solid"/>
+            </a:ln>
+          </p:spPr>
+        </p:sp>
+        <p:sp>
+          <p:nvSpPr>
+            <p:cNvPr id="1965474091" name="Text 81"/>
+            <p:cNvSpPr/>
+            <p:nvPr/>
+          </p:nvSpPr>
+          <p:spPr bwMode="auto">
+            <a:xfrm>
+              <a:off x="8343821" y="2898639"/>
+              <a:ext cx="221150" cy="203116"/>
+            </a:xfrm>
+            <a:prstGeom prst="rect">
+              <a:avLst/>
+            </a:prstGeom>
+            <a:noFill/>
+            <a:ln/>
+          </p:spPr>
+          <p:txBody>
+            <a:bodyPr wrap="square" lIns="0" tIns="0" rIns="0" bIns="0" rtlCol="0" anchor="ctr"/>
+            <a:lstStyle/>
+            <a:p>
+              <a:pPr marL="0" indent="0" algn="ctr">
+                <a:buNone/>
+                <a:defRPr/>
+              </a:pPr>
+              <a:r>
+                <a:rPr lang="en-US" sz="1000" b="1">
+                  <a:solidFill>
+                    <a:srgbClr val="FFFFFF"/>
+                  </a:solidFill>
+                </a:rPr>
+                <a:t>✓</a:t>
+              </a:r>
+              <a:endParaRPr lang="en-US" sz="1000"/>
+            </a:p>
+          </p:txBody>
+        </p:sp>
+        <p:sp>
+          <p:nvSpPr>
+            <p:cNvPr id="1888641153" name="Shape 82"/>
+            <p:cNvSpPr/>
+            <p:nvPr/>
+          </p:nvSpPr>
+          <p:spPr bwMode="auto">
+            <a:xfrm flipH="0" flipV="0">
+              <a:off x="0" y="3156766"/>
+              <a:ext cx="9098578" cy="313137"/>
+            </a:xfrm>
+            <a:prstGeom prst="rect">
+              <a:avLst/>
+            </a:prstGeom>
+            <a:solidFill>
+              <a:srgbClr val="F1F5F9"/>
+            </a:solidFill>
+            <a:ln w="6350">
+              <a:solidFill>
+                <a:srgbClr val="CBD5E1"/>
+              </a:solidFill>
+              <a:prstDash val="solid"/>
+            </a:ln>
+          </p:spPr>
+        </p:sp>
+        <p:sp>
+          <p:nvSpPr>
+            <p:cNvPr id="408968112" name="Text 83"/>
+            <p:cNvSpPr/>
+            <p:nvPr/>
+          </p:nvSpPr>
+          <p:spPr bwMode="auto">
+            <a:xfrm>
+              <a:off x="73716" y="3156766"/>
+              <a:ext cx="4607300" cy="313137"/>
+            </a:xfrm>
+            <a:prstGeom prst="rect">
+              <a:avLst/>
+            </a:prstGeom>
+            <a:noFill/>
+            <a:ln/>
+          </p:spPr>
+          <p:txBody>
+            <a:bodyPr wrap="square" lIns="0" tIns="0" rIns="0" bIns="0" rtlCol="0" anchor="ctr"/>
+            <a:lstStyle/>
+            <a:p>
+              <a:pPr marL="0" indent="0">
+                <a:buNone/>
+                <a:defRPr/>
+              </a:pPr>
+              <a:r>
+                <a:rPr lang="en-US" sz="1000">
+                  <a:solidFill>
+                    <a:srgbClr val="0F172A"/>
+                  </a:solidFill>
+                  <a:latin typeface="Calibri"/>
+                  <a:ea typeface="Calibri"/>
+                  <a:cs typeface="Calibri"/>
+                </a:rPr>
+                <a:t>Create / delete projects</a:t>
+              </a:r>
+              <a:endParaRPr lang="en-US" sz="1000"/>
+            </a:p>
+          </p:txBody>
+        </p:sp>
+        <p:sp>
+          <p:nvSpPr>
+            <p:cNvPr id="670716399" name="Text 84"/>
+            <p:cNvSpPr/>
+            <p:nvPr/>
+          </p:nvSpPr>
+          <p:spPr bwMode="auto">
+            <a:xfrm>
+              <a:off x="4837665" y="3156766"/>
+              <a:ext cx="1336116" cy="313137"/>
+            </a:xfrm>
+            <a:prstGeom prst="rect">
+              <a:avLst/>
+            </a:prstGeom>
+            <a:noFill/>
+            <a:ln/>
+          </p:spPr>
+          <p:txBody>
+            <a:bodyPr wrap="square" lIns="0" tIns="0" rIns="0" bIns="0" rtlCol="0" anchor="ctr"/>
+            <a:lstStyle/>
+            <a:p>
+              <a:pPr marL="0" indent="0" algn="ctr">
+                <a:buNone/>
+                <a:defRPr/>
+              </a:pPr>
+              <a:r>
+                <a:rPr lang="en-US" sz="1400">
+                  <a:solidFill>
+                    <a:srgbClr val="CBD5E1"/>
+                  </a:solidFill>
+                </a:rPr>
+                <a:t>–</a:t>
+              </a:r>
+              <a:endParaRPr lang="en-US" sz="1400"/>
+            </a:p>
+          </p:txBody>
+        </p:sp>
+        <p:sp>
+          <p:nvSpPr>
+            <p:cNvPr id="126325534" name="Shape 85"/>
+            <p:cNvSpPr/>
+            <p:nvPr/>
+          </p:nvSpPr>
+          <p:spPr bwMode="auto">
+            <a:xfrm>
+              <a:off x="6869485" y="3211778"/>
+              <a:ext cx="221150" cy="203116"/>
+            </a:xfrm>
+            <a:prstGeom prst="ellipse">
+              <a:avLst/>
+            </a:prstGeom>
+            <a:solidFill>
+              <a:srgbClr val="F97316"/>
+            </a:solidFill>
+            <a:ln w="12700">
+              <a:solidFill>
+                <a:srgbClr val="F97316"/>
+              </a:solidFill>
+              <a:prstDash val="solid"/>
+            </a:ln>
+          </p:spPr>
+        </p:sp>
+        <p:sp>
+          <p:nvSpPr>
+            <p:cNvPr id="2035749409" name="Text 86"/>
+            <p:cNvSpPr/>
+            <p:nvPr/>
+          </p:nvSpPr>
+          <p:spPr bwMode="auto">
+            <a:xfrm>
+              <a:off x="6869485" y="3211778"/>
+              <a:ext cx="221150" cy="203116"/>
+            </a:xfrm>
+            <a:prstGeom prst="rect">
+              <a:avLst/>
+            </a:prstGeom>
+            <a:noFill/>
+            <a:ln/>
+          </p:spPr>
+          <p:txBody>
+            <a:bodyPr wrap="square" lIns="0" tIns="0" rIns="0" bIns="0" rtlCol="0" anchor="ctr"/>
+            <a:lstStyle/>
+            <a:p>
+              <a:pPr marL="0" indent="0" algn="ctr">
+                <a:buNone/>
+                <a:defRPr/>
+              </a:pPr>
+              <a:r>
+                <a:rPr lang="en-US" sz="1000" b="1">
+                  <a:solidFill>
+                    <a:srgbClr val="FFFFFF"/>
+                  </a:solidFill>
+                </a:rPr>
+                <a:t>✓</a:t>
+              </a:r>
+              <a:endParaRPr lang="en-US" sz="1000"/>
+            </a:p>
+          </p:txBody>
+        </p:sp>
+        <p:sp>
+          <p:nvSpPr>
+            <p:cNvPr id="2112765213" name="Shape 87"/>
+            <p:cNvSpPr/>
+            <p:nvPr/>
+          </p:nvSpPr>
+          <p:spPr bwMode="auto">
+            <a:xfrm>
+              <a:off x="8343821" y="3211778"/>
+              <a:ext cx="221150" cy="203116"/>
+            </a:xfrm>
+            <a:prstGeom prst="ellipse">
+              <a:avLst/>
+            </a:prstGeom>
             <a:solidFill>
               <a:srgbClr val="9333EA"/>
             </a:solidFill>
-            <a:prstDash val="solid"/>
-          </a:ln>
-        </p:spPr>
-      </p:sp>
-      <p:sp>
-        <p:nvSpPr>
-          <p:cNvPr id="601623578" name="Text 84"/>
-          <p:cNvSpPr/>
-          <p:nvPr/>
-        </p:nvSpPr>
-        <p:spPr bwMode="auto">
-          <a:xfrm>
-            <a:off x="8554212" y="4219956"/>
-            <a:ext cx="219456" cy="219456"/>
-          </a:xfrm>
-          <a:prstGeom prst="rect">
-            <a:avLst/>
-          </a:prstGeom>
-          <a:noFill/>
-          <a:ln/>
-        </p:spPr>
-        <p:txBody>
-          <a:bodyPr wrap="square" lIns="0" tIns="0" rIns="0" bIns="0" rtlCol="0" anchor="ctr"/>
-          <a:lstStyle/>
-          <a:p>
-            <a:pPr marL="0" indent="0" algn="ctr">
-              <a:buNone/>
-              <a:defRPr/>
-            </a:pPr>
-            <a:r>
-              <a:rPr lang="en-US" sz="1000" b="1">
-                <a:solidFill>
-                  <a:srgbClr val="FFFFFF"/>
-                </a:solidFill>
-              </a:rPr>
-              <a:t>✓</a:t>
-            </a:r>
-            <a:endParaRPr lang="en-US" sz="1000"/>
-          </a:p>
-        </p:txBody>
-      </p:sp>
-      <p:sp>
-        <p:nvSpPr>
-          <p:cNvPr id="587817731" name="Shape 85"/>
-          <p:cNvSpPr/>
-          <p:nvPr/>
-        </p:nvSpPr>
-        <p:spPr bwMode="auto">
-          <a:xfrm>
-            <a:off x="274320" y="4498848"/>
-            <a:ext cx="8595360" cy="338328"/>
-          </a:xfrm>
-          <a:prstGeom prst="rect">
-            <a:avLst/>
-          </a:prstGeom>
-          <a:solidFill>
-            <a:srgbClr val="FFFFFF"/>
-          </a:solidFill>
-          <a:ln w="6350">
-            <a:solidFill>
-              <a:srgbClr val="CBD5E1"/>
-            </a:solidFill>
-            <a:prstDash val="solid"/>
-          </a:ln>
-        </p:spPr>
-      </p:sp>
-      <p:sp>
-        <p:nvSpPr>
-          <p:cNvPr id="465301470" name="Text 86"/>
-          <p:cNvSpPr/>
-          <p:nvPr/>
-        </p:nvSpPr>
-        <p:spPr bwMode="auto">
-          <a:xfrm>
-            <a:off x="347472" y="4498848"/>
-            <a:ext cx="4572000" cy="338328"/>
-          </a:xfrm>
-          <a:prstGeom prst="rect">
-            <a:avLst/>
-          </a:prstGeom>
-          <a:noFill/>
-          <a:ln/>
-        </p:spPr>
-        <p:txBody>
-          <a:bodyPr wrap="square" lIns="0" tIns="0" rIns="0" bIns="0" rtlCol="0" anchor="ctr"/>
-          <a:lstStyle/>
-          <a:p>
-            <a:pPr marL="0" indent="0">
-              <a:buNone/>
-              <a:defRPr/>
-            </a:pPr>
-            <a:r>
-              <a:rPr lang="en-US" sz="1000">
-                <a:solidFill>
-                  <a:srgbClr val="0F172A"/>
-                </a:solidFill>
-                <a:latin typeface="Calibri"/>
-                <a:ea typeface="Calibri"/>
-                <a:cs typeface="Calibri"/>
-              </a:rPr>
-              <a:t>System access &amp; settings</a:t>
-            </a:r>
-            <a:endParaRPr lang="en-US" sz="1000"/>
-          </a:p>
-        </p:txBody>
-      </p:sp>
-      <p:sp>
-        <p:nvSpPr>
-          <p:cNvPr id="254016580" name="Text 87"/>
-          <p:cNvSpPr/>
-          <p:nvPr/>
-        </p:nvSpPr>
-        <p:spPr bwMode="auto">
-          <a:xfrm>
-            <a:off x="5074920" y="4498848"/>
-            <a:ext cx="1325880" cy="338328"/>
-          </a:xfrm>
-          <a:prstGeom prst="rect">
-            <a:avLst/>
-          </a:prstGeom>
-          <a:noFill/>
-          <a:ln/>
-        </p:spPr>
-        <p:txBody>
-          <a:bodyPr wrap="square" lIns="0" tIns="0" rIns="0" bIns="0" rtlCol="0" anchor="ctr"/>
-          <a:lstStyle/>
-          <a:p>
-            <a:pPr marL="0" indent="0" algn="ctr">
-              <a:buNone/>
-              <a:defRPr/>
-            </a:pPr>
-            <a:r>
-              <a:rPr lang="en-US" sz="1400">
-                <a:solidFill>
-                  <a:srgbClr val="CBD5E1"/>
-                </a:solidFill>
-              </a:rPr>
-              <a:t>–</a:t>
-            </a:r>
-            <a:endParaRPr lang="en-US" sz="1400"/>
-          </a:p>
-        </p:txBody>
-      </p:sp>
-      <p:sp>
-        <p:nvSpPr>
-          <p:cNvPr id="187366297" name="Text 88"/>
-          <p:cNvSpPr/>
-          <p:nvPr/>
-        </p:nvSpPr>
-        <p:spPr bwMode="auto">
-          <a:xfrm>
-            <a:off x="6537960" y="4498848"/>
-            <a:ext cx="1325880" cy="338328"/>
-          </a:xfrm>
-          <a:prstGeom prst="rect">
-            <a:avLst/>
-          </a:prstGeom>
-          <a:noFill/>
-          <a:ln/>
-        </p:spPr>
-        <p:txBody>
-          <a:bodyPr wrap="square" lIns="0" tIns="0" rIns="0" bIns="0" rtlCol="0" anchor="ctr"/>
-          <a:lstStyle/>
-          <a:p>
-            <a:pPr marL="0" indent="0" algn="ctr">
-              <a:buNone/>
-              <a:defRPr/>
-            </a:pPr>
-            <a:r>
-              <a:rPr lang="en-US" sz="1400">
-                <a:solidFill>
-                  <a:srgbClr val="CBD5E1"/>
-                </a:solidFill>
-              </a:rPr>
-              <a:t>–</a:t>
-            </a:r>
-            <a:endParaRPr lang="en-US" sz="1400"/>
-          </a:p>
-        </p:txBody>
-      </p:sp>
-      <p:sp>
-        <p:nvSpPr>
-          <p:cNvPr id="1901049712" name="Shape 89"/>
-          <p:cNvSpPr/>
-          <p:nvPr/>
-        </p:nvSpPr>
-        <p:spPr bwMode="auto">
-          <a:xfrm>
-            <a:off x="8554212" y="4558284"/>
-            <a:ext cx="219456" cy="219456"/>
-          </a:xfrm>
-          <a:prstGeom prst="ellipse">
-            <a:avLst/>
-          </a:prstGeom>
-          <a:solidFill>
-            <a:srgbClr val="9333EA"/>
-          </a:solidFill>
-          <a:ln w="12700">
+            <a:ln w="12700">
+              <a:solidFill>
+                <a:srgbClr val="9333EA"/>
+              </a:solidFill>
+              <a:prstDash val="solid"/>
+            </a:ln>
+          </p:spPr>
+        </p:sp>
+        <p:sp>
+          <p:nvSpPr>
+            <p:cNvPr id="1298818622" name="Text 88"/>
+            <p:cNvSpPr/>
+            <p:nvPr/>
+          </p:nvSpPr>
+          <p:spPr bwMode="auto">
+            <a:xfrm>
+              <a:off x="8343821" y="3211778"/>
+              <a:ext cx="221150" cy="203116"/>
+            </a:xfrm>
+            <a:prstGeom prst="rect">
+              <a:avLst/>
+            </a:prstGeom>
+            <a:noFill/>
+            <a:ln/>
+          </p:spPr>
+          <p:txBody>
+            <a:bodyPr wrap="square" lIns="0" tIns="0" rIns="0" bIns="0" rtlCol="0" anchor="ctr"/>
+            <a:lstStyle/>
+            <a:p>
+              <a:pPr marL="0" indent="0" algn="ctr">
+                <a:buNone/>
+                <a:defRPr/>
+              </a:pPr>
+              <a:r>
+                <a:rPr lang="en-US" sz="1000" b="1">
+                  <a:solidFill>
+                    <a:srgbClr val="FFFFFF"/>
+                  </a:solidFill>
+                </a:rPr>
+                <a:t>✓</a:t>
+              </a:r>
+              <a:endParaRPr lang="en-US" sz="1000"/>
+            </a:p>
+          </p:txBody>
+        </p:sp>
+        <p:sp>
+          <p:nvSpPr>
+            <p:cNvPr id="1512625419" name="Shape 89"/>
+            <p:cNvSpPr/>
+            <p:nvPr/>
+          </p:nvSpPr>
+          <p:spPr bwMode="auto">
+            <a:xfrm flipH="0" flipV="0">
+              <a:off x="0" y="3469905"/>
+              <a:ext cx="9098578" cy="313137"/>
+            </a:xfrm>
+            <a:prstGeom prst="rect">
+              <a:avLst/>
+            </a:prstGeom>
+            <a:solidFill>
+              <a:srgbClr val="FFFFFF"/>
+            </a:solidFill>
+            <a:ln w="6350">
+              <a:solidFill>
+                <a:srgbClr val="CBD5E1"/>
+              </a:solidFill>
+              <a:prstDash val="solid"/>
+            </a:ln>
+          </p:spPr>
+        </p:sp>
+        <p:sp>
+          <p:nvSpPr>
+            <p:cNvPr id="1747620318" name="Text 90"/>
+            <p:cNvSpPr/>
+            <p:nvPr/>
+          </p:nvSpPr>
+          <p:spPr bwMode="auto">
+            <a:xfrm>
+              <a:off x="73716" y="3469905"/>
+              <a:ext cx="4607300" cy="313137"/>
+            </a:xfrm>
+            <a:prstGeom prst="rect">
+              <a:avLst/>
+            </a:prstGeom>
+            <a:noFill/>
+            <a:ln/>
+          </p:spPr>
+          <p:txBody>
+            <a:bodyPr wrap="square" lIns="0" tIns="0" rIns="0" bIns="0" rtlCol="0" anchor="ctr"/>
+            <a:lstStyle/>
+            <a:p>
+              <a:pPr marL="0" indent="0">
+                <a:buNone/>
+                <a:defRPr/>
+              </a:pPr>
+              <a:r>
+                <a:rPr lang="en-US" sz="1000">
+                  <a:solidFill>
+                    <a:srgbClr val="0F172A"/>
+                  </a:solidFill>
+                  <a:latin typeface="Calibri"/>
+                  <a:ea typeface="Calibri"/>
+                  <a:cs typeface="Calibri"/>
+                </a:rPr>
+                <a:t>Assign / remove project members</a:t>
+              </a:r>
+              <a:endParaRPr lang="en-US" sz="1000"/>
+            </a:p>
+          </p:txBody>
+        </p:sp>
+        <p:sp>
+          <p:nvSpPr>
+            <p:cNvPr id="814786879" name="Text 91"/>
+            <p:cNvSpPr/>
+            <p:nvPr/>
+          </p:nvSpPr>
+          <p:spPr bwMode="auto">
+            <a:xfrm>
+              <a:off x="4837665" y="3469905"/>
+              <a:ext cx="1336116" cy="313137"/>
+            </a:xfrm>
+            <a:prstGeom prst="rect">
+              <a:avLst/>
+            </a:prstGeom>
+            <a:noFill/>
+            <a:ln/>
+          </p:spPr>
+          <p:txBody>
+            <a:bodyPr wrap="square" lIns="0" tIns="0" rIns="0" bIns="0" rtlCol="0" anchor="ctr"/>
+            <a:lstStyle/>
+            <a:p>
+              <a:pPr marL="0" indent="0" algn="ctr">
+                <a:buNone/>
+                <a:defRPr/>
+              </a:pPr>
+              <a:r>
+                <a:rPr lang="en-US" sz="1400">
+                  <a:solidFill>
+                    <a:srgbClr val="CBD5E1"/>
+                  </a:solidFill>
+                </a:rPr>
+                <a:t>–</a:t>
+              </a:r>
+              <a:endParaRPr lang="en-US" sz="1400"/>
+            </a:p>
+          </p:txBody>
+        </p:sp>
+        <p:sp>
+          <p:nvSpPr>
+            <p:cNvPr id="235705954" name="Shape 92"/>
+            <p:cNvSpPr/>
+            <p:nvPr/>
+          </p:nvSpPr>
+          <p:spPr bwMode="auto">
+            <a:xfrm>
+              <a:off x="6869485" y="3524916"/>
+              <a:ext cx="221150" cy="203116"/>
+            </a:xfrm>
+            <a:prstGeom prst="ellipse">
+              <a:avLst/>
+            </a:prstGeom>
+            <a:solidFill>
+              <a:srgbClr val="F97316"/>
+            </a:solidFill>
+            <a:ln w="12700">
+              <a:solidFill>
+                <a:srgbClr val="F97316"/>
+              </a:solidFill>
+              <a:prstDash val="solid"/>
+            </a:ln>
+          </p:spPr>
+        </p:sp>
+        <p:sp>
+          <p:nvSpPr>
+            <p:cNvPr id="223709398" name="Text 93"/>
+            <p:cNvSpPr/>
+            <p:nvPr/>
+          </p:nvSpPr>
+          <p:spPr bwMode="auto">
+            <a:xfrm>
+              <a:off x="6869485" y="3524916"/>
+              <a:ext cx="221150" cy="203116"/>
+            </a:xfrm>
+            <a:prstGeom prst="rect">
+              <a:avLst/>
+            </a:prstGeom>
+            <a:noFill/>
+            <a:ln/>
+          </p:spPr>
+          <p:txBody>
+            <a:bodyPr wrap="square" lIns="0" tIns="0" rIns="0" bIns="0" rtlCol="0" anchor="ctr"/>
+            <a:lstStyle/>
+            <a:p>
+              <a:pPr marL="0" indent="0" algn="ctr">
+                <a:buNone/>
+                <a:defRPr/>
+              </a:pPr>
+              <a:r>
+                <a:rPr lang="en-US" sz="1000" b="1">
+                  <a:solidFill>
+                    <a:srgbClr val="FFFFFF"/>
+                  </a:solidFill>
+                </a:rPr>
+                <a:t>✓</a:t>
+              </a:r>
+              <a:endParaRPr lang="en-US" sz="1000"/>
+            </a:p>
+          </p:txBody>
+        </p:sp>
+        <p:sp>
+          <p:nvSpPr>
+            <p:cNvPr id="75679692" name="Shape 94"/>
+            <p:cNvSpPr/>
+            <p:nvPr/>
+          </p:nvSpPr>
+          <p:spPr bwMode="auto">
+            <a:xfrm>
+              <a:off x="8343821" y="3524916"/>
+              <a:ext cx="221150" cy="203116"/>
+            </a:xfrm>
+            <a:prstGeom prst="ellipse">
+              <a:avLst/>
+            </a:prstGeom>
             <a:solidFill>
               <a:srgbClr val="9333EA"/>
             </a:solidFill>
-            <a:prstDash val="solid"/>
-          </a:ln>
-        </p:spPr>
-      </p:sp>
-      <p:sp>
-        <p:nvSpPr>
-          <p:cNvPr id="1252665593" name="Text 90"/>
-          <p:cNvSpPr/>
-          <p:nvPr/>
-        </p:nvSpPr>
-        <p:spPr bwMode="auto">
-          <a:xfrm>
-            <a:off x="8554212" y="4558284"/>
-            <a:ext cx="219456" cy="219456"/>
-          </a:xfrm>
-          <a:prstGeom prst="rect">
-            <a:avLst/>
-          </a:prstGeom>
-          <a:noFill/>
-          <a:ln/>
-        </p:spPr>
-        <p:txBody>
-          <a:bodyPr wrap="square" lIns="0" tIns="0" rIns="0" bIns="0" rtlCol="0" anchor="ctr"/>
-          <a:lstStyle/>
-          <a:p>
-            <a:pPr marL="0" indent="0" algn="ctr">
-              <a:buNone/>
-              <a:defRPr/>
-            </a:pPr>
-            <a:r>
-              <a:rPr lang="en-US" sz="1000" b="1">
-                <a:solidFill>
-                  <a:srgbClr val="FFFFFF"/>
-                </a:solidFill>
-              </a:rPr>
-              <a:t>✓</a:t>
-            </a:r>
-            <a:endParaRPr lang="en-US" sz="1000"/>
-          </a:p>
-        </p:txBody>
-      </p:sp>
+            <a:ln w="12700">
+              <a:solidFill>
+                <a:srgbClr val="9333EA"/>
+              </a:solidFill>
+              <a:prstDash val="solid"/>
+            </a:ln>
+          </p:spPr>
+        </p:sp>
+        <p:sp>
+          <p:nvSpPr>
+            <p:cNvPr id="2040100103" name="Text 95"/>
+            <p:cNvSpPr/>
+            <p:nvPr/>
+          </p:nvSpPr>
+          <p:spPr bwMode="auto">
+            <a:xfrm>
+              <a:off x="8343821" y="3524916"/>
+              <a:ext cx="221150" cy="203116"/>
+            </a:xfrm>
+            <a:prstGeom prst="rect">
+              <a:avLst/>
+            </a:prstGeom>
+            <a:noFill/>
+            <a:ln/>
+          </p:spPr>
+          <p:txBody>
+            <a:bodyPr wrap="square" lIns="0" tIns="0" rIns="0" bIns="0" rtlCol="0" anchor="ctr"/>
+            <a:lstStyle/>
+            <a:p>
+              <a:pPr marL="0" indent="0" algn="ctr">
+                <a:buNone/>
+                <a:defRPr/>
+              </a:pPr>
+              <a:r>
+                <a:rPr lang="en-US" sz="1000" b="1">
+                  <a:solidFill>
+                    <a:srgbClr val="FFFFFF"/>
+                  </a:solidFill>
+                </a:rPr>
+                <a:t>✓</a:t>
+              </a:r>
+              <a:endParaRPr lang="en-US" sz="1000"/>
+            </a:p>
+          </p:txBody>
+        </p:sp>
+        <p:sp>
+          <p:nvSpPr>
+            <p:cNvPr id="1398801870" name="Shape 96"/>
+            <p:cNvSpPr/>
+            <p:nvPr/>
+          </p:nvSpPr>
+          <p:spPr bwMode="auto">
+            <a:xfrm flipH="0" flipV="0">
+              <a:off x="0" y="3783043"/>
+              <a:ext cx="9098578" cy="313137"/>
+            </a:xfrm>
+            <a:prstGeom prst="rect">
+              <a:avLst/>
+            </a:prstGeom>
+            <a:solidFill>
+              <a:srgbClr val="F1F5F9"/>
+            </a:solidFill>
+            <a:ln w="6350">
+              <a:solidFill>
+                <a:srgbClr val="CBD5E1"/>
+              </a:solidFill>
+              <a:prstDash val="solid"/>
+            </a:ln>
+          </p:spPr>
+        </p:sp>
+        <p:sp>
+          <p:nvSpPr>
+            <p:cNvPr id="2018285144" name="Text 97"/>
+            <p:cNvSpPr/>
+            <p:nvPr/>
+          </p:nvSpPr>
+          <p:spPr bwMode="auto">
+            <a:xfrm>
+              <a:off x="73716" y="3783043"/>
+              <a:ext cx="4607300" cy="313137"/>
+            </a:xfrm>
+            <a:prstGeom prst="rect">
+              <a:avLst/>
+            </a:prstGeom>
+            <a:noFill/>
+            <a:ln/>
+          </p:spPr>
+          <p:txBody>
+            <a:bodyPr wrap="square" lIns="0" tIns="0" rIns="0" bIns="0" rtlCol="0" anchor="ctr"/>
+            <a:lstStyle/>
+            <a:p>
+              <a:pPr marL="0" indent="0">
+                <a:buNone/>
+                <a:defRPr/>
+              </a:pPr>
+              <a:r>
+                <a:rPr lang="en-US" sz="1000">
+                  <a:solidFill>
+                    <a:srgbClr val="0F172A"/>
+                  </a:solidFill>
+                  <a:latin typeface="Calibri"/>
+                  <a:ea typeface="Calibri"/>
+                  <a:cs typeface="Calibri"/>
+                </a:rPr>
+                <a:t>Change user roles</a:t>
+              </a:r>
+              <a:endParaRPr lang="en-US" sz="1000"/>
+            </a:p>
+          </p:txBody>
+        </p:sp>
+        <p:sp>
+          <p:nvSpPr>
+            <p:cNvPr id="1535996111" name="Text 98"/>
+            <p:cNvSpPr/>
+            <p:nvPr/>
+          </p:nvSpPr>
+          <p:spPr bwMode="auto">
+            <a:xfrm>
+              <a:off x="4837665" y="3783043"/>
+              <a:ext cx="1336116" cy="313137"/>
+            </a:xfrm>
+            <a:prstGeom prst="rect">
+              <a:avLst/>
+            </a:prstGeom>
+            <a:noFill/>
+            <a:ln/>
+          </p:spPr>
+          <p:txBody>
+            <a:bodyPr wrap="square" lIns="0" tIns="0" rIns="0" bIns="0" rtlCol="0" anchor="ctr"/>
+            <a:lstStyle/>
+            <a:p>
+              <a:pPr marL="0" indent="0" algn="ctr">
+                <a:buNone/>
+                <a:defRPr/>
+              </a:pPr>
+              <a:r>
+                <a:rPr lang="en-US" sz="1400">
+                  <a:solidFill>
+                    <a:srgbClr val="CBD5E1"/>
+                  </a:solidFill>
+                </a:rPr>
+                <a:t>–</a:t>
+              </a:r>
+              <a:endParaRPr lang="en-US" sz="1400"/>
+            </a:p>
+          </p:txBody>
+        </p:sp>
+        <p:sp>
+          <p:nvSpPr>
+            <p:cNvPr id="167442115" name="Text 99"/>
+            <p:cNvSpPr/>
+            <p:nvPr/>
+          </p:nvSpPr>
+          <p:spPr bwMode="auto">
+            <a:xfrm>
+              <a:off x="6312001" y="3783043"/>
+              <a:ext cx="1336116" cy="313137"/>
+            </a:xfrm>
+            <a:prstGeom prst="rect">
+              <a:avLst/>
+            </a:prstGeom>
+            <a:noFill/>
+            <a:ln/>
+          </p:spPr>
+          <p:txBody>
+            <a:bodyPr wrap="square" lIns="0" tIns="0" rIns="0" bIns="0" rtlCol="0" anchor="ctr"/>
+            <a:lstStyle/>
+            <a:p>
+              <a:pPr marL="0" indent="0" algn="ctr">
+                <a:buNone/>
+                <a:defRPr/>
+              </a:pPr>
+              <a:r>
+                <a:rPr lang="en-US" sz="1400">
+                  <a:solidFill>
+                    <a:srgbClr val="CBD5E1"/>
+                  </a:solidFill>
+                </a:rPr>
+                <a:t>–</a:t>
+              </a:r>
+              <a:endParaRPr lang="en-US" sz="1400"/>
+            </a:p>
+          </p:txBody>
+        </p:sp>
+        <p:sp>
+          <p:nvSpPr>
+            <p:cNvPr id="992415179" name="Shape 100"/>
+            <p:cNvSpPr/>
+            <p:nvPr/>
+          </p:nvSpPr>
+          <p:spPr bwMode="auto">
+            <a:xfrm>
+              <a:off x="8343821" y="3838054"/>
+              <a:ext cx="221150" cy="203116"/>
+            </a:xfrm>
+            <a:prstGeom prst="ellipse">
+              <a:avLst/>
+            </a:prstGeom>
+            <a:solidFill>
+              <a:srgbClr val="9333EA"/>
+            </a:solidFill>
+            <a:ln w="12700">
+              <a:solidFill>
+                <a:srgbClr val="9333EA"/>
+              </a:solidFill>
+              <a:prstDash val="solid"/>
+            </a:ln>
+          </p:spPr>
+        </p:sp>
+        <p:sp>
+          <p:nvSpPr>
+            <p:cNvPr id="604657024" name="Text 101"/>
+            <p:cNvSpPr/>
+            <p:nvPr/>
+          </p:nvSpPr>
+          <p:spPr bwMode="auto">
+            <a:xfrm>
+              <a:off x="8343821" y="3838054"/>
+              <a:ext cx="221150" cy="203116"/>
+            </a:xfrm>
+            <a:prstGeom prst="rect">
+              <a:avLst/>
+            </a:prstGeom>
+            <a:noFill/>
+            <a:ln/>
+          </p:spPr>
+          <p:txBody>
+            <a:bodyPr wrap="square" lIns="0" tIns="0" rIns="0" bIns="0" rtlCol="0" anchor="ctr"/>
+            <a:lstStyle/>
+            <a:p>
+              <a:pPr marL="0" indent="0" algn="ctr">
+                <a:buNone/>
+                <a:defRPr/>
+              </a:pPr>
+              <a:r>
+                <a:rPr lang="en-US" sz="1000" b="1">
+                  <a:solidFill>
+                    <a:srgbClr val="FFFFFF"/>
+                  </a:solidFill>
+                </a:rPr>
+                <a:t>✓</a:t>
+              </a:r>
+              <a:endParaRPr lang="en-US" sz="1000"/>
+            </a:p>
+          </p:txBody>
+        </p:sp>
+        <p:sp>
+          <p:nvSpPr>
+            <p:cNvPr id="1836804951" name="Shape 102"/>
+            <p:cNvSpPr/>
+            <p:nvPr/>
+          </p:nvSpPr>
+          <p:spPr bwMode="auto">
+            <a:xfrm flipH="0" flipV="0">
+              <a:off x="0" y="4096181"/>
+              <a:ext cx="9098578" cy="313137"/>
+            </a:xfrm>
+            <a:prstGeom prst="rect">
+              <a:avLst/>
+            </a:prstGeom>
+            <a:solidFill>
+              <a:srgbClr val="FFFFFF"/>
+            </a:solidFill>
+            <a:ln w="6350">
+              <a:solidFill>
+                <a:srgbClr val="CBD5E1"/>
+              </a:solidFill>
+              <a:prstDash val="solid"/>
+            </a:ln>
+          </p:spPr>
+        </p:sp>
+        <p:sp>
+          <p:nvSpPr>
+            <p:cNvPr id="1261454566" name="Text 103"/>
+            <p:cNvSpPr/>
+            <p:nvPr/>
+          </p:nvSpPr>
+          <p:spPr bwMode="auto">
+            <a:xfrm>
+              <a:off x="73716" y="4096181"/>
+              <a:ext cx="4607300" cy="313137"/>
+            </a:xfrm>
+            <a:prstGeom prst="rect">
+              <a:avLst/>
+            </a:prstGeom>
+            <a:noFill/>
+            <a:ln/>
+          </p:spPr>
+          <p:txBody>
+            <a:bodyPr wrap="square" lIns="0" tIns="0" rIns="0" bIns="0" rtlCol="0" anchor="ctr"/>
+            <a:lstStyle/>
+            <a:p>
+              <a:pPr marL="0" indent="0">
+                <a:buNone/>
+                <a:defRPr/>
+              </a:pPr>
+              <a:r>
+                <a:rPr lang="en-US" sz="1000">
+                  <a:solidFill>
+                    <a:srgbClr val="0F172A"/>
+                  </a:solidFill>
+                  <a:latin typeface="Calibri"/>
+                  <a:ea typeface="Calibri"/>
+                  <a:cs typeface="Calibri"/>
+                </a:rPr>
+                <a:t>Create / delete users</a:t>
+              </a:r>
+              <a:endParaRPr lang="en-US" sz="1000"/>
+            </a:p>
+          </p:txBody>
+        </p:sp>
+        <p:sp>
+          <p:nvSpPr>
+            <p:cNvPr id="140078322" name="Text 104"/>
+            <p:cNvSpPr/>
+            <p:nvPr/>
+          </p:nvSpPr>
+          <p:spPr bwMode="auto">
+            <a:xfrm>
+              <a:off x="4837665" y="4096181"/>
+              <a:ext cx="1336116" cy="313137"/>
+            </a:xfrm>
+            <a:prstGeom prst="rect">
+              <a:avLst/>
+            </a:prstGeom>
+            <a:noFill/>
+            <a:ln/>
+          </p:spPr>
+          <p:txBody>
+            <a:bodyPr wrap="square" lIns="0" tIns="0" rIns="0" bIns="0" rtlCol="0" anchor="ctr"/>
+            <a:lstStyle/>
+            <a:p>
+              <a:pPr marL="0" indent="0" algn="ctr">
+                <a:buNone/>
+                <a:defRPr/>
+              </a:pPr>
+              <a:r>
+                <a:rPr lang="en-US" sz="1400">
+                  <a:solidFill>
+                    <a:srgbClr val="CBD5E1"/>
+                  </a:solidFill>
+                </a:rPr>
+                <a:t>–</a:t>
+              </a:r>
+              <a:endParaRPr lang="en-US" sz="1400"/>
+            </a:p>
+          </p:txBody>
+        </p:sp>
+        <p:sp>
+          <p:nvSpPr>
+            <p:cNvPr id="801097622" name="Text 105"/>
+            <p:cNvSpPr/>
+            <p:nvPr/>
+          </p:nvSpPr>
+          <p:spPr bwMode="auto">
+            <a:xfrm>
+              <a:off x="6312001" y="4096181"/>
+              <a:ext cx="1336116" cy="313137"/>
+            </a:xfrm>
+            <a:prstGeom prst="rect">
+              <a:avLst/>
+            </a:prstGeom>
+            <a:noFill/>
+            <a:ln/>
+          </p:spPr>
+          <p:txBody>
+            <a:bodyPr wrap="square" lIns="0" tIns="0" rIns="0" bIns="0" rtlCol="0" anchor="ctr"/>
+            <a:lstStyle/>
+            <a:p>
+              <a:pPr marL="0" indent="0" algn="ctr">
+                <a:buNone/>
+                <a:defRPr/>
+              </a:pPr>
+              <a:r>
+                <a:rPr lang="en-US" sz="1400">
+                  <a:solidFill>
+                    <a:srgbClr val="CBD5E1"/>
+                  </a:solidFill>
+                </a:rPr>
+                <a:t>–</a:t>
+              </a:r>
+              <a:endParaRPr lang="en-US" sz="1400"/>
+            </a:p>
+          </p:txBody>
+        </p:sp>
+        <p:sp>
+          <p:nvSpPr>
+            <p:cNvPr id="1062545147" name="Shape 106"/>
+            <p:cNvSpPr/>
+            <p:nvPr/>
+          </p:nvSpPr>
+          <p:spPr bwMode="auto">
+            <a:xfrm>
+              <a:off x="8343821" y="4151192"/>
+              <a:ext cx="221150" cy="203116"/>
+            </a:xfrm>
+            <a:prstGeom prst="ellipse">
+              <a:avLst/>
+            </a:prstGeom>
+            <a:solidFill>
+              <a:srgbClr val="9333EA"/>
+            </a:solidFill>
+            <a:ln w="12700">
+              <a:solidFill>
+                <a:srgbClr val="9333EA"/>
+              </a:solidFill>
+              <a:prstDash val="solid"/>
+            </a:ln>
+          </p:spPr>
+        </p:sp>
+        <p:sp>
+          <p:nvSpPr>
+            <p:cNvPr id="527902906" name="Text 107"/>
+            <p:cNvSpPr/>
+            <p:nvPr/>
+          </p:nvSpPr>
+          <p:spPr bwMode="auto">
+            <a:xfrm>
+              <a:off x="8343821" y="4151192"/>
+              <a:ext cx="221150" cy="203116"/>
+            </a:xfrm>
+            <a:prstGeom prst="rect">
+              <a:avLst/>
+            </a:prstGeom>
+            <a:noFill/>
+            <a:ln/>
+          </p:spPr>
+          <p:txBody>
+            <a:bodyPr wrap="square" lIns="0" tIns="0" rIns="0" bIns="0" rtlCol="0" anchor="ctr"/>
+            <a:lstStyle/>
+            <a:p>
+              <a:pPr marL="0" indent="0" algn="ctr">
+                <a:buNone/>
+                <a:defRPr/>
+              </a:pPr>
+              <a:r>
+                <a:rPr lang="en-US" sz="1000" b="1">
+                  <a:solidFill>
+                    <a:srgbClr val="FFFFFF"/>
+                  </a:solidFill>
+                </a:rPr>
+                <a:t>✓</a:t>
+              </a:r>
+              <a:endParaRPr lang="en-US" sz="1000"/>
+            </a:p>
+          </p:txBody>
+        </p:sp>
+      </p:grpSp>
     </p:spTree>
   </p:cSld>
   <p:clrMapOvr>

--- a/Mini_Jira_UseCases_EN.pptx
+++ b/Mini_Jira_UseCases_EN.pptx
@@ -5,7 +5,7 @@
     <p:sldMasterId id="2147483648" r:id="rId1"/>
   </p:sldMasterIdLst>
   <p:notesMasterIdLst>
-    <p:notesMasterId r:id="rId9"/>
+    <p:notesMasterId r:id="rId10"/>
   </p:notesMasterIdLst>
   <p:sldIdLst>
     <p:sldId id="256" r:id="rId3"/>
@@ -14,6 +14,7 @@
     <p:sldId id="259" r:id="rId6"/>
     <p:sldId id="260" r:id="rId7"/>
     <p:sldId id="261" r:id="rId8"/>
+    <p:sldId id="262" r:id="rId9"/>
   </p:sldIdLst>
   <p:sldSz cx="9144000" cy="5143500"/>
   <p:notesSz cx="5143500" cy="9144000"/>
@@ -136,7 +137,7 @@
       </p:grpSpPr>
       <p:sp>
         <p:nvSpPr>
-          <p:cNvPr id="1448466175" name="Header Placeholder 1"/>
+          <p:cNvPr id="261633980" name="Header Placeholder 1"/>
           <p:cNvSpPr>
             <a:spLocks noGrp="1"/>
           </p:cNvSpPr>
@@ -170,7 +171,7 @@
       </p:sp>
       <p:sp>
         <p:nvSpPr>
-          <p:cNvPr id="1909927072" name="Date Placeholder 2"/>
+          <p:cNvPr id="393565514" name="Date Placeholder 2"/>
           <p:cNvSpPr>
             <a:spLocks noGrp="1"/>
           </p:cNvSpPr>
@@ -208,7 +209,7 @@
       </p:sp>
       <p:sp>
         <p:nvSpPr>
-          <p:cNvPr id="1284827244" name="Slide Image Placeholder 3"/>
+          <p:cNvPr id="421294272" name="Slide Image Placeholder 3"/>
           <p:cNvSpPr>
             <a:spLocks noChangeAspect="1" noGrp="1" noRot="1"/>
           </p:cNvSpPr>
@@ -244,7 +245,7 @@
       </p:sp>
       <p:sp>
         <p:nvSpPr>
-          <p:cNvPr id="432788604" name="Notes Placeholder 4"/>
+          <p:cNvPr id="1971835983" name="Notes Placeholder 4"/>
           <p:cNvSpPr>
             <a:spLocks noGrp="1"/>
           </p:cNvSpPr>
@@ -318,7 +319,7 @@
       </p:sp>
       <p:sp>
         <p:nvSpPr>
-          <p:cNvPr id="2081546832" name="Footer Placeholder 5"/>
+          <p:cNvPr id="475096305" name="Footer Placeholder 5"/>
           <p:cNvSpPr>
             <a:spLocks noGrp="1"/>
           </p:cNvSpPr>
@@ -352,7 +353,7 @@
       </p:sp>
       <p:sp>
         <p:nvSpPr>
-          <p:cNvPr id="1971910686" name="Slide Number Placeholder 6"/>
+          <p:cNvPr id="2104821450" name="Slide Number Placeholder 6"/>
           <p:cNvSpPr>
             <a:spLocks noGrp="1"/>
           </p:cNvSpPr>
@@ -505,7 +506,7 @@
       </p:grpSpPr>
       <p:sp>
         <p:nvSpPr>
-          <p:cNvPr id="1802821340" name="Slide Image Placeholder 1"/>
+          <p:cNvPr id="1678641634" name="Slide Image Placeholder 1"/>
           <p:cNvSpPr>
             <a:spLocks noChangeAspect="1" noGrp="1" noRot="1"/>
           </p:cNvSpPr>
@@ -517,7 +518,7 @@
       </p:sp>
       <p:sp>
         <p:nvSpPr>
-          <p:cNvPr id="1275289429" name="Notes Placeholder 2"/>
+          <p:cNvPr id="1608845164" name="Notes Placeholder 2"/>
           <p:cNvSpPr>
             <a:spLocks noGrp="1"/>
           </p:cNvSpPr>
@@ -539,7 +540,7 @@
       </p:sp>
       <p:sp>
         <p:nvSpPr>
-          <p:cNvPr id="864888261" name="Slide Number Placeholder 3"/>
+          <p:cNvPr id="49039944" name="Slide Number Placeholder 3"/>
           <p:cNvSpPr>
             <a:spLocks noGrp="1"/>
           </p:cNvSpPr>
@@ -590,7 +591,7 @@
       </p:grpSpPr>
       <p:sp>
         <p:nvSpPr>
-          <p:cNvPr id="59038424" name="Slide Image Placeholder 1"/>
+          <p:cNvPr id="170189356" name="Slide Image Placeholder 1"/>
           <p:cNvSpPr>
             <a:spLocks noChangeAspect="1" noGrp="1" noRot="1"/>
           </p:cNvSpPr>
@@ -602,7 +603,7 @@
       </p:sp>
       <p:sp>
         <p:nvSpPr>
-          <p:cNvPr id="1155407644" name="Notes Placeholder 2"/>
+          <p:cNvPr id="124485041" name="Notes Placeholder 2"/>
           <p:cNvSpPr>
             <a:spLocks noGrp="1"/>
           </p:cNvSpPr>
@@ -624,7 +625,7 @@
       </p:sp>
       <p:sp>
         <p:nvSpPr>
-          <p:cNvPr id="631229081" name="Slide Number Placeholder 3"/>
+          <p:cNvPr id="1710733592" name="Slide Number Placeholder 3"/>
           <p:cNvSpPr>
             <a:spLocks noGrp="1"/>
           </p:cNvSpPr>
@@ -675,7 +676,7 @@
       </p:grpSpPr>
       <p:sp>
         <p:nvSpPr>
-          <p:cNvPr id="190872768" name="Slide Image Placeholder 1"/>
+          <p:cNvPr id="913914546" name="Slide Image Placeholder 1"/>
           <p:cNvSpPr>
             <a:spLocks noChangeAspect="1" noGrp="1" noRot="1"/>
           </p:cNvSpPr>
@@ -687,7 +688,7 @@
       </p:sp>
       <p:sp>
         <p:nvSpPr>
-          <p:cNvPr id="729317970" name="Notes Placeholder 2"/>
+          <p:cNvPr id="150553972" name="Notes Placeholder 2"/>
           <p:cNvSpPr>
             <a:spLocks noGrp="1"/>
           </p:cNvSpPr>
@@ -709,7 +710,7 @@
       </p:sp>
       <p:sp>
         <p:nvSpPr>
-          <p:cNvPr id="379107688" name="Slide Number Placeholder 3"/>
+          <p:cNvPr id="986240644" name="Slide Number Placeholder 3"/>
           <p:cNvSpPr>
             <a:spLocks noGrp="1"/>
           </p:cNvSpPr>
@@ -725,9 +726,9 @@
             <a:pPr>
               <a:defRPr/>
             </a:pPr>
-            <a:fld id="{F7021451-1387-4CA6-816F-3879F97B5CBC}" type="slidenum">
+            <a:fld id="{0208E325-F849-A203-B3CC-E685AAE7F131}" type="slidenum">
               <a:rPr lang="en-US"/>
-              <a:t>3</a:t>
+              <a:t/>
             </a:fld>
             <a:endParaRPr lang="en-US"/>
           </a:p>
@@ -760,7 +761,7 @@
       </p:grpSpPr>
       <p:sp>
         <p:nvSpPr>
-          <p:cNvPr id="16220760" name="Slide Image Placeholder 1"/>
+          <p:cNvPr id="823901342" name="Slide Image Placeholder 1"/>
           <p:cNvSpPr>
             <a:spLocks noChangeAspect="1" noGrp="1" noRot="1"/>
           </p:cNvSpPr>
@@ -772,7 +773,7 @@
       </p:sp>
       <p:sp>
         <p:nvSpPr>
-          <p:cNvPr id="467453163" name="Notes Placeholder 2"/>
+          <p:cNvPr id="254303073" name="Notes Placeholder 2"/>
           <p:cNvSpPr>
             <a:spLocks noGrp="1"/>
           </p:cNvSpPr>
@@ -794,7 +795,7 @@
       </p:sp>
       <p:sp>
         <p:nvSpPr>
-          <p:cNvPr id="1838053952" name="Slide Number Placeholder 3"/>
+          <p:cNvPr id="1533954933" name="Slide Number Placeholder 3"/>
           <p:cNvSpPr>
             <a:spLocks noGrp="1"/>
           </p:cNvSpPr>
@@ -812,7 +813,7 @@
             </a:pPr>
             <a:fld id="{F7021451-1387-4CA6-816F-3879F97B5CBC}" type="slidenum">
               <a:rPr lang="en-US"/>
-              <a:t>4</a:t>
+              <a:t>3</a:t>
             </a:fld>
             <a:endParaRPr lang="en-US"/>
           </a:p>
@@ -845,7 +846,7 @@
       </p:grpSpPr>
       <p:sp>
         <p:nvSpPr>
-          <p:cNvPr id="1278989252" name="Slide Image Placeholder 1"/>
+          <p:cNvPr id="1382127910" name="Slide Image Placeholder 1"/>
           <p:cNvSpPr>
             <a:spLocks noChangeAspect="1" noGrp="1" noRot="1"/>
           </p:cNvSpPr>
@@ -857,7 +858,7 @@
       </p:sp>
       <p:sp>
         <p:nvSpPr>
-          <p:cNvPr id="1879619462" name="Notes Placeholder 2"/>
+          <p:cNvPr id="378618496" name="Notes Placeholder 2"/>
           <p:cNvSpPr>
             <a:spLocks noGrp="1"/>
           </p:cNvSpPr>
@@ -879,7 +880,7 @@
       </p:sp>
       <p:sp>
         <p:nvSpPr>
-          <p:cNvPr id="2109855585" name="Slide Number Placeholder 3"/>
+          <p:cNvPr id="1720256454" name="Slide Number Placeholder 3"/>
           <p:cNvSpPr>
             <a:spLocks noGrp="1"/>
           </p:cNvSpPr>
@@ -897,7 +898,7 @@
             </a:pPr>
             <a:fld id="{F7021451-1387-4CA6-816F-3879F97B5CBC}" type="slidenum">
               <a:rPr lang="en-US"/>
-              <a:t>5</a:t>
+              <a:t>4</a:t>
             </a:fld>
             <a:endParaRPr lang="en-US"/>
           </a:p>
@@ -930,7 +931,7 @@
       </p:grpSpPr>
       <p:sp>
         <p:nvSpPr>
-          <p:cNvPr id="1395468940" name="Slide Image Placeholder 1"/>
+          <p:cNvPr id="471144540" name="Slide Image Placeholder 1"/>
           <p:cNvSpPr>
             <a:spLocks noChangeAspect="1" noGrp="1" noRot="1"/>
           </p:cNvSpPr>
@@ -942,7 +943,7 @@
       </p:sp>
       <p:sp>
         <p:nvSpPr>
-          <p:cNvPr id="1214058414" name="Notes Placeholder 2"/>
+          <p:cNvPr id="1774637530" name="Notes Placeholder 2"/>
           <p:cNvSpPr>
             <a:spLocks noGrp="1"/>
           </p:cNvSpPr>
@@ -964,7 +965,92 @@
       </p:sp>
       <p:sp>
         <p:nvSpPr>
-          <p:cNvPr id="283981755" name="Slide Number Placeholder 3"/>
+          <p:cNvPr id="450048312" name="Slide Number Placeholder 3"/>
+          <p:cNvSpPr>
+            <a:spLocks noGrp="1"/>
+          </p:cNvSpPr>
+          <p:nvPr>
+            <p:ph type="sldNum" sz="quarter" idx="10"/>
+          </p:nvPr>
+        </p:nvSpPr>
+        <p:spPr bwMode="auto"/>
+        <p:txBody>
+          <a:bodyPr/>
+          <a:lstStyle/>
+          <a:p>
+            <a:pPr>
+              <a:defRPr/>
+            </a:pPr>
+            <a:fld id="{F7021451-1387-4CA6-816F-3879F97B5CBC}" type="slidenum">
+              <a:rPr lang="en-US"/>
+              <a:t>5</a:t>
+            </a:fld>
+            <a:endParaRPr lang="en-US"/>
+          </a:p>
+        </p:txBody>
+      </p:sp>
+    </p:spTree>
+  </p:cSld>
+  <p:clrMapOvr>
+    <a:masterClrMapping/>
+  </p:clrMapOvr>
+</p:notes>
+</file>
+
+<file path=ppt/notesSlides/notesSlide7.xml><?xml version="1.0" encoding="utf-8"?>
+<p:notes xmlns:a="http://schemas.openxmlformats.org/drawingml/2006/main" xmlns:r="http://schemas.openxmlformats.org/officeDocument/2006/relationships" xmlns:p="http://schemas.openxmlformats.org/presentationml/2006/main" xmlns:m="http://schemas.openxmlformats.org/officeDocument/2006/math" xmlns:w="http://schemas.openxmlformats.org/wordprocessingml/2006/main">
+  <p:cSld name="">
+    <p:spTree>
+      <p:nvGrpSpPr>
+        <p:cNvPr id="1" name=""/>
+        <p:cNvGrpSpPr/>
+        <p:nvPr/>
+      </p:nvGrpSpPr>
+      <p:grpSpPr bwMode="auto">
+        <a:xfrm>
+          <a:off x="0" y="0"/>
+          <a:ext cx="0" cy="0"/>
+          <a:chOff x="0" y="0"/>
+          <a:chExt cx="0" cy="0"/>
+        </a:xfrm>
+      </p:grpSpPr>
+      <p:sp>
+        <p:nvSpPr>
+          <p:cNvPr id="956223476" name="Slide Image Placeholder 1"/>
+          <p:cNvSpPr>
+            <a:spLocks noChangeAspect="1" noGrp="1" noRot="1"/>
+          </p:cNvSpPr>
+          <p:nvPr>
+            <p:ph type="sldImg"/>
+          </p:nvPr>
+        </p:nvSpPr>
+        <p:spPr bwMode="auto"/>
+      </p:sp>
+      <p:sp>
+        <p:nvSpPr>
+          <p:cNvPr id="1490220466" name="Notes Placeholder 2"/>
+          <p:cNvSpPr>
+            <a:spLocks noGrp="1"/>
+          </p:cNvSpPr>
+          <p:nvPr>
+            <p:ph type="body" idx="1"/>
+          </p:nvPr>
+        </p:nvSpPr>
+        <p:spPr bwMode="auto"/>
+        <p:txBody>
+          <a:bodyPr/>
+          <a:lstStyle/>
+          <a:p>
+            <a:pPr>
+              <a:defRPr/>
+            </a:pPr>
+            <a:endParaRPr lang="en-US"/>
+          </a:p>
+        </p:txBody>
+      </p:sp>
+      <p:sp>
+        <p:nvSpPr>
+          <p:cNvPr id="1576511787" name="Slide Number Placeholder 3"/>
           <p:cNvSpPr>
             <a:spLocks noGrp="1"/>
           </p:cNvSpPr>
@@ -1329,7 +1415,7 @@
       </p:grpSpPr>
       <p:sp>
         <p:nvSpPr>
-          <p:cNvPr id="1995395096" name="Shape 0"/>
+          <p:cNvPr id="234288150" name="Shape 0"/>
           <p:cNvSpPr/>
           <p:nvPr/>
         </p:nvSpPr>
@@ -1354,7 +1440,7 @@
       </p:sp>
       <p:sp>
         <p:nvSpPr>
-          <p:cNvPr id="1355487742" name="Shape 1"/>
+          <p:cNvPr id="1394982540" name="Shape 1"/>
           <p:cNvSpPr/>
           <p:nvPr/>
         </p:nvSpPr>
@@ -1383,7 +1469,7 @@
       </p:sp>
       <p:sp>
         <p:nvSpPr>
-          <p:cNvPr id="1046387333" name="Shape 2"/>
+          <p:cNvPr id="1430118997" name="Shape 2"/>
           <p:cNvSpPr/>
           <p:nvPr/>
         </p:nvSpPr>
@@ -1412,7 +1498,7 @@
       </p:sp>
       <p:sp>
         <p:nvSpPr>
-          <p:cNvPr id="790583076" name="Shape 3"/>
+          <p:cNvPr id="236952931" name="Shape 3"/>
           <p:cNvSpPr/>
           <p:nvPr/>
         </p:nvSpPr>
@@ -1441,7 +1527,7 @@
       </p:sp>
       <p:sp>
         <p:nvSpPr>
-          <p:cNvPr id="1014509800" name="Shape 4"/>
+          <p:cNvPr id="1154440211" name="Shape 4"/>
           <p:cNvSpPr/>
           <p:nvPr/>
         </p:nvSpPr>
@@ -1470,7 +1556,7 @@
       </p:sp>
       <p:sp>
         <p:nvSpPr>
-          <p:cNvPr id="322171524" name="Shape 5"/>
+          <p:cNvPr id="1401523307" name="Shape 5"/>
           <p:cNvSpPr/>
           <p:nvPr/>
         </p:nvSpPr>
@@ -1499,7 +1585,7 @@
       </p:sp>
       <p:sp>
         <p:nvSpPr>
-          <p:cNvPr id="1242567" name="Text 6"/>
+          <p:cNvPr id="1134455330" name="Text 6"/>
           <p:cNvSpPr/>
           <p:nvPr/>
         </p:nvSpPr>
@@ -1539,7 +1625,7 @@
       </p:sp>
       <p:sp>
         <p:nvSpPr>
-          <p:cNvPr id="1788750679" name="Text 7"/>
+          <p:cNvPr id="661528179" name="Text 7"/>
           <p:cNvSpPr/>
           <p:nvPr/>
         </p:nvSpPr>
@@ -1579,7 +1665,7 @@
       </p:sp>
       <p:sp>
         <p:nvSpPr>
-          <p:cNvPr id="678774873" name="Shape 8"/>
+          <p:cNvPr id="345429569" name="Shape 8"/>
           <p:cNvSpPr/>
           <p:nvPr/>
         </p:nvSpPr>
@@ -1604,7 +1690,7 @@
       </p:sp>
       <p:sp>
         <p:nvSpPr>
-          <p:cNvPr id="1875925878" name="Text 9"/>
+          <p:cNvPr id="1747951600" name="Text 9"/>
           <p:cNvSpPr/>
           <p:nvPr/>
         </p:nvSpPr>
@@ -1684,7 +1770,7 @@
       </p:grpSpPr>
       <p:sp>
         <p:nvSpPr>
-          <p:cNvPr id="773521833" name="Shape 0"/>
+          <p:cNvPr id="1040768499" name="Shape 0"/>
           <p:cNvSpPr/>
           <p:nvPr/>
         </p:nvSpPr>
@@ -1709,7 +1795,617 @@
       </p:sp>
       <p:sp>
         <p:nvSpPr>
-          <p:cNvPr id="1039953068" name="Text 1"/>
+          <p:cNvPr id="1370287643" name="Text 1"/>
+          <p:cNvSpPr/>
+          <p:nvPr/>
+        </p:nvSpPr>
+        <p:spPr bwMode="auto">
+          <a:xfrm>
+            <a:off x="365760" y="0"/>
+            <a:ext cx="8229600" cy="685800"/>
+          </a:xfrm>
+          <a:prstGeom prst="rect">
+            <a:avLst/>
+          </a:prstGeom>
+          <a:noFill/>
+          <a:ln/>
+        </p:spPr>
+        <p:txBody>
+          <a:bodyPr wrap="square" lIns="0" tIns="0" rIns="0" bIns="0" rtlCol="0" anchor="ctr"/>
+          <a:lstStyle/>
+          <a:p>
+            <a:pPr marL="0" indent="0">
+              <a:buNone/>
+              <a:defRPr/>
+            </a:pPr>
+            <a:r>
+              <a:rPr lang="de-DE" sz="2200" b="1">
+                <a:solidFill>
+                  <a:srgbClr val="FFFFFF"/>
+                </a:solidFill>
+                <a:latin typeface="Calibri"/>
+                <a:ea typeface="Calibri"/>
+                <a:cs typeface="Calibri"/>
+              </a:rPr>
+              <a:t>Project Idea</a:t>
+            </a:r>
+            <a:endParaRPr lang="en-US" sz="2200"/>
+          </a:p>
+        </p:txBody>
+      </p:sp>
+      <p:sp>
+        <p:nvSpPr>
+          <p:cNvPr id="314143106" name="Shape 2"/>
+          <p:cNvSpPr/>
+          <p:nvPr/>
+        </p:nvSpPr>
+        <p:spPr bwMode="auto">
+          <a:xfrm flipH="0" flipV="0">
+            <a:off x="206302" y="995774"/>
+            <a:ext cx="8731394" cy="770700"/>
+          </a:xfrm>
+          <a:prstGeom prst="flowChartAlternateProcess">
+            <a:avLst/>
+          </a:prstGeom>
+          <a:solidFill>
+            <a:srgbClr val="FFFFFF"/>
+          </a:solidFill>
+          <a:ln w="12700">
+            <a:solidFill>
+              <a:srgbClr val="CBD5E1"/>
+            </a:solidFill>
+            <a:prstDash val="solid"/>
+          </a:ln>
+          <a:effectLst>
+            <a:outerShdw blurRad="101600" dist="25400" dir="8100000" sx="100000" sy="100000" kx="0" ky="0" algn="bl" rotWithShape="0">
+              <a:srgbClr val="000000">
+                <a:alpha val="10000"/>
+              </a:srgbClr>
+            </a:outerShdw>
+          </a:effectLst>
+        </p:spPr>
+      </p:sp>
+      <p:sp>
+        <p:nvSpPr>
+          <p:cNvPr id="1330179577" name="Shape 2"/>
+          <p:cNvSpPr/>
+          <p:nvPr/>
+        </p:nvSpPr>
+        <p:spPr bwMode="auto">
+          <a:xfrm flipH="0" flipV="0">
+            <a:off x="206302" y="1901717"/>
+            <a:ext cx="8731394" cy="770700"/>
+          </a:xfrm>
+          <a:prstGeom prst="flowChartAlternateProcess">
+            <a:avLst/>
+          </a:prstGeom>
+          <a:solidFill>
+            <a:srgbClr val="FFFFFF"/>
+          </a:solidFill>
+          <a:ln w="12700">
+            <a:solidFill>
+              <a:srgbClr val="CBD5E1"/>
+            </a:solidFill>
+            <a:prstDash val="solid"/>
+          </a:ln>
+          <a:effectLst>
+            <a:outerShdw blurRad="101600" dist="25400" dir="8100000" sx="100000" sy="100000" kx="0" ky="0" algn="bl" rotWithShape="0">
+              <a:srgbClr val="000000">
+                <a:alpha val="10000"/>
+              </a:srgbClr>
+            </a:outerShdw>
+          </a:effectLst>
+        </p:spPr>
+      </p:sp>
+      <p:sp>
+        <p:nvSpPr>
+          <p:cNvPr id="1807577297" name="Shape 2"/>
+          <p:cNvSpPr/>
+          <p:nvPr/>
+        </p:nvSpPr>
+        <p:spPr bwMode="auto">
+          <a:xfrm flipH="0" flipV="0">
+            <a:off x="206302" y="2807661"/>
+            <a:ext cx="8731394" cy="770700"/>
+          </a:xfrm>
+          <a:prstGeom prst="flowChartAlternateProcess">
+            <a:avLst/>
+          </a:prstGeom>
+          <a:solidFill>
+            <a:srgbClr val="FFFFFF"/>
+          </a:solidFill>
+          <a:ln w="12700">
+            <a:solidFill>
+              <a:srgbClr val="CBD5E1"/>
+            </a:solidFill>
+            <a:prstDash val="solid"/>
+          </a:ln>
+          <a:effectLst>
+            <a:outerShdw blurRad="101600" dist="25400" dir="8100000" sx="100000" sy="100000" kx="0" ky="0" algn="bl" rotWithShape="0">
+              <a:srgbClr val="000000">
+                <a:alpha val="10000"/>
+              </a:srgbClr>
+            </a:outerShdw>
+          </a:effectLst>
+        </p:spPr>
+      </p:sp>
+      <p:sp>
+        <p:nvSpPr>
+          <p:cNvPr id="965875906" name="Shape 2"/>
+          <p:cNvSpPr/>
+          <p:nvPr/>
+        </p:nvSpPr>
+        <p:spPr bwMode="auto">
+          <a:xfrm flipH="0" flipV="0">
+            <a:off x="206302" y="3713604"/>
+            <a:ext cx="8731394" cy="770700"/>
+          </a:xfrm>
+          <a:prstGeom prst="flowChartAlternateProcess">
+            <a:avLst/>
+          </a:prstGeom>
+          <a:solidFill>
+            <a:srgbClr val="FFFFFF"/>
+          </a:solidFill>
+          <a:ln w="12700">
+            <a:solidFill>
+              <a:srgbClr val="CBD5E1"/>
+            </a:solidFill>
+            <a:prstDash val="solid"/>
+          </a:ln>
+          <a:effectLst>
+            <a:outerShdw blurRad="101600" dist="25400" dir="8100000" sx="100000" sy="100000" kx="0" ky="0" algn="bl" rotWithShape="0">
+              <a:srgbClr val="000000">
+                <a:alpha val="10000"/>
+              </a:srgbClr>
+            </a:outerShdw>
+          </a:effectLst>
+        </p:spPr>
+      </p:sp>
+      <p:sp modelId="{A8BC8CD6-8738-41EA-9E71-3CD4C9AF2582}">
+        <p:nvSpPr>
+          <p:cNvPr id="628477612" name=""/>
+          <p:cNvSpPr/>
+          <p:nvPr/>
+        </p:nvSpPr>
+        <p:spPr bwMode="auto">
+          <a:xfrm>
+            <a:off x="345747" y="1039317"/>
+            <a:ext cx="683613" cy="683613"/>
+          </a:xfrm>
+          <a:prstGeom prst="rect">
+            <a:avLst/>
+          </a:prstGeom>
+          <a:blipFill rotWithShape="1">
+            <a:blip r:embed="rId3"/>
+            <a:stretch/>
+          </a:blipFill>
+          <a:ln w="19050" cap="flat" cmpd="sng" algn="ctr">
+            <a:solidFill>
+              <a:schemeClr val="lt1">
+                <a:hueOff val="0"/>
+                <a:satOff val="0"/>
+                <a:lumOff val="0"/>
+                <a:alphaOff val="0"/>
+              </a:schemeClr>
+            </a:solidFill>
+            <a:prstDash val="solid"/>
+            <a:miter lim="800000"/>
+          </a:ln>
+          <a:effectLst/>
+        </p:spPr>
+        <p:style>
+          <a:lnRef idx="2">
+            <a:srgbClr val="000000"/>
+          </a:lnRef>
+          <a:fillRef idx="1">
+            <a:srgbClr val="000000"/>
+          </a:fillRef>
+          <a:effectRef idx="0">
+            <a:srgbClr val="000000"/>
+          </a:effectRef>
+          <a:fontRef idx="minor">
+            <a:schemeClr val="lt1"/>
+          </a:fontRef>
+        </p:style>
+      </p:sp>
+      <p:sp modelId="{B63312C8-A8E7-471C-BDC7-E288FC589C93}">
+        <p:nvSpPr>
+          <p:cNvPr id="1795990470" name=""/>
+          <p:cNvSpPr/>
+          <p:nvPr/>
+        </p:nvSpPr>
+        <p:spPr bwMode="auto">
+          <a:xfrm>
+            <a:off x="345747" y="1945261"/>
+            <a:ext cx="683613" cy="683613"/>
+          </a:xfrm>
+          <a:prstGeom prst="rect">
+            <a:avLst/>
+          </a:prstGeom>
+          <a:blipFill rotWithShape="1">
+            <a:blip r:embed="rId4"/>
+            <a:stretch/>
+          </a:blipFill>
+          <a:ln w="19050" cap="flat" cmpd="sng" algn="ctr">
+            <a:solidFill>
+              <a:schemeClr val="lt1">
+                <a:hueOff val="0"/>
+                <a:satOff val="0"/>
+                <a:lumOff val="0"/>
+                <a:alphaOff val="0"/>
+              </a:schemeClr>
+            </a:solidFill>
+            <a:prstDash val="solid"/>
+            <a:miter lim="800000"/>
+          </a:ln>
+          <a:effectLst/>
+        </p:spPr>
+        <p:style>
+          <a:lnRef idx="2">
+            <a:srgbClr val="000000"/>
+          </a:lnRef>
+          <a:fillRef idx="1">
+            <a:srgbClr val="000000"/>
+          </a:fillRef>
+          <a:effectRef idx="0">
+            <a:srgbClr val="000000"/>
+          </a:effectRef>
+          <a:fontRef idx="minor">
+            <a:schemeClr val="lt1"/>
+          </a:fontRef>
+        </p:style>
+      </p:sp>
+      <p:sp modelId="{CA7E8371-02DB-4E6B-BDD4-4E6725844AB0}">
+        <p:nvSpPr>
+          <p:cNvPr id="6785565" name=""/>
+          <p:cNvSpPr/>
+          <p:nvPr/>
+        </p:nvSpPr>
+        <p:spPr bwMode="auto">
+          <a:xfrm>
+            <a:off x="345747" y="2851204"/>
+            <a:ext cx="683613" cy="683613"/>
+          </a:xfrm>
+          <a:prstGeom prst="rect">
+            <a:avLst/>
+          </a:prstGeom>
+          <a:blipFill rotWithShape="1">
+            <a:blip r:embed="rId5"/>
+            <a:stretch/>
+          </a:blipFill>
+          <a:ln w="19050" cap="flat" cmpd="sng" algn="ctr">
+            <a:solidFill>
+              <a:schemeClr val="lt1">
+                <a:hueOff val="0"/>
+                <a:satOff val="0"/>
+                <a:lumOff val="0"/>
+                <a:alphaOff val="0"/>
+              </a:schemeClr>
+            </a:solidFill>
+            <a:prstDash val="solid"/>
+            <a:miter lim="800000"/>
+          </a:ln>
+          <a:effectLst/>
+        </p:spPr>
+        <p:style>
+          <a:lnRef idx="2">
+            <a:srgbClr val="000000"/>
+          </a:lnRef>
+          <a:fillRef idx="1">
+            <a:srgbClr val="000000"/>
+          </a:fillRef>
+          <a:effectRef idx="0">
+            <a:srgbClr val="000000"/>
+          </a:effectRef>
+          <a:fontRef idx="minor">
+            <a:schemeClr val="lt1"/>
+          </a:fontRef>
+        </p:style>
+      </p:sp>
+      <p:sp modelId="{CA7E8371-02DB-4E6B-BDD4-4E6725844AB0}">
+        <p:nvSpPr>
+          <p:cNvPr id="181678663" name=""/>
+          <p:cNvSpPr/>
+          <p:nvPr/>
+        </p:nvSpPr>
+        <p:spPr bwMode="auto">
+          <a:xfrm>
+            <a:off x="345747" y="3757147"/>
+            <a:ext cx="683613" cy="683613"/>
+          </a:xfrm>
+          <a:prstGeom prst="rect">
+            <a:avLst/>
+          </a:prstGeom>
+          <a:blipFill rotWithShape="1">
+            <a:blip r:embed="rId6"/>
+            <a:stretch/>
+          </a:blipFill>
+          <a:ln w="19050" cap="flat" cmpd="sng" algn="ctr">
+            <a:noFill/>
+            <a:prstDash val="solid"/>
+            <a:miter lim="800000"/>
+          </a:ln>
+          <a:effectLst/>
+        </p:spPr>
+        <p:style>
+          <a:lnRef idx="2">
+            <a:srgbClr val="000000"/>
+          </a:lnRef>
+          <a:fillRef idx="1">
+            <a:srgbClr val="000000"/>
+          </a:fillRef>
+          <a:effectRef idx="0">
+            <a:srgbClr val="000000"/>
+          </a:effectRef>
+          <a:fontRef idx="minor">
+            <a:schemeClr val="lt1"/>
+          </a:fontRef>
+        </p:style>
+        <p:txBody>
+          <a:bodyPr anchor="ctr"/>
+          <a:p>
+            <a:pPr algn="ctr">
+              <a:defRPr/>
+            </a:pPr>
+            <a:endParaRPr/>
+          </a:p>
+        </p:txBody>
+      </p:sp>
+      <p:sp>
+        <p:nvSpPr>
+          <p:cNvPr id="1792004691" name=""/>
+          <p:cNvSpPr txBox="1"/>
+          <p:nvPr/>
+        </p:nvSpPr>
+        <p:spPr bwMode="auto">
+          <a:xfrm rot="0" flipH="0" flipV="0">
+            <a:off x="1029361" y="1198244"/>
+            <a:ext cx="7567077" cy="366119"/>
+          </a:xfrm>
+          <a:prstGeom prst="rect">
+            <a:avLst/>
+          </a:prstGeom>
+          <a:noFill/>
+        </p:spPr>
+        <p:txBody>
+          <a:bodyPr vertOverflow="overflow" horzOverflow="overflow" vert="horz" wrap="square" lIns="91440" tIns="45720" rIns="91440" bIns="45720" numCol="1" spcCol="0" rtlCol="0" fromWordArt="0" anchor="t" anchorCtr="0" forceAA="0" upright="0" compatLnSpc="0">
+            <a:spAutoFit/>
+          </a:bodyPr>
+          <a:p>
+            <a:pPr marL="0" lvl="0" indent="0" algn="l" defTabSz="1111249">
+              <a:lnSpc>
+                <a:spcPct val="100000"/>
+              </a:lnSpc>
+              <a:spcBef>
+                <a:spcPts val="0"/>
+              </a:spcBef>
+              <a:spcAft>
+                <a:spcPts val="0"/>
+              </a:spcAft>
+              <a:buNone/>
+              <a:defRPr/>
+            </a:pPr>
+            <a:r>
+              <a:rPr lang="de-DE" sz="1800" b="0" i="0" u="none" strike="noStrike" cap="none" spc="0">
+                <a:solidFill>
+                  <a:schemeClr val="tx1"/>
+                </a:solidFill>
+                <a:latin typeface="+mn-lt"/>
+                <a:ea typeface="+mn-ea"/>
+                <a:cs typeface="+mn-cs"/>
+              </a:rPr>
+              <a:t>Task Management Web Service</a:t>
+            </a:r>
+            <a:endParaRPr sz="1800"/>
+          </a:p>
+        </p:txBody>
+      </p:sp>
+      <p:sp>
+        <p:nvSpPr>
+          <p:cNvPr id="999297325" name=""/>
+          <p:cNvSpPr txBox="1"/>
+          <p:nvPr/>
+        </p:nvSpPr>
+        <p:spPr bwMode="auto">
+          <a:xfrm rot="0" flipH="0" flipV="0">
+            <a:off x="1029361" y="2104008"/>
+            <a:ext cx="7567077" cy="366119"/>
+          </a:xfrm>
+          <a:prstGeom prst="rect">
+            <a:avLst/>
+          </a:prstGeom>
+          <a:noFill/>
+        </p:spPr>
+        <p:txBody>
+          <a:bodyPr vertOverflow="overflow" horzOverflow="overflow" vert="horz" wrap="square" lIns="91440" tIns="45720" rIns="91440" bIns="45720" numCol="1" spcCol="0" rtlCol="0" fromWordArt="0" anchor="t" anchorCtr="0" forceAA="0" upright="0" compatLnSpc="0">
+            <a:spAutoFit/>
+          </a:bodyPr>
+          <a:p>
+            <a:pPr marL="0" lvl="0" indent="0" algn="l" defTabSz="1111249">
+              <a:lnSpc>
+                <a:spcPct val="100000"/>
+              </a:lnSpc>
+              <a:spcBef>
+                <a:spcPts val="0"/>
+              </a:spcBef>
+              <a:spcAft>
+                <a:spcPts val="0"/>
+              </a:spcAft>
+              <a:buNone/>
+              <a:defRPr/>
+            </a:pPr>
+            <a:r>
+              <a:rPr lang="de-DE" sz="1800" b="0" i="0" u="none" strike="noStrike" cap="none" spc="0">
+                <a:solidFill>
+                  <a:schemeClr val="tx1"/>
+                </a:solidFill>
+                <a:latin typeface="+mn-lt"/>
+                <a:ea typeface="+mn-ea"/>
+                <a:cs typeface="+mn-cs"/>
+              </a:rPr>
+              <a:t>Simple, scalable, role-based system</a:t>
+            </a:r>
+            <a:endParaRPr sz="1800"/>
+          </a:p>
+        </p:txBody>
+      </p:sp>
+      <p:sp>
+        <p:nvSpPr>
+          <p:cNvPr id="1835559148" name=""/>
+          <p:cNvSpPr txBox="1"/>
+          <p:nvPr/>
+        </p:nvSpPr>
+        <p:spPr bwMode="auto">
+          <a:xfrm rot="0" flipH="0" flipV="0">
+            <a:off x="1029361" y="3009951"/>
+            <a:ext cx="7567077" cy="366119"/>
+          </a:xfrm>
+          <a:prstGeom prst="rect">
+            <a:avLst/>
+          </a:prstGeom>
+          <a:noFill/>
+        </p:spPr>
+        <p:txBody>
+          <a:bodyPr vertOverflow="overflow" horzOverflow="overflow" vert="horz" wrap="square" lIns="91440" tIns="45720" rIns="91440" bIns="45720" numCol="1" spcCol="0" rtlCol="0" fromWordArt="0" anchor="t" anchorCtr="0" forceAA="0" upright="0" compatLnSpc="0">
+            <a:spAutoFit/>
+          </a:bodyPr>
+          <a:p>
+            <a:pPr marL="0" lvl="0" indent="0" algn="l" defTabSz="1111249">
+              <a:lnSpc>
+                <a:spcPct val="100000"/>
+              </a:lnSpc>
+              <a:spcBef>
+                <a:spcPts val="0"/>
+              </a:spcBef>
+              <a:spcAft>
+                <a:spcPts val="0"/>
+              </a:spcAft>
+              <a:buNone/>
+              <a:defRPr/>
+            </a:pPr>
+            <a:r>
+              <a:rPr lang="de-DE" sz="1800" b="0" i="0" u="none" strike="noStrike" cap="none" spc="0">
+                <a:solidFill>
+                  <a:schemeClr val="tx1"/>
+                </a:solidFill>
+                <a:latin typeface="+mn-lt"/>
+                <a:ea typeface="+mn-ea"/>
+                <a:cs typeface="+mn-cs"/>
+              </a:rPr>
+              <a:t>Designed for teams &amp; project collaboration</a:t>
+            </a:r>
+            <a:endParaRPr sz="1800"/>
+          </a:p>
+        </p:txBody>
+      </p:sp>
+      <p:sp>
+        <p:nvSpPr>
+          <p:cNvPr id="2134761818" name=""/>
+          <p:cNvSpPr txBox="1"/>
+          <p:nvPr/>
+        </p:nvSpPr>
+        <p:spPr bwMode="auto">
+          <a:xfrm rot="0" flipH="0" flipV="0">
+            <a:off x="1028282" y="3915894"/>
+            <a:ext cx="7568876" cy="366119"/>
+          </a:xfrm>
+          <a:prstGeom prst="rect">
+            <a:avLst/>
+          </a:prstGeom>
+          <a:noFill/>
+        </p:spPr>
+        <p:txBody>
+          <a:bodyPr vertOverflow="overflow" horzOverflow="overflow" vert="horz" wrap="square" lIns="91440" tIns="45720" rIns="91440" bIns="45720" numCol="1" spcCol="0" rtlCol="0" fromWordArt="0" anchor="t" anchorCtr="0" forceAA="0" upright="0" compatLnSpc="0">
+            <a:spAutoFit/>
+          </a:bodyPr>
+          <a:p>
+            <a:pPr marL="0" indent="0" algn="l">
+              <a:buNone/>
+              <a:defRPr/>
+            </a:pPr>
+            <a:r>
+              <a:rPr lang="de-DE">
+                <a:solidFill>
+                  <a:srgbClr val="0F172A"/>
+                </a:solidFill>
+                <a:latin typeface="Calibri"/>
+                <a:ea typeface="Calibri"/>
+                <a:cs typeface="Calibri"/>
+              </a:rPr>
+              <a:t>AI Assistant for task organization</a:t>
+            </a:r>
+            <a:endParaRPr lang="en-US" sz="1000"/>
+          </a:p>
+        </p:txBody>
+      </p:sp>
+    </p:spTree>
+  </p:cSld>
+  <p:clrMapOvr>
+    <a:masterClrMapping/>
+  </p:clrMapOvr>
+  <mc:AlternateContent xmlns:mc="http://schemas.openxmlformats.org/markup-compatibility/2006">
+    <mc:Choice xmlns:p159="http://schemas.microsoft.com/office/powerpoint/2015/09/main" xmlns:p14="http://schemas.microsoft.com/office/powerpoint/2010/main" Requires="p159">
+      <p:transition p14:dur="500" advClick="1"/>
+    </mc:Choice>
+    <mc:Fallback>
+      <p:transition advClick="1"/>
+    </mc:Fallback>
+  </mc:AlternateContent>
+</p:sld>
+</file>
+
+<file path=ppt/slides/slide3.xml><?xml version="1.0" encoding="utf-8"?>
+<p:sld xmlns:a="http://schemas.openxmlformats.org/drawingml/2006/main" xmlns:r="http://schemas.openxmlformats.org/officeDocument/2006/relationships" xmlns:p="http://schemas.openxmlformats.org/presentationml/2006/main" xmlns:m="http://schemas.openxmlformats.org/officeDocument/2006/math" xmlns:w="http://schemas.openxmlformats.org/wordprocessingml/2006/main" xmlns:mc="http://schemas.openxmlformats.org/markup-compatibility/2006" showMasterPhAnim="0" showMasterSp="1" show="1">
+  <p:cSld name="Slide 2">
+    <p:bg>
+      <p:bgPr shadeToTitle="0">
+        <a:solidFill>
+          <a:srgbClr val="F8FAFC"/>
+        </a:solidFill>
+      </p:bgPr>
+    </p:bg>
+    <p:spTree>
+      <p:nvGrpSpPr>
+        <p:cNvPr id="1" name=""/>
+        <p:cNvGrpSpPr/>
+        <p:nvPr/>
+      </p:nvGrpSpPr>
+      <p:grpSpPr bwMode="auto">
+        <a:xfrm>
+          <a:off x="0" y="0"/>
+          <a:ext cx="0" cy="0"/>
+          <a:chOff x="0" y="0"/>
+          <a:chExt cx="0" cy="0"/>
+        </a:xfrm>
+      </p:grpSpPr>
+      <p:sp>
+        <p:nvSpPr>
+          <p:cNvPr id="492043432" name="Shape 0"/>
+          <p:cNvSpPr/>
+          <p:nvPr/>
+        </p:nvSpPr>
+        <p:spPr bwMode="auto">
+          <a:xfrm>
+            <a:off x="0" y="0"/>
+            <a:ext cx="9144000" cy="685800"/>
+          </a:xfrm>
+          <a:prstGeom prst="rect">
+            <a:avLst/>
+          </a:prstGeom>
+          <a:solidFill>
+            <a:srgbClr val="1A2B4A"/>
+          </a:solidFill>
+          <a:ln w="12700">
+            <a:solidFill>
+              <a:srgbClr val="1A2B4A"/>
+            </a:solidFill>
+            <a:prstDash val="solid"/>
+          </a:ln>
+        </p:spPr>
+      </p:sp>
+      <p:sp>
+        <p:nvSpPr>
+          <p:cNvPr id="545340689" name="Text 1"/>
           <p:cNvSpPr/>
           <p:nvPr/>
         </p:nvSpPr>
@@ -1749,14 +2445,14 @@
       </p:sp>
       <p:sp>
         <p:nvSpPr>
-          <p:cNvPr id="1501256739" name="Shape 2"/>
+          <p:cNvPr id="570389632" name="Shape 2"/>
           <p:cNvSpPr/>
           <p:nvPr/>
         </p:nvSpPr>
         <p:spPr bwMode="auto">
           <a:xfrm>
             <a:off x="274320" y="822960"/>
-            <a:ext cx="2834640" cy="4114800"/>
+            <a:ext cx="2834639" cy="4114800"/>
           </a:xfrm>
           <a:prstGeom prst="rect">
             <a:avLst/>
@@ -1781,14 +2477,14 @@
       </p:sp>
       <p:sp>
         <p:nvSpPr>
-          <p:cNvPr id="1046645549" name="Shape 3"/>
+          <p:cNvPr id="774430872" name="Shape 3"/>
           <p:cNvSpPr/>
           <p:nvPr/>
         </p:nvSpPr>
         <p:spPr bwMode="auto">
           <a:xfrm>
             <a:off x="274320" y="822960"/>
-            <a:ext cx="2834640" cy="502920"/>
+            <a:ext cx="2834639" cy="502920"/>
           </a:xfrm>
           <a:prstGeom prst="rect">
             <a:avLst/>
@@ -1806,7 +2502,7 @@
       </p:sp>
       <p:sp>
         <p:nvSpPr>
-          <p:cNvPr id="537250111" name="Shape 4"/>
+          <p:cNvPr id="1621276531" name="Shape 4"/>
           <p:cNvSpPr/>
           <p:nvPr/>
         </p:nvSpPr>
@@ -1831,7 +2527,7 @@
       </p:sp>
       <p:pic>
         <p:nvPicPr>
-          <p:cNvPr id="1960152050" name="Image 0" descr="preencoded.png"/>
+          <p:cNvPr id="1692371210" name="Image 0" descr="preencoded.png"/>
           <p:cNvPicPr>
             <a:picLocks noChangeAspect="1"/>
           </p:cNvPicPr>
@@ -1853,14 +2549,14 @@
       </p:pic>
       <p:sp>
         <p:nvSpPr>
-          <p:cNvPr id="724580646" name="Text 5"/>
+          <p:cNvPr id="1389862890" name="Text 5"/>
           <p:cNvSpPr/>
           <p:nvPr/>
         </p:nvSpPr>
         <p:spPr bwMode="auto">
           <a:xfrm>
             <a:off x="274320" y="1691640"/>
-            <a:ext cx="2834640" cy="365760"/>
+            <a:ext cx="2834639" cy="365760"/>
           </a:xfrm>
           <a:prstGeom prst="rect">
             <a:avLst/>
@@ -1893,13 +2589,13 @@
       </p:sp>
       <p:sp>
         <p:nvSpPr>
-          <p:cNvPr id="974777039" name="Text 6"/>
+          <p:cNvPr id="1142479438" name="Text 6"/>
           <p:cNvSpPr/>
           <p:nvPr/>
         </p:nvSpPr>
         <p:spPr bwMode="auto">
           <a:xfrm>
-            <a:off x="411480" y="1966361"/>
+            <a:off x="411480" y="1966360"/>
             <a:ext cx="2560320" cy="594360"/>
           </a:xfrm>
           <a:prstGeom prst="rect">
@@ -1944,13 +2640,13 @@
       </p:sp>
       <p:sp>
         <p:nvSpPr>
-          <p:cNvPr id="889153737" name="Shape 7"/>
+          <p:cNvPr id="1119947555" name="Shape 7"/>
           <p:cNvSpPr/>
           <p:nvPr/>
         </p:nvSpPr>
         <p:spPr bwMode="auto">
           <a:xfrm>
-            <a:off x="640080" y="2517071"/>
+            <a:off x="640080" y="2517070"/>
             <a:ext cx="2103120" cy="18288"/>
           </a:xfrm>
           <a:prstGeom prst="rect">
@@ -1969,13 +2665,13 @@
       </p:sp>
       <p:sp>
         <p:nvSpPr>
-          <p:cNvPr id="1410850616" name="Shape 10"/>
+          <p:cNvPr id="429551329" name="Shape 10"/>
           <p:cNvSpPr/>
           <p:nvPr/>
         </p:nvSpPr>
         <p:spPr bwMode="auto">
           <a:xfrm>
-            <a:off x="457200" y="3057401"/>
+            <a:off x="457200" y="3057400"/>
             <a:ext cx="91440" cy="91440"/>
           </a:xfrm>
           <a:prstGeom prst="ellipse">
@@ -1994,13 +2690,13 @@
       </p:sp>
       <p:sp>
         <p:nvSpPr>
-          <p:cNvPr id="304062884" name="Text 11"/>
+          <p:cNvPr id="1066846694" name="Text 11"/>
           <p:cNvSpPr/>
           <p:nvPr/>
         </p:nvSpPr>
         <p:spPr bwMode="auto">
           <a:xfrm>
-            <a:off x="603504" y="2952245"/>
+            <a:off x="603504" y="2952244"/>
             <a:ext cx="2377440" cy="301752"/>
           </a:xfrm>
           <a:prstGeom prst="rect">
@@ -2056,13 +2752,13 @@
       </p:sp>
       <p:sp>
         <p:nvSpPr>
-          <p:cNvPr id="1482679345" name="Shape 12"/>
+          <p:cNvPr id="283878545" name="Shape 12"/>
           <p:cNvSpPr/>
           <p:nvPr/>
         </p:nvSpPr>
         <p:spPr bwMode="auto">
           <a:xfrm>
-            <a:off x="457200" y="3359153"/>
+            <a:off x="457200" y="3359152"/>
             <a:ext cx="91440" cy="91440"/>
           </a:xfrm>
           <a:prstGeom prst="ellipse">
@@ -2081,13 +2777,13 @@
       </p:sp>
       <p:sp>
         <p:nvSpPr>
-          <p:cNvPr id="262049778" name="Text 13"/>
+          <p:cNvPr id="1475171180" name="Text 13"/>
           <p:cNvSpPr/>
           <p:nvPr/>
         </p:nvSpPr>
         <p:spPr bwMode="auto">
           <a:xfrm>
-            <a:off x="603504" y="3253997"/>
+            <a:off x="603504" y="3253996"/>
             <a:ext cx="2377440" cy="301752"/>
           </a:xfrm>
           <a:prstGeom prst="rect">
@@ -2132,13 +2828,13 @@
       </p:sp>
       <p:sp>
         <p:nvSpPr>
-          <p:cNvPr id="1194048368" name="Shape 14"/>
+          <p:cNvPr id="1400621730" name="Shape 14"/>
           <p:cNvSpPr/>
           <p:nvPr/>
         </p:nvSpPr>
         <p:spPr bwMode="auto">
           <a:xfrm>
-            <a:off x="457200" y="3660905"/>
+            <a:off x="457200" y="3660904"/>
             <a:ext cx="91440" cy="91440"/>
           </a:xfrm>
           <a:prstGeom prst="ellipse">
@@ -2157,13 +2853,13 @@
       </p:sp>
       <p:sp>
         <p:nvSpPr>
-          <p:cNvPr id="2145265093" name="Text 15"/>
+          <p:cNvPr id="691526302" name="Text 15"/>
           <p:cNvSpPr/>
           <p:nvPr/>
         </p:nvSpPr>
         <p:spPr bwMode="auto">
           <a:xfrm>
-            <a:off x="603504" y="3555749"/>
+            <a:off x="603504" y="3555748"/>
             <a:ext cx="2377440" cy="301752"/>
           </a:xfrm>
           <a:prstGeom prst="rect">
@@ -2197,13 +2893,13 @@
       </p:sp>
       <p:sp>
         <p:nvSpPr>
-          <p:cNvPr id="1331334855" name="Shape 16"/>
+          <p:cNvPr id="779842672" name="Shape 16"/>
           <p:cNvSpPr/>
           <p:nvPr/>
         </p:nvSpPr>
         <p:spPr bwMode="auto">
           <a:xfrm>
-            <a:off x="457200" y="3962657"/>
+            <a:off x="457200" y="3962656"/>
             <a:ext cx="91440" cy="91440"/>
           </a:xfrm>
           <a:prstGeom prst="ellipse">
@@ -2222,13 +2918,13 @@
       </p:sp>
       <p:sp>
         <p:nvSpPr>
-          <p:cNvPr id="1046837355" name="Text 17"/>
+          <p:cNvPr id="1494165247" name="Text 17"/>
           <p:cNvSpPr/>
           <p:nvPr/>
         </p:nvSpPr>
         <p:spPr bwMode="auto">
           <a:xfrm>
-            <a:off x="603504" y="3857501"/>
+            <a:off x="603504" y="3857500"/>
             <a:ext cx="2377440" cy="301752"/>
           </a:xfrm>
           <a:prstGeom prst="rect">
@@ -2262,13 +2958,13 @@
       </p:sp>
       <p:sp>
         <p:nvSpPr>
-          <p:cNvPr id="292566654" name="Shape 18"/>
+          <p:cNvPr id="1712176342" name="Shape 18"/>
           <p:cNvSpPr/>
           <p:nvPr/>
         </p:nvSpPr>
         <p:spPr bwMode="auto">
           <a:xfrm>
-            <a:off x="457200" y="4264409"/>
+            <a:off x="457200" y="4264408"/>
             <a:ext cx="91440" cy="91440"/>
           </a:xfrm>
           <a:prstGeom prst="ellipse">
@@ -2287,13 +2983,13 @@
       </p:sp>
       <p:sp>
         <p:nvSpPr>
-          <p:cNvPr id="2103279120" name="Text 19"/>
+          <p:cNvPr id="371053674" name="Text 19"/>
           <p:cNvSpPr/>
           <p:nvPr/>
         </p:nvSpPr>
         <p:spPr bwMode="auto">
           <a:xfrm>
-            <a:off x="603504" y="4159253"/>
+            <a:off x="603504" y="4159252"/>
             <a:ext cx="2377440" cy="301752"/>
           </a:xfrm>
           <a:prstGeom prst="rect">
@@ -2327,14 +3023,14 @@
       </p:sp>
       <p:sp>
         <p:nvSpPr>
-          <p:cNvPr id="1518227369" name="Shape 20"/>
+          <p:cNvPr id="1851754423" name="Shape 20"/>
           <p:cNvSpPr/>
           <p:nvPr/>
         </p:nvSpPr>
         <p:spPr bwMode="auto">
           <a:xfrm>
             <a:off x="3246120" y="822960"/>
-            <a:ext cx="2834640" cy="4114800"/>
+            <a:ext cx="2834639" cy="4114800"/>
           </a:xfrm>
           <a:prstGeom prst="rect">
             <a:avLst/>
@@ -2359,14 +3055,14 @@
       </p:sp>
       <p:sp>
         <p:nvSpPr>
-          <p:cNvPr id="1418336751" name="Shape 21"/>
+          <p:cNvPr id="2065823353" name="Shape 21"/>
           <p:cNvSpPr/>
           <p:nvPr/>
         </p:nvSpPr>
         <p:spPr bwMode="auto">
           <a:xfrm>
             <a:off x="3246120" y="822960"/>
-            <a:ext cx="2834640" cy="502920"/>
+            <a:ext cx="2834639" cy="502920"/>
           </a:xfrm>
           <a:prstGeom prst="rect">
             <a:avLst/>
@@ -2384,7 +3080,7 @@
       </p:sp>
       <p:sp>
         <p:nvSpPr>
-          <p:cNvPr id="2031279350" name="Shape 22"/>
+          <p:cNvPr id="1034285224" name="Shape 22"/>
           <p:cNvSpPr/>
           <p:nvPr/>
         </p:nvSpPr>
@@ -2409,7 +3105,7 @@
       </p:sp>
       <p:pic>
         <p:nvPicPr>
-          <p:cNvPr id="1731946862" name="Image 1" descr="preencoded.png"/>
+          <p:cNvPr id="830946581" name="Image 1" descr="preencoded.png"/>
           <p:cNvPicPr>
             <a:picLocks noChangeAspect="1"/>
           </p:cNvPicPr>
@@ -2431,14 +3127,14 @@
       </p:pic>
       <p:sp>
         <p:nvSpPr>
-          <p:cNvPr id="1021581857" name="Text 23"/>
+          <p:cNvPr id="1062820552" name="Text 23"/>
           <p:cNvSpPr/>
           <p:nvPr/>
         </p:nvSpPr>
         <p:spPr bwMode="auto">
           <a:xfrm>
             <a:off x="3246120" y="1691640"/>
-            <a:ext cx="2834640" cy="365760"/>
+            <a:ext cx="2834639" cy="365760"/>
           </a:xfrm>
           <a:prstGeom prst="rect">
             <a:avLst/>
@@ -2471,13 +3167,13 @@
       </p:sp>
       <p:sp>
         <p:nvSpPr>
-          <p:cNvPr id="1206680202" name="Text 24"/>
+          <p:cNvPr id="365848990" name="Text 24"/>
           <p:cNvSpPr/>
           <p:nvPr/>
         </p:nvSpPr>
         <p:spPr bwMode="auto">
           <a:xfrm>
-            <a:off x="3383280" y="1966361"/>
+            <a:off x="3383280" y="1966360"/>
             <a:ext cx="2560320" cy="594360"/>
           </a:xfrm>
           <a:prstGeom prst="rect">
@@ -2511,13 +3207,13 @@
       </p:sp>
       <p:sp>
         <p:nvSpPr>
-          <p:cNvPr id="427221383" name="Shape 25"/>
+          <p:cNvPr id="67978994" name="Shape 25"/>
           <p:cNvSpPr/>
           <p:nvPr/>
         </p:nvSpPr>
         <p:spPr bwMode="auto">
           <a:xfrm>
-            <a:off x="3611880" y="2517071"/>
+            <a:off x="3611880" y="2517070"/>
             <a:ext cx="2103120" cy="18288"/>
           </a:xfrm>
           <a:prstGeom prst="rect">
@@ -2536,13 +3232,13 @@
       </p:sp>
       <p:sp>
         <p:nvSpPr>
-          <p:cNvPr id="1103475466" name="Shape 26"/>
+          <p:cNvPr id="589696805" name="Shape 26"/>
           <p:cNvSpPr/>
           <p:nvPr/>
         </p:nvSpPr>
         <p:spPr bwMode="auto">
           <a:xfrm>
-            <a:off x="3429000" y="2755649"/>
+            <a:off x="3429000" y="2755648"/>
             <a:ext cx="91440" cy="91440"/>
           </a:xfrm>
           <a:prstGeom prst="ellipse">
@@ -2561,13 +3257,13 @@
       </p:sp>
       <p:sp>
         <p:nvSpPr>
-          <p:cNvPr id="831923068" name="Text 27"/>
+          <p:cNvPr id="886037405" name="Text 27"/>
           <p:cNvSpPr/>
           <p:nvPr/>
         </p:nvSpPr>
         <p:spPr bwMode="auto">
           <a:xfrm>
-            <a:off x="3575303" y="2650493"/>
+            <a:off x="3575302" y="2650492"/>
             <a:ext cx="2377440" cy="301752"/>
           </a:xfrm>
           <a:prstGeom prst="rect">
@@ -2601,13 +3297,13 @@
       </p:sp>
       <p:sp>
         <p:nvSpPr>
-          <p:cNvPr id="2133835782" name="Shape 28"/>
+          <p:cNvPr id="1743505235" name="Shape 28"/>
           <p:cNvSpPr/>
           <p:nvPr/>
         </p:nvSpPr>
         <p:spPr bwMode="auto">
           <a:xfrm>
-            <a:off x="3429000" y="3057401"/>
+            <a:off x="3429000" y="3057400"/>
             <a:ext cx="91440" cy="91440"/>
           </a:xfrm>
           <a:prstGeom prst="ellipse">
@@ -2626,13 +3322,13 @@
       </p:sp>
       <p:sp>
         <p:nvSpPr>
-          <p:cNvPr id="1383775520" name="Text 29"/>
+          <p:cNvPr id="2094026964" name="Text 29"/>
           <p:cNvSpPr/>
           <p:nvPr/>
         </p:nvSpPr>
         <p:spPr bwMode="auto">
           <a:xfrm>
-            <a:off x="3575303" y="2952245"/>
+            <a:off x="3575302" y="2952244"/>
             <a:ext cx="2377440" cy="301752"/>
           </a:xfrm>
           <a:prstGeom prst="rect">
@@ -2666,14 +3362,14 @@
       </p:sp>
       <p:sp>
         <p:nvSpPr>
-          <p:cNvPr id="704237111" name="Shape 36"/>
+          <p:cNvPr id="100060438" name="Shape 36"/>
           <p:cNvSpPr/>
           <p:nvPr/>
         </p:nvSpPr>
         <p:spPr bwMode="auto">
           <a:xfrm>
             <a:off x="6217920" y="822960"/>
-            <a:ext cx="2834640" cy="4114800"/>
+            <a:ext cx="2834639" cy="4114800"/>
           </a:xfrm>
           <a:prstGeom prst="rect">
             <a:avLst/>
@@ -2698,14 +3394,14 @@
       </p:sp>
       <p:sp>
         <p:nvSpPr>
-          <p:cNvPr id="1476666852" name="Shape 37"/>
+          <p:cNvPr id="575461273" name="Shape 37"/>
           <p:cNvSpPr/>
           <p:nvPr/>
         </p:nvSpPr>
         <p:spPr bwMode="auto">
           <a:xfrm>
             <a:off x="6217920" y="822960"/>
-            <a:ext cx="2834640" cy="502920"/>
+            <a:ext cx="2834639" cy="502920"/>
           </a:xfrm>
           <a:prstGeom prst="rect">
             <a:avLst/>
@@ -2723,7 +3419,7 @@
       </p:sp>
       <p:sp>
         <p:nvSpPr>
-          <p:cNvPr id="1381881193" name="Shape 38"/>
+          <p:cNvPr id="458279529" name="Shape 38"/>
           <p:cNvSpPr/>
           <p:nvPr/>
         </p:nvSpPr>
@@ -2748,7 +3444,7 @@
       </p:sp>
       <p:pic>
         <p:nvPicPr>
-          <p:cNvPr id="738039720" name="Image 2" descr="preencoded.png"/>
+          <p:cNvPr id="750803473" name="Image 2" descr="preencoded.png"/>
           <p:cNvPicPr>
             <a:picLocks noChangeAspect="1"/>
           </p:cNvPicPr>
@@ -2770,14 +3466,14 @@
       </p:pic>
       <p:sp>
         <p:nvSpPr>
-          <p:cNvPr id="1216332869" name="Text 39"/>
+          <p:cNvPr id="711390128" name="Text 39"/>
           <p:cNvSpPr/>
           <p:nvPr/>
         </p:nvSpPr>
         <p:spPr bwMode="auto">
           <a:xfrm>
             <a:off x="6217920" y="1691640"/>
-            <a:ext cx="2834640" cy="365760"/>
+            <a:ext cx="2834639" cy="365760"/>
           </a:xfrm>
           <a:prstGeom prst="rect">
             <a:avLst/>
@@ -2810,13 +3506,13 @@
       </p:sp>
       <p:sp>
         <p:nvSpPr>
-          <p:cNvPr id="556513061" name="Text 40"/>
+          <p:cNvPr id="1142907279" name="Text 40"/>
           <p:cNvSpPr/>
           <p:nvPr/>
         </p:nvSpPr>
         <p:spPr bwMode="auto">
           <a:xfrm>
-            <a:off x="6355080" y="1966361"/>
+            <a:off x="6355080" y="1966360"/>
             <a:ext cx="2560320" cy="594360"/>
           </a:xfrm>
           <a:prstGeom prst="rect">
@@ -2850,13 +3546,13 @@
       </p:sp>
       <p:sp>
         <p:nvSpPr>
-          <p:cNvPr id="1993128445" name="Shape 41"/>
+          <p:cNvPr id="1156647590" name="Shape 41"/>
           <p:cNvSpPr/>
           <p:nvPr/>
         </p:nvSpPr>
         <p:spPr bwMode="auto">
           <a:xfrm>
-            <a:off x="6583680" y="2517071"/>
+            <a:off x="6583680" y="2517070"/>
             <a:ext cx="2103120" cy="18288"/>
           </a:xfrm>
           <a:prstGeom prst="rect">
@@ -2875,13 +3571,13 @@
       </p:sp>
       <p:sp>
         <p:nvSpPr>
-          <p:cNvPr id="1483849571" name="Shape 42"/>
+          <p:cNvPr id="1676127320" name="Shape 42"/>
           <p:cNvSpPr/>
           <p:nvPr/>
         </p:nvSpPr>
         <p:spPr bwMode="auto">
           <a:xfrm>
-            <a:off x="6400800" y="2755649"/>
+            <a:off x="6400800" y="2755648"/>
             <a:ext cx="91440" cy="91440"/>
           </a:xfrm>
           <a:prstGeom prst="ellipse">
@@ -2900,13 +3596,13 @@
       </p:sp>
       <p:sp>
         <p:nvSpPr>
-          <p:cNvPr id="17267733" name="Text 43"/>
+          <p:cNvPr id="795334068" name="Text 43"/>
           <p:cNvSpPr/>
           <p:nvPr/>
         </p:nvSpPr>
         <p:spPr bwMode="auto">
           <a:xfrm>
-            <a:off x="6547104" y="2650493"/>
+            <a:off x="6547104" y="2650492"/>
             <a:ext cx="2377440" cy="301752"/>
           </a:xfrm>
           <a:prstGeom prst="rect">
@@ -2940,13 +3636,13 @@
       </p:sp>
       <p:grpSp>
         <p:nvGrpSpPr>
-          <p:cNvPr id="1469051467" name=""/>
+          <p:cNvPr id="1709988320" name=""/>
           <p:cNvGrpSpPr/>
           <p:nvPr/>
         </p:nvGrpSpPr>
         <p:grpSpPr bwMode="auto">
           <a:xfrm>
-            <a:off x="457199" y="2650493"/>
+            <a:off x="457198" y="2650492"/>
             <a:ext cx="2523744" cy="301752"/>
             <a:chOff x="0" y="0"/>
             <a:chExt cx="2523744" cy="301752"/>
@@ -2954,13 +3650,13 @@
         </p:grpSpPr>
         <p:sp>
           <p:nvSpPr>
-            <p:cNvPr id="306292925" name="Shape 8"/>
-            <p:cNvSpPr/>
-            <p:nvPr/>
-          </p:nvSpPr>
-          <p:spPr bwMode="auto">
-            <a:xfrm>
-              <a:off x="0" y="105155"/>
+            <p:cNvPr id="1582493543" name="Shape 8"/>
+            <p:cNvSpPr/>
+            <p:nvPr/>
+          </p:nvSpPr>
+          <p:spPr bwMode="auto">
+            <a:xfrm>
+              <a:off x="0" y="105154"/>
               <a:ext cx="91440" cy="91440"/>
             </a:xfrm>
             <a:prstGeom prst="ellipse">
@@ -2979,7 +3675,7 @@
         </p:sp>
         <p:sp>
           <p:nvSpPr>
-            <p:cNvPr id="755841879" name="Text 9"/>
+            <p:cNvPr id="2033496982" name="Text 9"/>
             <p:cNvSpPr/>
             <p:nvPr/>
           </p:nvSpPr>
@@ -3020,13 +3716,13 @@
       </p:grpSp>
       <p:sp>
         <p:nvSpPr>
-          <p:cNvPr id="1691021062" name="Shape 18"/>
+          <p:cNvPr id="1734330772" name="Shape 18"/>
           <p:cNvSpPr/>
           <p:nvPr/>
         </p:nvSpPr>
         <p:spPr bwMode="auto">
           <a:xfrm>
-            <a:off x="457200" y="4566161"/>
+            <a:off x="457200" y="4566160"/>
             <a:ext cx="91440" cy="91440"/>
           </a:xfrm>
           <a:prstGeom prst="ellipse">
@@ -3045,13 +3741,13 @@
       </p:sp>
       <p:sp>
         <p:nvSpPr>
-          <p:cNvPr id="956516776" name="Text 19"/>
+          <p:cNvPr id="1130735717" name="Text 19"/>
           <p:cNvSpPr/>
           <p:nvPr/>
         </p:nvSpPr>
         <p:spPr bwMode="auto">
           <a:xfrm>
-            <a:off x="603504" y="4461005"/>
+            <a:off x="603504" y="4461004"/>
             <a:ext cx="2377440" cy="301752"/>
           </a:xfrm>
           <a:prstGeom prst="rect">
@@ -3085,13 +3781,13 @@
       </p:sp>
       <p:sp>
         <p:nvSpPr>
-          <p:cNvPr id="102904067" name="Text 29"/>
+          <p:cNvPr id="335177847" name="Text 29"/>
           <p:cNvSpPr/>
           <p:nvPr/>
         </p:nvSpPr>
         <p:spPr bwMode="auto">
           <a:xfrm>
-            <a:off x="6547104" y="2952245"/>
+            <a:off x="6547104" y="2952244"/>
             <a:ext cx="2377440" cy="301752"/>
           </a:xfrm>
           <a:prstGeom prst="rect">
@@ -3125,13 +3821,13 @@
       </p:sp>
       <p:sp>
         <p:nvSpPr>
-          <p:cNvPr id="1806457475" name="Shape 28"/>
+          <p:cNvPr id="312959200" name="Shape 28"/>
           <p:cNvSpPr/>
           <p:nvPr/>
         </p:nvSpPr>
         <p:spPr bwMode="auto">
           <a:xfrm>
-            <a:off x="6400800" y="3057401"/>
+            <a:off x="6400800" y="3057400"/>
             <a:ext cx="91440" cy="91440"/>
           </a:xfrm>
           <a:prstGeom prst="ellipse">
@@ -3164,7 +3860,7 @@
 </p:sld>
 </file>
 
-<file path=ppt/slides/slide3.xml><?xml version="1.0" encoding="utf-8"?>
+<file path=ppt/slides/slide4.xml><?xml version="1.0" encoding="utf-8"?>
 <p:sld xmlns:a="http://schemas.openxmlformats.org/drawingml/2006/main" xmlns:r="http://schemas.openxmlformats.org/officeDocument/2006/relationships" xmlns:p="http://schemas.openxmlformats.org/presentationml/2006/main" xmlns:m="http://schemas.openxmlformats.org/officeDocument/2006/math" xmlns:w="http://schemas.openxmlformats.org/wordprocessingml/2006/main" xmlns:mc="http://schemas.openxmlformats.org/markup-compatibility/2006" showMasterPhAnim="0" showMasterSp="1" show="1">
   <p:cSld name="Slide 3">
     <p:bg>
@@ -3190,7 +3886,7 @@
       </p:grpSpPr>
       <p:sp>
         <p:nvSpPr>
-          <p:cNvPr id="2054985740" name="Shape 0"/>
+          <p:cNvPr id="282886709" name="Shape 0"/>
           <p:cNvSpPr/>
           <p:nvPr/>
         </p:nvSpPr>
@@ -3215,7 +3911,7 @@
       </p:sp>
       <p:sp>
         <p:nvSpPr>
-          <p:cNvPr id="474781143" name="Text 1"/>
+          <p:cNvPr id="525780562" name="Text 1"/>
           <p:cNvSpPr/>
           <p:nvPr/>
         </p:nvSpPr>
@@ -3255,7 +3951,7 @@
       </p:sp>
       <p:sp>
         <p:nvSpPr>
-          <p:cNvPr id="2110078210" name="Shape 4"/>
+          <p:cNvPr id="1877115757" name="Shape 4"/>
           <p:cNvSpPr/>
           <p:nvPr/>
         </p:nvSpPr>
@@ -3287,7 +3983,7 @@
       </p:sp>
       <p:sp>
         <p:nvSpPr>
-          <p:cNvPr id="163811406" name="Shape 5"/>
+          <p:cNvPr id="1497626838" name="Shape 5"/>
           <p:cNvSpPr/>
           <p:nvPr/>
         </p:nvSpPr>
@@ -3312,7 +4008,7 @@
       </p:sp>
       <p:sp>
         <p:nvSpPr>
-          <p:cNvPr id="705125844" name="Text 6"/>
+          <p:cNvPr id="1979253294" name="Text 6"/>
           <p:cNvSpPr/>
           <p:nvPr/>
         </p:nvSpPr>
@@ -3352,7 +4048,7 @@
       </p:sp>
       <p:grpSp>
         <p:nvGrpSpPr>
-          <p:cNvPr id="994625162" name=""/>
+          <p:cNvPr id="569992540" name=""/>
           <p:cNvGrpSpPr/>
           <p:nvPr/>
         </p:nvGrpSpPr>
@@ -3454,7 +4150,7 @@
       </p:grpSp>
       <p:grpSp>
         <p:nvGrpSpPr>
-          <p:cNvPr id="839864385" name=""/>
+          <p:cNvPr id="915935425" name=""/>
           <p:cNvGrpSpPr/>
           <p:nvPr/>
         </p:nvGrpSpPr>
@@ -3696,7 +4392,7 @@
       </p:grpSp>
       <p:grpSp>
         <p:nvGrpSpPr>
-          <p:cNvPr id="1640545431" name=""/>
+          <p:cNvPr id="1144397625" name=""/>
           <p:cNvGrpSpPr/>
           <p:nvPr/>
         </p:nvGrpSpPr>
@@ -3873,7 +4569,7 @@
       </p:grpSp>
       <p:grpSp>
         <p:nvGrpSpPr>
-          <p:cNvPr id="1516357152" name=""/>
+          <p:cNvPr id="85849588" name=""/>
           <p:cNvGrpSpPr/>
           <p:nvPr/>
         </p:nvGrpSpPr>
@@ -4180,7 +4876,7 @@
       </p:grpSp>
       <p:grpSp>
         <p:nvGrpSpPr>
-          <p:cNvPr id="853021858" name=""/>
+          <p:cNvPr id="1593158382" name=""/>
           <p:cNvGrpSpPr/>
           <p:nvPr/>
         </p:nvGrpSpPr>
@@ -4487,7 +5183,7 @@
       </p:grpSp>
       <p:sp>
         <p:nvSpPr>
-          <p:cNvPr id="1354808675" name="Text 16"/>
+          <p:cNvPr id="889094402" name="Text 16"/>
           <p:cNvSpPr/>
           <p:nvPr/>
         </p:nvSpPr>
@@ -4516,7 +5212,7 @@
       </p:sp>
       <p:grpSp>
         <p:nvGrpSpPr>
-          <p:cNvPr id="1905802386" name=""/>
+          <p:cNvPr id="758510439" name=""/>
           <p:cNvGrpSpPr/>
           <p:nvPr/>
         </p:nvGrpSpPr>
@@ -4596,7 +5292,7 @@
       </p:grpSp>
       <p:grpSp>
         <p:nvGrpSpPr>
-          <p:cNvPr id="475242618" name=""/>
+          <p:cNvPr id="1384872140" name=""/>
           <p:cNvGrpSpPr/>
           <p:nvPr/>
         </p:nvGrpSpPr>
@@ -4676,13 +5372,13 @@
       </p:grpSp>
       <p:grpSp>
         <p:nvGrpSpPr>
-          <p:cNvPr id="1481382763" name=""/>
+          <p:cNvPr id="1479224478" name=""/>
           <p:cNvGrpSpPr/>
           <p:nvPr/>
         </p:nvGrpSpPr>
         <p:grpSpPr bwMode="auto">
           <a:xfrm>
-            <a:off x="367146" y="2090737"/>
+            <a:off x="367146" y="2090736"/>
             <a:ext cx="1965960" cy="274320"/>
             <a:chOff x="0" y="0"/>
             <a:chExt cx="1965960" cy="274320"/>
@@ -4756,7 +5452,7 @@
       </p:grpSp>
       <p:grpSp>
         <p:nvGrpSpPr>
-          <p:cNvPr id="694491866" name=""/>
+          <p:cNvPr id="1404701487" name=""/>
           <p:cNvGrpSpPr/>
           <p:nvPr/>
         </p:nvGrpSpPr>
@@ -4836,7 +5532,7 @@
       </p:grpSp>
       <p:grpSp>
         <p:nvGrpSpPr>
-          <p:cNvPr id="1902586624" name=""/>
+          <p:cNvPr id="1869321367" name=""/>
           <p:cNvGrpSpPr/>
           <p:nvPr/>
         </p:nvGrpSpPr>
@@ -4916,7 +5612,7 @@
       </p:grpSp>
       <p:grpSp>
         <p:nvGrpSpPr>
-          <p:cNvPr id="116250813" name=""/>
+          <p:cNvPr id="444435900" name=""/>
           <p:cNvGrpSpPr/>
           <p:nvPr/>
         </p:nvGrpSpPr>
@@ -4996,7 +5692,7 @@
       </p:grpSp>
       <p:grpSp>
         <p:nvGrpSpPr>
-          <p:cNvPr id="1572254292" name=""/>
+          <p:cNvPr id="1574865308" name=""/>
           <p:cNvGrpSpPr/>
           <p:nvPr/>
         </p:nvGrpSpPr>
@@ -5076,7 +5772,7 @@
       </p:grpSp>
       <p:grpSp>
         <p:nvGrpSpPr>
-          <p:cNvPr id="285733524" name=""/>
+          <p:cNvPr id="651494589" name=""/>
           <p:cNvGrpSpPr/>
           <p:nvPr/>
         </p:nvGrpSpPr>
@@ -5156,7 +5852,7 @@
       </p:grpSp>
       <p:grpSp>
         <p:nvGrpSpPr>
-          <p:cNvPr id="1552724000" name=""/>
+          <p:cNvPr id="2007303275" name=""/>
           <p:cNvGrpSpPr/>
           <p:nvPr/>
         </p:nvGrpSpPr>
@@ -5236,7 +5932,7 @@
       </p:grpSp>
       <p:grpSp>
         <p:nvGrpSpPr>
-          <p:cNvPr id="251674757" name=""/>
+          <p:cNvPr id="1596930929" name=""/>
           <p:cNvGrpSpPr/>
           <p:nvPr/>
         </p:nvGrpSpPr>
@@ -5316,7 +6012,7 @@
       </p:grpSp>
       <p:sp>
         <p:nvSpPr>
-          <p:cNvPr id="445543096" name="Shape 29"/>
+          <p:cNvPr id="2069487272" name="Shape 29"/>
           <p:cNvSpPr/>
           <p:nvPr/>
         </p:nvSpPr>
@@ -5339,13 +6035,13 @@
       </p:sp>
       <p:sp>
         <p:nvSpPr>
-          <p:cNvPr id="1493013716" name="Shape 29"/>
+          <p:cNvPr id="244081076" name="Shape 29"/>
           <p:cNvSpPr/>
           <p:nvPr/>
         </p:nvSpPr>
         <p:spPr bwMode="auto">
           <a:xfrm flipH="0" flipV="1">
-            <a:off x="4915111" y="1804892"/>
+            <a:off x="4915111" y="1804891"/>
             <a:ext cx="1796977" cy="2124274"/>
           </a:xfrm>
           <a:prstGeom prst="line">
@@ -5362,7 +6058,7 @@
       </p:sp>
       <p:sp>
         <p:nvSpPr>
-          <p:cNvPr id="27726091" name="Shape 29"/>
+          <p:cNvPr id="1032347988" name="Shape 29"/>
           <p:cNvSpPr/>
           <p:nvPr/>
         </p:nvSpPr>
@@ -5385,7 +6081,7 @@
       </p:sp>
       <p:sp>
         <p:nvSpPr>
-          <p:cNvPr id="2062731692" name="Shape 29"/>
+          <p:cNvPr id="1623794016" name="Shape 29"/>
           <p:cNvSpPr/>
           <p:nvPr/>
         </p:nvSpPr>
@@ -5408,7 +6104,7 @@
       </p:sp>
       <p:sp>
         <p:nvSpPr>
-          <p:cNvPr id="1125952822" name="Shape 29"/>
+          <p:cNvPr id="770799788" name="Shape 29"/>
           <p:cNvSpPr/>
           <p:nvPr/>
         </p:nvSpPr>
@@ -5431,7 +6127,7 @@
       </p:sp>
       <p:sp>
         <p:nvSpPr>
-          <p:cNvPr id="1502915624" name="Shape 29"/>
+          <p:cNvPr id="281415860" name="Shape 29"/>
           <p:cNvSpPr/>
           <p:nvPr/>
         </p:nvSpPr>
@@ -5454,7 +6150,7 @@
       </p:sp>
       <p:sp>
         <p:nvSpPr>
-          <p:cNvPr id="116320098" name="Shape 29"/>
+          <p:cNvPr id="195820026" name="Shape 29"/>
           <p:cNvSpPr/>
           <p:nvPr/>
         </p:nvSpPr>
@@ -5477,7 +6173,7 @@
       </p:sp>
       <p:sp>
         <p:nvSpPr>
-          <p:cNvPr id="1858704479" name="Shape 29"/>
+          <p:cNvPr id="1280921635" name="Shape 29"/>
           <p:cNvSpPr/>
           <p:nvPr/>
         </p:nvSpPr>
@@ -5500,7 +6196,7 @@
       </p:sp>
       <p:sp>
         <p:nvSpPr>
-          <p:cNvPr id="728849769" name="Shape 29"/>
+          <p:cNvPr id="1841530576" name="Shape 29"/>
           <p:cNvSpPr/>
           <p:nvPr/>
         </p:nvSpPr>
@@ -5537,7 +6233,7 @@
 </p:sld>
 </file>
 
-<file path=ppt/slides/slide4.xml><?xml version="1.0" encoding="utf-8"?>
+<file path=ppt/slides/slide5.xml><?xml version="1.0" encoding="utf-8"?>
 <p:sld xmlns:a="http://schemas.openxmlformats.org/drawingml/2006/main" xmlns:r="http://schemas.openxmlformats.org/officeDocument/2006/relationships" xmlns:p="http://schemas.openxmlformats.org/presentationml/2006/main" xmlns:m="http://schemas.openxmlformats.org/officeDocument/2006/math" xmlns:w="http://schemas.openxmlformats.org/wordprocessingml/2006/main" xmlns:mc="http://schemas.openxmlformats.org/markup-compatibility/2006" showMasterPhAnim="0" showMasterSp="1" show="1">
   <p:cSld name="Slide 4">
     <p:bg>
@@ -5563,7 +6259,7 @@
       </p:grpSpPr>
       <p:sp>
         <p:nvSpPr>
-          <p:cNvPr id="64757273" name="Shape 0"/>
+          <p:cNvPr id="543744256" name="Shape 0"/>
           <p:cNvSpPr/>
           <p:nvPr/>
         </p:nvSpPr>
@@ -5588,7 +6284,7 @@
       </p:sp>
       <p:sp>
         <p:nvSpPr>
-          <p:cNvPr id="85538965" name="Text 1"/>
+          <p:cNvPr id="1982528409" name="Text 1"/>
           <p:cNvSpPr/>
           <p:nvPr/>
         </p:nvSpPr>
@@ -5628,7 +6324,7 @@
       </p:sp>
       <p:sp>
         <p:nvSpPr>
-          <p:cNvPr id="977289989" name="Shape 2"/>
+          <p:cNvPr id="541583665" name="Shape 2"/>
           <p:cNvSpPr/>
           <p:nvPr/>
         </p:nvSpPr>
@@ -5653,7 +6349,7 @@
       </p:sp>
       <p:sp>
         <p:nvSpPr>
-          <p:cNvPr id="129688182" name="Text 3"/>
+          <p:cNvPr id="854303786" name="Text 3"/>
           <p:cNvSpPr/>
           <p:nvPr/>
         </p:nvSpPr>
@@ -5693,7 +6389,7 @@
       </p:sp>
       <p:sp>
         <p:nvSpPr>
-          <p:cNvPr id="275406440" name="Shape 29"/>
+          <p:cNvPr id="418006842" name="Shape 29"/>
           <p:cNvSpPr/>
           <p:nvPr/>
         </p:nvSpPr>
@@ -5716,7 +6412,7 @@
       </p:sp>
       <p:grpSp>
         <p:nvGrpSpPr>
-          <p:cNvPr id="735815316" name=""/>
+          <p:cNvPr id="2024097410" name=""/>
           <p:cNvGrpSpPr/>
           <p:nvPr/>
         </p:nvGrpSpPr>
@@ -5818,7 +6514,7 @@
       </p:grpSp>
       <p:grpSp>
         <p:nvGrpSpPr>
-          <p:cNvPr id="36681381" name=""/>
+          <p:cNvPr id="356422063" name=""/>
           <p:cNvGrpSpPr/>
           <p:nvPr/>
         </p:nvGrpSpPr>
@@ -6071,7 +6767,7 @@
       </p:grpSp>
       <p:sp>
         <p:nvSpPr>
-          <p:cNvPr id="1957263967" name="Shape 29"/>
+          <p:cNvPr id="950424189" name="Shape 29"/>
           <p:cNvSpPr/>
           <p:nvPr/>
         </p:nvSpPr>
@@ -6094,7 +6790,7 @@
       </p:sp>
       <p:grpSp>
         <p:nvGrpSpPr>
-          <p:cNvPr id="695027189" name=""/>
+          <p:cNvPr id="49841512" name=""/>
           <p:cNvGrpSpPr/>
           <p:nvPr/>
         </p:nvGrpSpPr>
@@ -6336,7 +7032,7 @@
       </p:grpSp>
       <p:sp>
         <p:nvSpPr>
-          <p:cNvPr id="572453217" name="Shape 29"/>
+          <p:cNvPr id="828176004" name="Shape 29"/>
           <p:cNvSpPr/>
           <p:nvPr/>
         </p:nvSpPr>
@@ -6376,7 +7072,7 @@
 </p:sld>
 </file>
 
-<file path=ppt/slides/slide5.xml><?xml version="1.0" encoding="utf-8"?>
+<file path=ppt/slides/slide6.xml><?xml version="1.0" encoding="utf-8"?>
 <p:sld xmlns:a="http://schemas.openxmlformats.org/drawingml/2006/main" xmlns:r="http://schemas.openxmlformats.org/officeDocument/2006/relationships" xmlns:p="http://schemas.openxmlformats.org/presentationml/2006/main" xmlns:m="http://schemas.openxmlformats.org/officeDocument/2006/math" xmlns:w="http://schemas.openxmlformats.org/wordprocessingml/2006/main" xmlns:mc="http://schemas.openxmlformats.org/markup-compatibility/2006" showMasterPhAnim="0" showMasterSp="1" show="1">
   <p:cSld name="Slide 5">
     <p:bg>
@@ -6402,7 +7098,7 @@
       </p:grpSpPr>
       <p:sp>
         <p:nvSpPr>
-          <p:cNvPr id="1516136786" name="Shape 0"/>
+          <p:cNvPr id="403694426" name="Shape 0"/>
           <p:cNvSpPr/>
           <p:nvPr/>
         </p:nvSpPr>
@@ -6427,7 +7123,7 @@
       </p:sp>
       <p:sp>
         <p:nvSpPr>
-          <p:cNvPr id="407909793" name="Text 1"/>
+          <p:cNvPr id="1821057486" name="Text 1"/>
           <p:cNvSpPr/>
           <p:nvPr/>
         </p:nvSpPr>
@@ -6467,7 +7163,7 @@
       </p:sp>
       <p:sp>
         <p:nvSpPr>
-          <p:cNvPr id="1343833593" name="Shape 2"/>
+          <p:cNvPr id="1102863839" name="Shape 2"/>
           <p:cNvSpPr/>
           <p:nvPr/>
         </p:nvSpPr>
@@ -6492,7 +7188,7 @@
       </p:sp>
       <p:sp>
         <p:nvSpPr>
-          <p:cNvPr id="1287430715" name="Text 3"/>
+          <p:cNvPr id="1820103822" name="Text 3"/>
           <p:cNvSpPr/>
           <p:nvPr/>
         </p:nvSpPr>
@@ -6532,7 +7228,7 @@
       </p:sp>
       <p:grpSp>
         <p:nvGrpSpPr>
-          <p:cNvPr id="303881977" name=""/>
+          <p:cNvPr id="1583501093" name=""/>
           <p:cNvGrpSpPr/>
           <p:nvPr/>
         </p:nvGrpSpPr>
@@ -6634,7 +7330,7 @@
       </p:grpSp>
       <p:grpSp>
         <p:nvGrpSpPr>
-          <p:cNvPr id="757432676" name=""/>
+          <p:cNvPr id="1347959176" name=""/>
           <p:cNvGrpSpPr/>
           <p:nvPr/>
         </p:nvGrpSpPr>
@@ -6811,14 +7507,14 @@
       </p:grpSp>
       <p:sp>
         <p:nvSpPr>
-          <p:cNvPr id="1133814419" name="Shape 29"/>
+          <p:cNvPr id="1321497680" name="Shape 29"/>
           <p:cNvSpPr/>
           <p:nvPr/>
         </p:nvSpPr>
         <p:spPr bwMode="auto">
           <a:xfrm flipH="0" flipV="0">
             <a:off x="1972404" y="2181402"/>
-            <a:ext cx="2312445" cy="1460575"/>
+            <a:ext cx="2312445" cy="1460574"/>
           </a:xfrm>
           <a:prstGeom prst="line">
             <a:avLst/>
@@ -6834,7 +7530,7 @@
       </p:sp>
       <p:grpSp>
         <p:nvGrpSpPr>
-          <p:cNvPr id="1609590487" name=""/>
+          <p:cNvPr id="452975052" name=""/>
           <p:cNvGrpSpPr/>
           <p:nvPr/>
         </p:nvGrpSpPr>
@@ -7011,14 +7707,14 @@
       </p:grpSp>
       <p:sp>
         <p:nvSpPr>
-          <p:cNvPr id="548506516" name="Shape 29"/>
+          <p:cNvPr id="2109636821" name="Shape 29"/>
           <p:cNvSpPr/>
           <p:nvPr/>
         </p:nvSpPr>
         <p:spPr bwMode="auto">
           <a:xfrm flipH="1" flipV="0">
             <a:off x="4872462" y="2181402"/>
-            <a:ext cx="1955040" cy="1460575"/>
+            <a:ext cx="1955040" cy="1460574"/>
           </a:xfrm>
           <a:prstGeom prst="line">
             <a:avLst/>
@@ -7034,7 +7730,7 @@
       </p:sp>
       <p:sp>
         <p:nvSpPr>
-          <p:cNvPr id="234278546" name="Shape 29"/>
+          <p:cNvPr id="1371377885" name="Shape 29"/>
           <p:cNvSpPr/>
           <p:nvPr/>
         </p:nvSpPr>
@@ -7071,7 +7767,7 @@
 </p:sld>
 </file>
 
-<file path=ppt/slides/slide6.xml><?xml version="1.0" encoding="utf-8"?>
+<file path=ppt/slides/slide7.xml><?xml version="1.0" encoding="utf-8"?>
 <p:sld xmlns:a="http://schemas.openxmlformats.org/drawingml/2006/main" xmlns:r="http://schemas.openxmlformats.org/officeDocument/2006/relationships" xmlns:p="http://schemas.openxmlformats.org/presentationml/2006/main" xmlns:m="http://schemas.openxmlformats.org/officeDocument/2006/math" xmlns:w="http://schemas.openxmlformats.org/wordprocessingml/2006/main" xmlns:mc="http://schemas.openxmlformats.org/markup-compatibility/2006" showMasterPhAnim="0" showMasterSp="1" show="1">
   <p:cSld name="Slide 6">
     <p:bg>
@@ -7097,7 +7793,7 @@
       </p:grpSpPr>
       <p:sp>
         <p:nvSpPr>
-          <p:cNvPr id="784719411" name="Shape 0"/>
+          <p:cNvPr id="789973257" name="Shape 0"/>
           <p:cNvSpPr/>
           <p:nvPr/>
         </p:nvSpPr>
@@ -7122,7 +7818,7 @@
       </p:sp>
       <p:sp>
         <p:nvSpPr>
-          <p:cNvPr id="1520641848" name="Text 1"/>
+          <p:cNvPr id="1580706496" name="Text 1"/>
           <p:cNvSpPr/>
           <p:nvPr/>
         </p:nvSpPr>
@@ -7162,7 +7858,7 @@
       </p:sp>
       <p:grpSp>
         <p:nvGrpSpPr>
-          <p:cNvPr id="573649606" name=""/>
+          <p:cNvPr id="1460376541" name=""/>
           <p:cNvGrpSpPr/>
           <p:nvPr/>
         </p:nvGrpSpPr>
@@ -7402,7 +8098,7 @@
           </p:nvSpPr>
           <p:spPr bwMode="auto">
             <a:xfrm>
-              <a:off x="7832410" y="0"/>
+              <a:off x="7832409" y="0"/>
               <a:ext cx="1336116" cy="321600"/>
             </a:xfrm>
             <a:prstGeom prst="rect">
